--- a/ppt files/Weihai_vDRAFT.pptx
+++ b/ppt files/Weihai_vDRAFT.pptx
@@ -3627,7 +3627,7 @@
         </p:nvGraphicFramePr>
         <p:xfrm>
           <a:off x="274320" y="1170432"/>
-          <a:ext cx="4709158" cy="2414016"/>
+          <a:ext cx="4709158" cy="2468880"/>
         </p:xfrm>
         <a:graphic>
           <a:graphicData uri="http://schemas.openxmlformats.org/drawingml/2006/table">
@@ -3643,7 +3643,7 @@
                 <a:gridCol w="800557"/>
                 <a:gridCol w="800557"/>
               </a:tblGrid>
-              <a:tr h="402336">
+              <a:tr h="352697">
                 <a:tc>
                   <a:txBody>
                     <a:bodyPr wrap="none"/>
@@ -3783,7 +3783,7 @@
                   </a:tcPr>
                 </a:tc>
               </a:tr>
-              <a:tr h="402336">
+              <a:tr h="352697">
                 <a:tc>
                   <a:txBody>
                     <a:bodyPr wrap="none"/>
@@ -3923,7 +3923,7 @@
                   </a:tcPr>
                 </a:tc>
               </a:tr>
-              <a:tr h="402336">
+              <a:tr h="352697">
                 <a:tc>
                   <a:txBody>
                     <a:bodyPr wrap="none"/>
@@ -4063,7 +4063,7 @@
                   </a:tcPr>
                 </a:tc>
               </a:tr>
-              <a:tr h="402336">
+              <a:tr h="352697">
                 <a:tc>
                   <a:txBody>
                     <a:bodyPr wrap="none"/>
@@ -4203,7 +4203,7 @@
                   </a:tcPr>
                 </a:tc>
               </a:tr>
-              <a:tr h="402336">
+              <a:tr h="352697">
                 <a:tc>
                   <a:txBody>
                     <a:bodyPr wrap="none"/>
@@ -4343,7 +4343,7 @@
                   </a:tcPr>
                 </a:tc>
               </a:tr>
-              <a:tr h="402336">
+              <a:tr h="352697">
                 <a:tc>
                   <a:txBody>
                     <a:bodyPr wrap="none"/>
@@ -4479,6 +4479,146 @@
                   <a:tcPr>
                     <a:solidFill>
                       <a:srgbClr val="FFFFFF"/>
+                    </a:solidFill>
+                  </a:tcPr>
+                </a:tc>
+              </a:tr>
+              <a:tr h="352698">
+                <a:tc>
+                  <a:txBody>
+                    <a:bodyPr wrap="none"/>
+                    <a:lstStyle/>
+                    <a:p>
+                      <a:pPr algn="ctr"/>
+                      <a:r>
+                        <a:rPr sz="1000" b="0" i="0">
+                          <a:solidFill>
+                            <a:srgbClr val="262626"/>
+                          </a:solidFill>
+                          <a:latin typeface="Arial"/>
+                        </a:rPr>
+                        <a:t>2026</a:t>
+                      </a:r>
+                    </a:p>
+                  </a:txBody>
+                  <a:tcPr>
+                    <a:solidFill>
+                      <a:srgbClr val="F2F2F2"/>
+                    </a:solidFill>
+                  </a:tcPr>
+                </a:tc>
+                <a:tc>
+                  <a:txBody>
+                    <a:bodyPr wrap="none"/>
+                    <a:lstStyle/>
+                    <a:p>
+                      <a:pPr algn="ctr"/>
+                      <a:r>
+                        <a:rPr sz="1000" b="0" i="0">
+                          <a:solidFill>
+                            <a:srgbClr val="262626"/>
+                          </a:solidFill>
+                          <a:latin typeface="Arial"/>
+                        </a:rPr>
+                        <a:t>Aug 29</a:t>
+                      </a:r>
+                    </a:p>
+                  </a:txBody>
+                  <a:tcPr>
+                    <a:solidFill>
+                      <a:srgbClr val="F2F2F2"/>
+                    </a:solidFill>
+                  </a:tcPr>
+                </a:tc>
+                <a:tc>
+                  <a:txBody>
+                    <a:bodyPr wrap="none"/>
+                    <a:lstStyle/>
+                    <a:p>
+                      <a:pPr algn="ctr"/>
+                      <a:r>
+                        <a:rPr sz="1000" b="0" i="0">
+                          <a:solidFill>
+                            <a:srgbClr val="262626"/>
+                          </a:solidFill>
+                          <a:latin typeface="Arial"/>
+                        </a:rPr>
+                        <a:t>24.1</a:t>
+                      </a:r>
+                    </a:p>
+                  </a:txBody>
+                  <a:tcPr>
+                    <a:solidFill>
+                      <a:srgbClr val="F2F2F2"/>
+                    </a:solidFill>
+                  </a:tcPr>
+                </a:tc>
+                <a:tc>
+                  <a:txBody>
+                    <a:bodyPr wrap="none"/>
+                    <a:lstStyle/>
+                    <a:p>
+                      <a:pPr algn="ctr"/>
+                      <a:r>
+                        <a:rPr sz="1000" b="0" i="0">
+                          <a:solidFill>
+                            <a:srgbClr val="262626"/>
+                          </a:solidFill>
+                          <a:latin typeface="Arial"/>
+                        </a:rPr>
+                        <a:t>84%</a:t>
+                      </a:r>
+                    </a:p>
+                  </a:txBody>
+                  <a:tcPr>
+                    <a:solidFill>
+                      <a:srgbClr val="F2F2F2"/>
+                    </a:solidFill>
+                  </a:tcPr>
+                </a:tc>
+                <a:tc>
+                  <a:txBody>
+                    <a:bodyPr wrap="none"/>
+                    <a:lstStyle/>
+                    <a:p>
+                      <a:pPr algn="ctr"/>
+                      <a:r>
+                        <a:rPr sz="1000" b="0" i="0">
+                          <a:solidFill>
+                            <a:srgbClr val="262626"/>
+                          </a:solidFill>
+                          <a:latin typeface="Arial"/>
+                        </a:rPr>
+                        <a:t>9</a:t>
+                      </a:r>
+                    </a:p>
+                  </a:txBody>
+                  <a:tcPr>
+                    <a:solidFill>
+                      <a:srgbClr val="F2F2F2"/>
+                    </a:solidFill>
+                  </a:tcPr>
+                </a:tc>
+                <a:tc>
+                  <a:txBody>
+                    <a:bodyPr wrap="none"/>
+                    <a:lstStyle/>
+                    <a:p>
+                      <a:pPr algn="ctr"/>
+                      <a:r>
+                        <a:rPr sz="1000" b="0" i="0">
+                          <a:solidFill>
+                            <a:srgbClr val="262626"/>
+                          </a:solidFill>
+                          <a:latin typeface="Arial"/>
+                        </a:rPr>
+                        <a:t>1.3</a:t>
+                      </a:r>
+                    </a:p>
+                  </a:txBody>
+                  <a:tcPr>
+                    <a:solidFill>
+                      <a:srgbClr val="F2F2F2"/>
                     </a:solidFill>
                   </a:tcPr>
                 </a:tc>
@@ -4575,7 +4715,7 @@
         </p:nvGraphicFramePr>
         <p:xfrm>
           <a:off x="5166360" y="1170432"/>
-          <a:ext cx="4069078" cy="2414016"/>
+          <a:ext cx="4069078" cy="2468880"/>
         </p:xfrm>
         <a:graphic>
           <a:graphicData uri="http://schemas.openxmlformats.org/drawingml/2006/table">
@@ -4590,7 +4730,7 @@
                 <a:gridCol w="823504"/>
                 <a:gridCol w="1065711"/>
               </a:tblGrid>
-              <a:tr h="402336">
+              <a:tr h="352697">
                 <a:tc>
                   <a:txBody>
                     <a:bodyPr wrap="none"/>
@@ -4707,7 +4847,7 @@
                   </a:tcPr>
                 </a:tc>
               </a:tr>
-              <a:tr h="402336">
+              <a:tr h="352697">
                 <a:tc>
                   <a:txBody>
                     <a:bodyPr wrap="none"/>
@@ -4824,7 +4964,7 @@
                   </a:tcPr>
                 </a:tc>
               </a:tr>
-              <a:tr h="402336">
+              <a:tr h="352697">
                 <a:tc>
                   <a:txBody>
                     <a:bodyPr wrap="none"/>
@@ -4941,7 +5081,7 @@
                   </a:tcPr>
                 </a:tc>
               </a:tr>
-              <a:tr h="402336">
+              <a:tr h="352697">
                 <a:tc>
                   <a:txBody>
                     <a:bodyPr wrap="none"/>
@@ -5058,7 +5198,7 @@
                   </a:tcPr>
                 </a:tc>
               </a:tr>
-              <a:tr h="402336">
+              <a:tr h="352697">
                 <a:tc>
                   <a:txBody>
                     <a:bodyPr wrap="none"/>
@@ -5175,7 +5315,7 @@
                   </a:tcPr>
                 </a:tc>
               </a:tr>
-              <a:tr h="402336">
+              <a:tr h="352697">
                 <a:tc>
                   <a:txBody>
                     <a:bodyPr wrap="none"/>
@@ -5288,6 +5428,123 @@
                   <a:tcPr>
                     <a:solidFill>
                       <a:srgbClr val="FFFFFF"/>
+                    </a:solidFill>
+                  </a:tcPr>
+                </a:tc>
+              </a:tr>
+              <a:tr h="352698">
+                <a:tc>
+                  <a:txBody>
+                    <a:bodyPr wrap="none"/>
+                    <a:lstStyle/>
+                    <a:p>
+                      <a:pPr algn="ctr"/>
+                      <a:r>
+                        <a:rPr sz="1000" b="0" i="0">
+                          <a:solidFill>
+                            <a:srgbClr val="262626"/>
+                          </a:solidFill>
+                          <a:latin typeface="Arial"/>
+                        </a:rPr>
+                        <a:t>2026</a:t>
+                      </a:r>
+                    </a:p>
+                  </a:txBody>
+                  <a:tcPr>
+                    <a:solidFill>
+                      <a:srgbClr val="F2F2F2"/>
+                    </a:solidFill>
+                  </a:tcPr>
+                </a:tc>
+                <a:tc>
+                  <a:txBody>
+                    <a:bodyPr wrap="none"/>
+                    <a:lstStyle/>
+                    <a:p>
+                      <a:pPr algn="ctr"/>
+                      <a:r>
+                        <a:rPr sz="1000" b="0" i="0">
+                          <a:solidFill>
+                            <a:srgbClr val="262626"/>
+                          </a:solidFill>
+                          <a:latin typeface="Arial"/>
+                        </a:rPr>
+                        <a:t>14.5</a:t>
+                      </a:r>
+                    </a:p>
+                  </a:txBody>
+                  <a:tcPr>
+                    <a:solidFill>
+                      <a:srgbClr val="F2F2F2"/>
+                    </a:solidFill>
+                  </a:tcPr>
+                </a:tc>
+                <a:tc>
+                  <a:txBody>
+                    <a:bodyPr wrap="none"/>
+                    <a:lstStyle/>
+                    <a:p>
+                      <a:pPr algn="ctr"/>
+                      <a:r>
+                        <a:rPr sz="1000" b="0" i="0">
+                          <a:solidFill>
+                            <a:srgbClr val="262626"/>
+                          </a:solidFill>
+                          <a:latin typeface="Arial"/>
+                        </a:rPr>
+                        <a:t>46</a:t>
+                      </a:r>
+                    </a:p>
+                  </a:txBody>
+                  <a:tcPr>
+                    <a:solidFill>
+                      <a:srgbClr val="F2F2F2"/>
+                    </a:solidFill>
+                  </a:tcPr>
+                </a:tc>
+                <a:tc>
+                  <a:txBody>
+                    <a:bodyPr wrap="none"/>
+                    <a:lstStyle/>
+                    <a:p>
+                      <a:pPr algn="ctr"/>
+                      <a:r>
+                        <a:rPr sz="1000" b="0" i="0">
+                          <a:solidFill>
+                            <a:srgbClr val="262626"/>
+                          </a:solidFill>
+                          <a:latin typeface="Arial"/>
+                        </a:rPr>
+                        <a:t>2.1</a:t>
+                      </a:r>
+                    </a:p>
+                  </a:txBody>
+                  <a:tcPr>
+                    <a:solidFill>
+                      <a:srgbClr val="F2F2F2"/>
+                    </a:solidFill>
+                  </a:tcPr>
+                </a:tc>
+                <a:tc>
+                  <a:txBody>
+                    <a:bodyPr wrap="none"/>
+                    <a:lstStyle/>
+                    <a:p>
+                      <a:pPr algn="ctr"/>
+                      <a:r>
+                        <a:rPr sz="1000" b="0" i="0">
+                          <a:solidFill>
+                            <a:srgbClr val="262626"/>
+                          </a:solidFill>
+                          <a:latin typeface="Arial"/>
+                        </a:rPr>
+                        <a:t>Moderate</a:t>
+                      </a:r>
+                    </a:p>
+                  </a:txBody>
+                  <a:tcPr>
+                    <a:solidFill>
+                      <a:srgbClr val="F2F2F2"/>
                     </a:solidFill>
                   </a:tcPr>
                 </a:tc>
@@ -5339,7 +5596,7 @@
         </p:nvSpPr>
         <p:spPr>
           <a:xfrm>
-            <a:off x="274320" y="3813048"/>
+            <a:off x="274320" y="3867912"/>
             <a:ext cx="11640312" cy="320040"/>
           </a:xfrm>
           <a:prstGeom prst="rect">
@@ -5382,7 +5639,7 @@
         </p:nvSpPr>
         <p:spPr>
           <a:xfrm>
-            <a:off x="320040" y="3831336"/>
+            <a:off x="320040" y="3886200"/>
             <a:ext cx="11155680" cy="274320"/>
           </a:xfrm>
           <a:prstGeom prst="rect">
@@ -5417,8 +5674,8 @@
         </p:nvSpPr>
         <p:spPr>
           <a:xfrm>
-            <a:off x="365760" y="4197096"/>
-            <a:ext cx="11430000" cy="619506"/>
+            <a:off x="365760" y="4251960"/>
+            <a:ext cx="11430000" cy="605790"/>
           </a:xfrm>
           <a:prstGeom prst="rect">
             <a:avLst/>
@@ -5452,8 +5709,8 @@
         </p:nvSpPr>
         <p:spPr>
           <a:xfrm>
-            <a:off x="365760" y="4816602"/>
-            <a:ext cx="11430000" cy="619506"/>
+            <a:off x="365760" y="4857750"/>
+            <a:ext cx="11430000" cy="605790"/>
           </a:xfrm>
           <a:prstGeom prst="rect">
             <a:avLst/>
@@ -5487,8 +5744,8 @@
         </p:nvSpPr>
         <p:spPr>
           <a:xfrm>
-            <a:off x="365760" y="5436108"/>
-            <a:ext cx="11430000" cy="619506"/>
+            <a:off x="365760" y="5463540"/>
+            <a:ext cx="11430000" cy="605790"/>
           </a:xfrm>
           <a:prstGeom prst="rect">
             <a:avLst/>
@@ -5522,8 +5779,8 @@
         </p:nvSpPr>
         <p:spPr>
           <a:xfrm>
-            <a:off x="365760" y="6055614"/>
-            <a:ext cx="11430000" cy="619506"/>
+            <a:off x="365760" y="6069330"/>
+            <a:ext cx="11430000" cy="605790"/>
           </a:xfrm>
           <a:prstGeom prst="rect">
             <a:avLst/>
@@ -5941,7 +6198,7 @@
                 </a:solidFill>
                 <a:latin typeface="Arial"/>
               </a:rPr>
-              <a:t>Top 10 Ranked on Startlist</a:t>
+              <a:t>Top 10 by World Ranking</a:t>
             </a:r>
           </a:p>
         </p:txBody>
@@ -6100,7 +6357,7 @@
                           </a:solidFill>
                           <a:latin typeface="Arial"/>
                         </a:rPr>
-                        <a:t>7,297</a:t>
+                        <a:t>7,044</a:t>
                       </a:r>
                     </a:p>
                   </a:txBody>
@@ -6125,7 +6382,7 @@
                           </a:solidFill>
                           <a:latin typeface="Arial"/>
                         </a:rPr>
-                        <a:t>5</a:t>
+                        <a:t>2</a:t>
                       </a:r>
                     </a:p>
                   </a:txBody>
@@ -6148,7 +6405,7 @@
                           </a:solidFill>
                           <a:latin typeface="Arial"/>
                         </a:rPr>
-                        <a:t>Csongor Lehmann</a:t>
+                        <a:t>Vasco Vilaca</a:t>
                       </a:r>
                     </a:p>
                   </a:txBody>
@@ -6171,7 +6428,7 @@
                           </a:solidFill>
                           <a:latin typeface="Arial"/>
                         </a:rPr>
-                        <a:t>5,281</a:t>
+                        <a:t>6,930</a:t>
                       </a:r>
                     </a:p>
                   </a:txBody>
@@ -6196,7 +6453,7 @@
                           </a:solidFill>
                           <a:latin typeface="Arial"/>
                         </a:rPr>
-                        <a:t>6</a:t>
+                        <a:t>3</a:t>
                       </a:r>
                     </a:p>
                   </a:txBody>
@@ -6219,7 +6476,7 @@
                           </a:solidFill>
                           <a:latin typeface="Arial"/>
                         </a:rPr>
-                        <a:t>David Cantero Del Campo</a:t>
+                        <a:t>Miguel Hidalgo</a:t>
                       </a:r>
                     </a:p>
                   </a:txBody>
@@ -6242,7 +6499,7 @@
                           </a:solidFill>
                           <a:latin typeface="Arial"/>
                         </a:rPr>
-                        <a:t>5,092</a:t>
+                        <a:t>6,531</a:t>
                       </a:r>
                     </a:p>
                   </a:txBody>
@@ -6267,7 +6524,7 @@
                           </a:solidFill>
                           <a:latin typeface="Arial"/>
                         </a:rPr>
-                        <a:t>7</a:t>
+                        <a:t>4</a:t>
                       </a:r>
                     </a:p>
                   </a:txBody>
@@ -6290,7 +6547,7 @@
                           </a:solidFill>
                           <a:latin typeface="Arial"/>
                         </a:rPr>
-                        <a:t>Luke Willian</a:t>
+                        <a:t>Henry Graf</a:t>
                       </a:r>
                     </a:p>
                   </a:txBody>
@@ -6313,7 +6570,7 @@
                           </a:solidFill>
                           <a:latin typeface="Arial"/>
                         </a:rPr>
-                        <a:t>4,734</a:t>
+                        <a:t>6,104</a:t>
                       </a:r>
                     </a:p>
                   </a:txBody>
@@ -6338,7 +6595,7 @@
                           </a:solidFill>
                           <a:latin typeface="Arial"/>
                         </a:rPr>
-                        <a:t>13</a:t>
+                        <a:t>5</a:t>
                       </a:r>
                     </a:p>
                   </a:txBody>
@@ -6361,7 +6618,7 @@
                           </a:solidFill>
                           <a:latin typeface="Arial"/>
                         </a:rPr>
-                        <a:t>Max Studer</a:t>
+                        <a:t>David Cantero Del Campo</a:t>
                       </a:r>
                     </a:p>
                   </a:txBody>
@@ -6384,7 +6641,7 @@
                           </a:solidFill>
                           <a:latin typeface="Arial"/>
                         </a:rPr>
-                        <a:t>3,488</a:t>
+                        <a:t>5,583</a:t>
                       </a:r>
                     </a:p>
                   </a:txBody>
@@ -6409,7 +6666,7 @@
                           </a:solidFill>
                           <a:latin typeface="Arial"/>
                         </a:rPr>
-                        <a:t>14</a:t>
+                        <a:t>6</a:t>
                       </a:r>
                     </a:p>
                   </a:txBody>
@@ -6432,7 +6689,7 @@
                           </a:solidFill>
                           <a:latin typeface="Arial"/>
                         </a:rPr>
-                        <a:t>Tyler Mislawchuk</a:t>
+                        <a:t>Csongor Lehmann</a:t>
                       </a:r>
                     </a:p>
                   </a:txBody>
@@ -6455,7 +6712,7 @@
                           </a:solidFill>
                           <a:latin typeface="Arial"/>
                         </a:rPr>
-                        <a:t>3,342</a:t>
+                        <a:t>5,281</a:t>
                       </a:r>
                     </a:p>
                   </a:txBody>
@@ -6480,7 +6737,7 @@
                           </a:solidFill>
                           <a:latin typeface="Arial"/>
                         </a:rPr>
-                        <a:t>17</a:t>
+                        <a:t>7</a:t>
                       </a:r>
                     </a:p>
                   </a:txBody>
@@ -6503,7 +6760,7 @@
                           </a:solidFill>
                           <a:latin typeface="Arial"/>
                         </a:rPr>
-                        <a:t>Alberto Gonzalez Garcia</a:t>
+                        <a:t>Luke Willian</a:t>
                       </a:r>
                     </a:p>
                   </a:txBody>
@@ -6526,7 +6783,7 @@
                           </a:solidFill>
                           <a:latin typeface="Arial"/>
                         </a:rPr>
-                        <a:t>3,188</a:t>
+                        <a:t>4,734</a:t>
                       </a:r>
                     </a:p>
                   </a:txBody>
@@ -6551,7 +6808,7 @@
                           </a:solidFill>
                           <a:latin typeface="Arial"/>
                         </a:rPr>
-                        <a:t>19</a:t>
+                        <a:t>8</a:t>
                       </a:r>
                     </a:p>
                   </a:txBody>
@@ -6574,7 +6831,7 @@
                           </a:solidFill>
                           <a:latin typeface="Arial"/>
                         </a:rPr>
-                        <a:t>Callum McClusky</a:t>
+                        <a:t>Dorian Coninx</a:t>
                       </a:r>
                     </a:p>
                   </a:txBody>
@@ -6597,7 +6854,7 @@
                           </a:solidFill>
                           <a:latin typeface="Arial"/>
                         </a:rPr>
-                        <a:t>2,983</a:t>
+                        <a:t>4,075</a:t>
                       </a:r>
                     </a:p>
                   </a:txBody>
@@ -6622,7 +6879,7 @@
                           </a:solidFill>
                           <a:latin typeface="Arial"/>
                         </a:rPr>
-                        <a:t>20</a:t>
+                        <a:t>9</a:t>
                       </a:r>
                     </a:p>
                   </a:txBody>
@@ -6645,7 +6902,7 @@
                           </a:solidFill>
                           <a:latin typeface="Arial"/>
                         </a:rPr>
-                        <a:t>John Reed</a:t>
+                        <a:t>Max Studer</a:t>
                       </a:r>
                     </a:p>
                   </a:txBody>
@@ -6668,7 +6925,7 @@
                           </a:solidFill>
                           <a:latin typeface="Arial"/>
                         </a:rPr>
-                        <a:t>2,898</a:t>
+                        <a:t>4,054</a:t>
                       </a:r>
                     </a:p>
                   </a:txBody>
@@ -6693,7 +6950,7 @@
                           </a:solidFill>
                           <a:latin typeface="Arial"/>
                         </a:rPr>
-                        <a:t>34</a:t>
+                        <a:t>10</a:t>
                       </a:r>
                     </a:p>
                   </a:txBody>
@@ -6716,7 +6973,7 @@
                           </a:solidFill>
                           <a:latin typeface="Arial"/>
                         </a:rPr>
-                        <a:t>João Nuno Batista</a:t>
+                        <a:t>Tyler Mislawchuk</a:t>
                       </a:r>
                     </a:p>
                   </a:txBody>
@@ -6739,7 +6996,7 @@
                           </a:solidFill>
                           <a:latin typeface="Arial"/>
                         </a:rPr>
-                        <a:t>2,581</a:t>
+                        <a:t>4,003</a:t>
                       </a:r>
                     </a:p>
                   </a:txBody>
@@ -6827,7 +7084,7 @@
                 </a:solidFill>
                 <a:latin typeface="Arial"/>
               </a:rPr>
-              <a:t>Returning Podium Athletes on Startlist</a:t>
+              <a:t>Last Year's Podium at Weihai</a:t>
             </a:r>
           </a:p>
         </p:txBody>
@@ -6862,7 +7119,7 @@
                 </a:solidFill>
                 <a:latin typeface="Arial"/>
               </a:rPr>
-              <a:t>1.  Max Studer   (01:40:03)</a:t>
+              <a:t>1.  Max Studer   (01:41:08)</a:t>
             </a:r>
           </a:p>
         </p:txBody>
@@ -6897,14 +7154,49 @@
                 </a:solidFill>
                 <a:latin typeface="Arial"/>
               </a:rPr>
-              <a:t>3.  John Reed   (01:40:35)</a:t>
+              <a:t>2.  David Cantero Del Campo   (01:41:18)</a:t>
             </a:r>
           </a:p>
         </p:txBody>
       </p:sp>
       <p:sp>
         <p:nvSpPr>
-          <p:cNvPr id="16" name="Rectangle 15"/>
+          <p:cNvPr id="16" name="TextBox 15"/>
+          <p:cNvSpPr txBox="1"/>
+          <p:nvPr/>
+        </p:nvSpPr>
+        <p:spPr>
+          <a:xfrm>
+            <a:off x="411480" y="6007608"/>
+            <a:ext cx="5394960" cy="292608"/>
+          </a:xfrm>
+          <a:prstGeom prst="rect">
+            <a:avLst/>
+          </a:prstGeom>
+          <a:noFill/>
+        </p:spPr>
+        <p:txBody>
+          <a:bodyPr wrap="square">
+            <a:spAutoFit/>
+          </a:bodyPr>
+          <a:lstStyle/>
+          <a:p>
+            <a:pPr algn="l"/>
+            <a:r>
+              <a:rPr sz="1100" b="0" i="0">
+                <a:solidFill>
+                  <a:srgbClr val="262626"/>
+                </a:solidFill>
+                <a:latin typeface="Arial"/>
+              </a:rPr>
+              <a:t>3.  Tyler Mislawchuk   (01:41:25)</a:t>
+            </a:r>
+          </a:p>
+        </p:txBody>
+      </p:sp>
+      <p:sp>
+        <p:nvSpPr>
+          <p:cNvPr id="17" name="Rectangle 16"/>
           <p:cNvSpPr/>
           <p:nvPr/>
         </p:nvSpPr>
@@ -6947,7 +7239,7 @@
       </p:sp>
       <p:sp>
         <p:nvSpPr>
-          <p:cNvPr id="17" name="TextBox 16"/>
+          <p:cNvPr id="18" name="TextBox 17"/>
           <p:cNvSpPr txBox="1"/>
           <p:nvPr/>
         </p:nvSpPr>
@@ -6982,7 +7274,7 @@
       </p:sp>
       <p:sp>
         <p:nvSpPr>
-          <p:cNvPr id="18" name="Rectangle 17"/>
+          <p:cNvPr id="19" name="Rectangle 18"/>
           <p:cNvSpPr/>
           <p:nvPr/>
         </p:nvSpPr>
@@ -7025,7 +7317,7 @@
       </p:sp>
       <p:sp>
         <p:nvSpPr>
-          <p:cNvPr id="19" name="TextBox 18"/>
+          <p:cNvPr id="20" name="TextBox 19"/>
           <p:cNvSpPr txBox="1"/>
           <p:nvPr/>
         </p:nvSpPr>
@@ -7053,14 +7345,14 @@
                 </a:solidFill>
                 <a:latin typeface="Arial"/>
               </a:rPr>
-              <a:t>Top 10 Ranked on Startlist</a:t>
+              <a:t>Top 10 by World Ranking</a:t>
             </a:r>
           </a:p>
         </p:txBody>
       </p:sp>
       <p:graphicFrame>
         <p:nvGraphicFramePr>
-          <p:cNvPr id="20" name="Table 19"/>
+          <p:cNvPr id="21" name="Table 20"/>
           <p:cNvGraphicFramePr>
             <a:graphicFrameLocks noGrp="1"/>
           </p:cNvGraphicFramePr>
@@ -7212,7 +7504,7 @@
                           </a:solidFill>
                           <a:latin typeface="Arial"/>
                         </a:rPr>
-                        <a:t>7,276</a:t>
+                        <a:t>7,499</a:t>
                       </a:r>
                     </a:p>
                   </a:txBody>
@@ -7308,7 +7600,7 @@
                           </a:solidFill>
                           <a:latin typeface="Arial"/>
                         </a:rPr>
-                        <a:t>4</a:t>
+                        <a:t>3</a:t>
                       </a:r>
                     </a:p>
                   </a:txBody>
@@ -7331,7 +7623,7 @@
                           </a:solidFill>
                           <a:latin typeface="Arial"/>
                         </a:rPr>
-                        <a:t>Jeanne Lehair</a:t>
+                        <a:t>Leonie Periault</a:t>
                       </a:r>
                     </a:p>
                   </a:txBody>
@@ -7354,7 +7646,7 @@
                           </a:solidFill>
                           <a:latin typeface="Arial"/>
                         </a:rPr>
-                        <a:t>6,306</a:t>
+                        <a:t>6,586</a:t>
                       </a:r>
                     </a:p>
                   </a:txBody>
@@ -7379,7 +7671,7 @@
                           </a:solidFill>
                           <a:latin typeface="Arial"/>
                         </a:rPr>
-                        <a:t>6</a:t>
+                        <a:t>4</a:t>
                       </a:r>
                     </a:p>
                   </a:txBody>
@@ -7402,7 +7694,7 @@
                           </a:solidFill>
                           <a:latin typeface="Arial"/>
                         </a:rPr>
-                        <a:t>Cassandre Beaugrand</a:t>
+                        <a:t>Jeanne Lehair</a:t>
                       </a:r>
                     </a:p>
                   </a:txBody>
@@ -7425,7 +7717,7 @@
                           </a:solidFill>
                           <a:latin typeface="Arial"/>
                         </a:rPr>
-                        <a:t>5,391</a:t>
+                        <a:t>6,112</a:t>
                       </a:r>
                     </a:p>
                   </a:txBody>
@@ -7450,7 +7742,7 @@
                           </a:solidFill>
                           <a:latin typeface="Arial"/>
                         </a:rPr>
-                        <a:t>10</a:t>
+                        <a:t>5</a:t>
                       </a:r>
                     </a:p>
                   </a:txBody>
@@ -7473,7 +7765,7 @@
                           </a:solidFill>
                           <a:latin typeface="Arial"/>
                         </a:rPr>
-                        <a:t>Diana Isakova</a:t>
+                        <a:t>Cassandre Beaugrand</a:t>
                       </a:r>
                     </a:p>
                   </a:txBody>
@@ -7496,7 +7788,7 @@
                           </a:solidFill>
                           <a:latin typeface="Arial"/>
                         </a:rPr>
-                        <a:t>4,750</a:t>
+                        <a:t>5,725</a:t>
                       </a:r>
                     </a:p>
                   </a:txBody>
@@ -7521,7 +7813,7 @@
                           </a:solidFill>
                           <a:latin typeface="Arial"/>
                         </a:rPr>
-                        <a:t>11</a:t>
+                        <a:t>6</a:t>
                       </a:r>
                     </a:p>
                   </a:txBody>
@@ -7544,7 +7836,7 @@
                           </a:solidFill>
                           <a:latin typeface="Arial"/>
                         </a:rPr>
-                        <a:t>Tanja Neubert</a:t>
+                        <a:t>Taylor Spivey</a:t>
                       </a:r>
                     </a:p>
                   </a:txBody>
@@ -7567,7 +7859,7 @@
                           </a:solidFill>
                           <a:latin typeface="Arial"/>
                         </a:rPr>
-                        <a:t>4,583</a:t>
+                        <a:t>5,253</a:t>
                       </a:r>
                     </a:p>
                   </a:txBody>
@@ -7592,7 +7884,7 @@
                           </a:solidFill>
                           <a:latin typeface="Arial"/>
                         </a:rPr>
-                        <a:t>15</a:t>
+                        <a:t>7</a:t>
                       </a:r>
                     </a:p>
                   </a:txBody>
@@ -7615,7 +7907,7 @@
                           </a:solidFill>
                           <a:latin typeface="Arial"/>
                         </a:rPr>
-                        <a:t>Sian Rainsley</a:t>
+                        <a:t>Jolien Vermeylen</a:t>
                       </a:r>
                     </a:p>
                   </a:txBody>
@@ -7638,7 +7930,7 @@
                           </a:solidFill>
                           <a:latin typeface="Arial"/>
                         </a:rPr>
-                        <a:t>3,568</a:t>
+                        <a:t>5,179</a:t>
                       </a:r>
                     </a:p>
                   </a:txBody>
@@ -7663,7 +7955,7 @@
                           </a:solidFill>
                           <a:latin typeface="Arial"/>
                         </a:rPr>
-                        <a:t>16</a:t>
+                        <a:t>8</a:t>
                       </a:r>
                     </a:p>
                   </a:txBody>
@@ -7686,7 +7978,7 @@
                           </a:solidFill>
                           <a:latin typeface="Arial"/>
                         </a:rPr>
-                        <a:t>Gina Sereno</a:t>
+                        <a:t>Tilda Månsson</a:t>
                       </a:r>
                     </a:p>
                   </a:txBody>
@@ -7709,7 +8001,7 @@
                           </a:solidFill>
                           <a:latin typeface="Arial"/>
                         </a:rPr>
-                        <a:t>3,205</a:t>
+                        <a:t>5,045</a:t>
                       </a:r>
                     </a:p>
                   </a:txBody>
@@ -7734,7 +8026,7 @@
                           </a:solidFill>
                           <a:latin typeface="Arial"/>
                         </a:rPr>
-                        <a:t>17</a:t>
+                        <a:t>9</a:t>
                       </a:r>
                     </a:p>
                   </a:txBody>
@@ -7757,7 +8049,7 @@
                           </a:solidFill>
                           <a:latin typeface="Arial"/>
                         </a:rPr>
-                        <a:t>Roksana Slupek</a:t>
+                        <a:t>Diana Isakova</a:t>
                       </a:r>
                     </a:p>
                   </a:txBody>
@@ -7780,7 +8072,7 @@
                           </a:solidFill>
                           <a:latin typeface="Arial"/>
                         </a:rPr>
-                        <a:t>3,201</a:t>
+                        <a:t>4,899</a:t>
                       </a:r>
                     </a:p>
                   </a:txBody>
@@ -7805,7 +8097,7 @@
                           </a:solidFill>
                           <a:latin typeface="Arial"/>
                         </a:rPr>
-                        <a:t>18</a:t>
+                        <a:t>10</a:t>
                       </a:r>
                     </a:p>
                   </a:txBody>
@@ -7828,7 +8120,7 @@
                           </a:solidFill>
                           <a:latin typeface="Arial"/>
                         </a:rPr>
-                        <a:t>Valentina Riasova</a:t>
+                        <a:t>Emma Lombardi</a:t>
                       </a:r>
                     </a:p>
                   </a:txBody>
@@ -7851,7 +8143,7 @@
                           </a:solidFill>
                           <a:latin typeface="Arial"/>
                         </a:rPr>
-                        <a:t>3,120</a:t>
+                        <a:t>4,634</a:t>
                       </a:r>
                     </a:p>
                   </a:txBody>
@@ -7868,7 +8160,7 @@
       </p:graphicFrame>
       <p:sp>
         <p:nvSpPr>
-          <p:cNvPr id="21" name="Rectangle 20"/>
+          <p:cNvPr id="22" name="Rectangle 21"/>
           <p:cNvSpPr/>
           <p:nvPr/>
         </p:nvSpPr>
@@ -7911,7 +8203,7 @@
       </p:sp>
       <p:sp>
         <p:nvSpPr>
-          <p:cNvPr id="22" name="TextBox 21"/>
+          <p:cNvPr id="23" name="TextBox 22"/>
           <p:cNvSpPr txBox="1"/>
           <p:nvPr/>
         </p:nvSpPr>
@@ -7939,14 +8231,14 @@
                 </a:solidFill>
                 <a:latin typeface="Arial"/>
               </a:rPr>
-              <a:t>Returning Podium Athletes on Startlist</a:t>
+              <a:t>Last Year's Podium at Weihai</a:t>
             </a:r>
           </a:p>
         </p:txBody>
       </p:sp>
       <p:sp>
         <p:nvSpPr>
-          <p:cNvPr id="23" name="TextBox 22"/>
+          <p:cNvPr id="24" name="TextBox 23"/>
           <p:cNvSpPr txBox="1"/>
           <p:nvPr/>
         </p:nvSpPr>
@@ -7974,14 +8266,14 @@
                 </a:solidFill>
                 <a:latin typeface="Arial"/>
               </a:rPr>
-              <a:t>1.  Beth Potter   (01:51:58)</a:t>
+              <a:t>1.  Cassandre Beaugrand   (01:49:20)</a:t>
             </a:r>
           </a:p>
         </p:txBody>
       </p:sp>
       <p:sp>
         <p:nvSpPr>
-          <p:cNvPr id="24" name="TextBox 23"/>
+          <p:cNvPr id="25" name="TextBox 24"/>
           <p:cNvSpPr txBox="1"/>
           <p:nvPr/>
         </p:nvSpPr>
@@ -8009,14 +8301,14 @@
                 </a:solidFill>
                 <a:latin typeface="Arial"/>
               </a:rPr>
-              <a:t>2.  Lisa Tertsch   (01:52:15)</a:t>
+              <a:t>2.  Beth Potter   (01:49:26)</a:t>
             </a:r>
           </a:p>
         </p:txBody>
       </p:sp>
       <p:sp>
         <p:nvSpPr>
-          <p:cNvPr id="25" name="TextBox 24"/>
+          <p:cNvPr id="26" name="TextBox 25"/>
           <p:cNvSpPr txBox="1"/>
           <p:nvPr/>
         </p:nvSpPr>
@@ -8044,14 +8336,14 @@
                 </a:solidFill>
                 <a:latin typeface="Arial"/>
               </a:rPr>
-              <a:t>3.  Tanja Neubert   (01:52:19)</a:t>
+              <a:t>3.  Lisa Tertsch   (01:49:44)</a:t>
             </a:r>
           </a:p>
         </p:txBody>
       </p:sp>
       <p:sp>
         <p:nvSpPr>
-          <p:cNvPr id="26" name="TextBox 25"/>
+          <p:cNvPr id="27" name="TextBox 26"/>
           <p:cNvSpPr txBox="1"/>
           <p:nvPr/>
         </p:nvSpPr>
@@ -8687,7 +8979,7 @@
                           </a:solidFill>
                           <a:latin typeface="Arial"/>
                         </a:rPr>
-                        <a:t>Matthew Hauser</a:t>
+                        <a:t>Alessio Crociani</a:t>
                       </a:r>
                     </a:p>
                   </a:txBody>
@@ -8710,7 +9002,7 @@
                           </a:solidFill>
                           <a:latin typeface="Arial"/>
                         </a:rPr>
-                        <a:t>94%</a:t>
+                        <a:t>100%</a:t>
                       </a:r>
                     </a:p>
                   </a:txBody>
@@ -8733,7 +9025,7 @@
                           </a:solidFill>
                           <a:latin typeface="Arial"/>
                         </a:rPr>
-                        <a:t>8:28</a:t>
+                        <a:t>8:39</a:t>
                       </a:r>
                     </a:p>
                   </a:txBody>
@@ -8756,7 +9048,7 @@
                           </a:solidFill>
                           <a:latin typeface="Arial"/>
                         </a:rPr>
-                        <a:t>17:09</a:t>
+                        <a:t>17:19</a:t>
                       </a:r>
                     </a:p>
                   </a:txBody>
@@ -8779,7 +9071,7 @@
                           </a:solidFill>
                           <a:latin typeface="Arial"/>
                         </a:rPr>
-                        <a:t>7/11</a:t>
+                        <a:t>17/4</a:t>
                       </a:r>
                     </a:p>
                   </a:txBody>
@@ -8827,7 +9119,7 @@
                           </a:solidFill>
                           <a:latin typeface="Arial"/>
                         </a:rPr>
-                        <a:t>Csongor Lehmann</a:t>
+                        <a:t>Michael Gar</a:t>
                       </a:r>
                     </a:p>
                   </a:txBody>
@@ -8850,7 +9142,7 @@
                           </a:solidFill>
                           <a:latin typeface="Arial"/>
                         </a:rPr>
-                        <a:t>85%</a:t>
+                        <a:t>100%</a:t>
                       </a:r>
                     </a:p>
                   </a:txBody>
@@ -8873,7 +9165,7 @@
                           </a:solidFill>
                           <a:latin typeface="Arial"/>
                         </a:rPr>
-                        <a:t>8:37</a:t>
+                        <a:t>8:53</a:t>
                       </a:r>
                     </a:p>
                   </a:txBody>
@@ -8896,7 +9188,7 @@
                           </a:solidFill>
                           <a:latin typeface="Arial"/>
                         </a:rPr>
-                        <a:t>17:22</a:t>
+                        <a:t>16:57</a:t>
                       </a:r>
                     </a:p>
                   </a:txBody>
@@ -8919,7 +9211,7 @@
                           </a:solidFill>
                           <a:latin typeface="Arial"/>
                         </a:rPr>
-                        <a:t>5/15</a:t>
+                        <a:t>5/1</a:t>
                       </a:r>
                     </a:p>
                   </a:txBody>
@@ -8961,13 +9253,36 @@
                     <a:p>
                       <a:pPr algn="l"/>
                       <a:r>
+                        <a:rPr sz="850" b="0" i="0">
+                          <a:solidFill>
+                            <a:srgbClr val="262626"/>
+                          </a:solidFill>
+                          <a:latin typeface="Arial"/>
+                        </a:rPr>
+                        <a:t>Dorian Coninx</a:t>
+                      </a:r>
+                    </a:p>
+                  </a:txBody>
+                  <a:tcPr>
+                    <a:solidFill>
+                      <a:srgbClr val="FFFFFF"/>
+                    </a:solidFill>
+                  </a:tcPr>
+                </a:tc>
+                <a:tc>
+                  <a:txBody>
+                    <a:bodyPr wrap="none"/>
+                    <a:lstStyle/>
+                    <a:p>
+                      <a:pPr algn="ctr"/>
+                      <a:r>
                         <a:rPr sz="850" b="1" i="0">
                           <a:solidFill>
-                            <a:srgbClr val="C00000"/>
-                          </a:solidFill>
-                          <a:latin typeface="Arial"/>
-                        </a:rPr>
-                        <a:t>Chase McQueen</a:t>
+                            <a:srgbClr val="262626"/>
+                          </a:solidFill>
+                          <a:latin typeface="Arial"/>
+                        </a:rPr>
+                        <a:t>100%</a:t>
                       </a:r>
                     </a:p>
                   </a:txBody>
@@ -8990,30 +9305,7 @@
                           </a:solidFill>
                           <a:latin typeface="Arial"/>
                         </a:rPr>
-                        <a:t>85%</a:t>
-                      </a:r>
-                    </a:p>
-                  </a:txBody>
-                  <a:tcPr>
-                    <a:solidFill>
-                      <a:srgbClr val="FFFFFF"/>
-                    </a:solidFill>
-                  </a:tcPr>
-                </a:tc>
-                <a:tc>
-                  <a:txBody>
-                    <a:bodyPr wrap="none"/>
-                    <a:lstStyle/>
-                    <a:p>
-                      <a:pPr algn="ctr"/>
-                      <a:r>
-                        <a:rPr sz="850" b="1" i="0">
-                          <a:solidFill>
-                            <a:srgbClr val="262626"/>
-                          </a:solidFill>
-                          <a:latin typeface="Arial"/>
-                        </a:rPr>
-                        <a:t>9:04</a:t>
+                        <a:t>8:57</a:t>
                       </a:r>
                     </a:p>
                   </a:txBody>
@@ -9036,7 +9328,7 @@
                           </a:solidFill>
                           <a:latin typeface="Arial"/>
                         </a:rPr>
-                        <a:t>17:47</a:t>
+                        <a:t>17:26</a:t>
                       </a:r>
                     </a:p>
                   </a:txBody>
@@ -9059,7 +9351,7 @@
                           </a:solidFill>
                           <a:latin typeface="Arial"/>
                         </a:rPr>
-                        <a:t>9/11</a:t>
+                        <a:t>4/9</a:t>
                       </a:r>
                     </a:p>
                   </a:txBody>
@@ -9107,7 +9399,7 @@
                           </a:solidFill>
                           <a:latin typeface="Arial"/>
                         </a:rPr>
-                        <a:t>Márton Kropkó</a:t>
+                        <a:t>Marcus Dey</a:t>
                       </a:r>
                     </a:p>
                   </a:txBody>
@@ -9130,7 +9422,7 @@
                           </a:solidFill>
                           <a:latin typeface="Arial"/>
                         </a:rPr>
-                        <a:t>80%</a:t>
+                        <a:t>100%</a:t>
                       </a:r>
                     </a:p>
                   </a:txBody>
@@ -9153,7 +9445,7 @@
                           </a:solidFill>
                           <a:latin typeface="Arial"/>
                         </a:rPr>
-                        <a:t>8:56</a:t>
+                        <a:t>8:57</a:t>
                       </a:r>
                     </a:p>
                   </a:txBody>
@@ -9176,7 +9468,7 @@
                           </a:solidFill>
                           <a:latin typeface="Arial"/>
                         </a:rPr>
-                        <a:t>17:47</a:t>
+                        <a:t>17:10</a:t>
                       </a:r>
                     </a:p>
                   </a:txBody>
@@ -9199,7 +9491,7 @@
                           </a:solidFill>
                           <a:latin typeface="Arial"/>
                         </a:rPr>
-                        <a:t>2/3</a:t>
+                        <a:t>8/4</a:t>
                       </a:r>
                     </a:p>
                   </a:txBody>
@@ -9241,13 +9533,36 @@
                     <a:p>
                       <a:pPr algn="l"/>
                       <a:r>
+                        <a:rPr sz="850" b="0" i="0">
+                          <a:solidFill>
+                            <a:srgbClr val="262626"/>
+                          </a:solidFill>
+                          <a:latin typeface="Arial"/>
+                        </a:rPr>
+                        <a:t>Miguel Tiago Silva</a:t>
+                      </a:r>
+                    </a:p>
+                  </a:txBody>
+                  <a:tcPr>
+                    <a:solidFill>
+                      <a:srgbClr val="FFFFFF"/>
+                    </a:solidFill>
+                  </a:tcPr>
+                </a:tc>
+                <a:tc>
+                  <a:txBody>
+                    <a:bodyPr wrap="none"/>
+                    <a:lstStyle/>
+                    <a:p>
+                      <a:pPr algn="ctr"/>
+                      <a:r>
                         <a:rPr sz="850" b="1" i="0">
                           <a:solidFill>
-                            <a:srgbClr val="C00000"/>
-                          </a:solidFill>
-                          <a:latin typeface="Arial"/>
-                        </a:rPr>
-                        <a:t>Blake Bullard</a:t>
+                            <a:srgbClr val="262626"/>
+                          </a:solidFill>
+                          <a:latin typeface="Arial"/>
+                        </a:rPr>
+                        <a:t>100%</a:t>
                       </a:r>
                     </a:p>
                   </a:txBody>
@@ -9270,30 +9585,7 @@
                           </a:solidFill>
                           <a:latin typeface="Arial"/>
                         </a:rPr>
-                        <a:t>80%</a:t>
-                      </a:r>
-                    </a:p>
-                  </a:txBody>
-                  <a:tcPr>
-                    <a:solidFill>
-                      <a:srgbClr val="FFFFFF"/>
-                    </a:solidFill>
-                  </a:tcPr>
-                </a:tc>
-                <a:tc>
-                  <a:txBody>
-                    <a:bodyPr wrap="none"/>
-                    <a:lstStyle/>
-                    <a:p>
-                      <a:pPr algn="ctr"/>
-                      <a:r>
-                        <a:rPr sz="850" b="1" i="0">
-                          <a:solidFill>
-                            <a:srgbClr val="262626"/>
-                          </a:solidFill>
-                          <a:latin typeface="Arial"/>
-                        </a:rPr>
-                        <a:t>9:51</a:t>
+                        <a:t>8:58</a:t>
                       </a:r>
                     </a:p>
                   </a:txBody>
@@ -9316,7 +9608,7 @@
                           </a:solidFill>
                           <a:latin typeface="Arial"/>
                         </a:rPr>
-                        <a:t>—</a:t>
+                        <a:t>17:41</a:t>
                       </a:r>
                     </a:p>
                   </a:txBody>
@@ -9339,7 +9631,7 @@
                           </a:solidFill>
                           <a:latin typeface="Arial"/>
                         </a:rPr>
-                        <a:t>10/0</a:t>
+                        <a:t>8/11</a:t>
                       </a:r>
                     </a:p>
                   </a:txBody>
@@ -9387,7 +9679,7 @@
                           </a:solidFill>
                           <a:latin typeface="Arial"/>
                         </a:rPr>
-                        <a:t>Alberto Gonzalez Garcia</a:t>
+                        <a:t>Vincent Luis</a:t>
                       </a:r>
                     </a:p>
                   </a:txBody>
@@ -9410,7 +9702,7 @@
                           </a:solidFill>
                           <a:latin typeface="Arial"/>
                         </a:rPr>
-                        <a:t>79%</a:t>
+                        <a:t>100%</a:t>
                       </a:r>
                     </a:p>
                   </a:txBody>
@@ -9433,7 +9725,7 @@
                           </a:solidFill>
                           <a:latin typeface="Arial"/>
                         </a:rPr>
-                        <a:t>9:03</a:t>
+                        <a:t>8:59</a:t>
                       </a:r>
                     </a:p>
                   </a:txBody>
@@ -9456,7 +9748,7 @@
                           </a:solidFill>
                           <a:latin typeface="Arial"/>
                         </a:rPr>
-                        <a:t>18:08</a:t>
+                        <a:t>18:20</a:t>
                       </a:r>
                     </a:p>
                   </a:txBody>
@@ -9479,7 +9771,7 @@
                           </a:solidFill>
                           <a:latin typeface="Arial"/>
                         </a:rPr>
-                        <a:t>16/8</a:t>
+                        <a:t>2/7</a:t>
                       </a:r>
                     </a:p>
                   </a:txBody>
@@ -9527,7 +9819,7 @@
                           </a:solidFill>
                           <a:latin typeface="Arial"/>
                         </a:rPr>
-                        <a:t>Kenji Nener</a:t>
+                        <a:t>Davide Ingrilli</a:t>
                       </a:r>
                     </a:p>
                   </a:txBody>
@@ -9550,7 +9842,7 @@
                           </a:solidFill>
                           <a:latin typeface="Arial"/>
                         </a:rPr>
-                        <a:t>74%</a:t>
+                        <a:t>100%</a:t>
                       </a:r>
                     </a:p>
                   </a:txBody>
@@ -9573,7 +9865,7 @@
                           </a:solidFill>
                           <a:latin typeface="Arial"/>
                         </a:rPr>
-                        <a:t>8:53</a:t>
+                        <a:t>9:04</a:t>
                       </a:r>
                     </a:p>
                   </a:txBody>
@@ -9596,7 +9888,7 @@
                           </a:solidFill>
                           <a:latin typeface="Arial"/>
                         </a:rPr>
-                        <a:t>18:15</a:t>
+                        <a:t>—</a:t>
                       </a:r>
                     </a:p>
                   </a:txBody>
@@ -9619,7 +9911,7 @@
                           </a:solidFill>
                           <a:latin typeface="Arial"/>
                         </a:rPr>
-                        <a:t>10/13</a:t>
+                        <a:t>3/0</a:t>
                       </a:r>
                     </a:p>
                   </a:txBody>
@@ -9667,7 +9959,7 @@
                           </a:solidFill>
                           <a:latin typeface="Arial"/>
                         </a:rPr>
-                        <a:t>João Nuno Batista</a:t>
+                        <a:t>Lawrence Martindale</a:t>
                       </a:r>
                     </a:p>
                   </a:txBody>
@@ -9690,7 +9982,7 @@
                           </a:solidFill>
                           <a:latin typeface="Arial"/>
                         </a:rPr>
-                        <a:t>70%</a:t>
+                        <a:t>100%</a:t>
                       </a:r>
                     </a:p>
                   </a:txBody>
@@ -9713,7 +10005,7 @@
                           </a:solidFill>
                           <a:latin typeface="Arial"/>
                         </a:rPr>
-                        <a:t>8:53</a:t>
+                        <a:t>9:12</a:t>
                       </a:r>
                     </a:p>
                   </a:txBody>
@@ -9736,7 +10028,7 @@
                           </a:solidFill>
                           <a:latin typeface="Arial"/>
                         </a:rPr>
-                        <a:t>18:05</a:t>
+                        <a:t>—</a:t>
                       </a:r>
                     </a:p>
                   </a:txBody>
@@ -9759,7 +10051,7 @@
                           </a:solidFill>
                           <a:latin typeface="Arial"/>
                         </a:rPr>
-                        <a:t>6/4</a:t>
+                        <a:t>3/0</a:t>
                       </a:r>
                     </a:p>
                   </a:txBody>
@@ -9807,7 +10099,7 @@
                           </a:solidFill>
                           <a:latin typeface="Arial"/>
                         </a:rPr>
-                        <a:t>Takumi Hojo</a:t>
+                        <a:t>Zheng Xu</a:t>
                       </a:r>
                     </a:p>
                   </a:txBody>
@@ -9830,7 +10122,7 @@
                           </a:solidFill>
                           <a:latin typeface="Arial"/>
                         </a:rPr>
-                        <a:t>65%</a:t>
+                        <a:t>100%</a:t>
                       </a:r>
                     </a:p>
                   </a:txBody>
@@ -9853,7 +10145,7 @@
                           </a:solidFill>
                           <a:latin typeface="Arial"/>
                         </a:rPr>
-                        <a:t>8:57</a:t>
+                        <a:t>9:18</a:t>
                       </a:r>
                     </a:p>
                   </a:txBody>
@@ -9876,7 +10168,7 @@
                           </a:solidFill>
                           <a:latin typeface="Arial"/>
                         </a:rPr>
-                        <a:t>18:21</a:t>
+                        <a:t>18:19</a:t>
                       </a:r>
                     </a:p>
                   </a:txBody>
@@ -9899,7 +10191,7 @@
                           </a:solidFill>
                           <a:latin typeface="Arial"/>
                         </a:rPr>
-                        <a:t>17/14</a:t>
+                        <a:t>1/2</a:t>
                       </a:r>
                     </a:p>
                   </a:txBody>
@@ -9947,7 +10239,7 @@
                           </a:solidFill>
                           <a:latin typeface="Arial"/>
                         </a:rPr>
-                        <a:t>Martin Demuth</a:t>
+                        <a:t>Pao Millo</a:t>
                       </a:r>
                     </a:p>
                   </a:txBody>
@@ -9970,7 +10262,7 @@
                           </a:solidFill>
                           <a:latin typeface="Arial"/>
                         </a:rPr>
-                        <a:t>64%</a:t>
+                        <a:t>100%</a:t>
                       </a:r>
                     </a:p>
                   </a:txBody>
@@ -9993,7 +10285,7 @@
                           </a:solidFill>
                           <a:latin typeface="Arial"/>
                         </a:rPr>
-                        <a:t>9:07</a:t>
+                        <a:t>9:29</a:t>
                       </a:r>
                     </a:p>
                   </a:txBody>
@@ -10016,7 +10308,7 @@
                           </a:solidFill>
                           <a:latin typeface="Arial"/>
                         </a:rPr>
-                        <a:t>17:15</a:t>
+                        <a:t>—</a:t>
                       </a:r>
                     </a:p>
                   </a:txBody>
@@ -10039,7 +10331,7 @@
                           </a:solidFill>
                           <a:latin typeface="Arial"/>
                         </a:rPr>
-                        <a:t>16/12</a:t>
+                        <a:t>3/0</a:t>
                       </a:r>
                     </a:p>
                   </a:txBody>
@@ -10081,59 +10373,82 @@
                     <a:p>
                       <a:pPr algn="l"/>
                       <a:r>
+                        <a:rPr sz="850" b="1" i="0">
+                          <a:solidFill>
+                            <a:srgbClr val="C00000"/>
+                          </a:solidFill>
+                          <a:latin typeface="Arial"/>
+                        </a:rPr>
+                        <a:t>Carter Stuhlmacher</a:t>
+                      </a:r>
+                    </a:p>
+                  </a:txBody>
+                  <a:tcPr>
+                    <a:solidFill>
+                      <a:srgbClr val="FFFFFF"/>
+                    </a:solidFill>
+                  </a:tcPr>
+                </a:tc>
+                <a:tc>
+                  <a:txBody>
+                    <a:bodyPr wrap="none"/>
+                    <a:lstStyle/>
+                    <a:p>
+                      <a:pPr algn="ctr"/>
+                      <a:r>
+                        <a:rPr sz="850" b="1" i="0">
+                          <a:solidFill>
+                            <a:srgbClr val="262626"/>
+                          </a:solidFill>
+                          <a:latin typeface="Arial"/>
+                        </a:rPr>
+                        <a:t>100%</a:t>
+                      </a:r>
+                    </a:p>
+                  </a:txBody>
+                  <a:tcPr>
+                    <a:solidFill>
+                      <a:srgbClr val="FFFFFF"/>
+                    </a:solidFill>
+                  </a:tcPr>
+                </a:tc>
+                <a:tc>
+                  <a:txBody>
+                    <a:bodyPr wrap="none"/>
+                    <a:lstStyle/>
+                    <a:p>
+                      <a:pPr algn="ctr"/>
+                      <a:r>
+                        <a:rPr sz="850" b="1" i="0">
+                          <a:solidFill>
+                            <a:srgbClr val="262626"/>
+                          </a:solidFill>
+                          <a:latin typeface="Arial"/>
+                        </a:rPr>
+                        <a:t>9:40</a:t>
+                      </a:r>
+                    </a:p>
+                  </a:txBody>
+                  <a:tcPr>
+                    <a:solidFill>
+                      <a:srgbClr val="FFFFFF"/>
+                    </a:solidFill>
+                  </a:tcPr>
+                </a:tc>
+                <a:tc>
+                  <a:txBody>
+                    <a:bodyPr wrap="none"/>
+                    <a:lstStyle/>
+                    <a:p>
+                      <a:pPr algn="ctr"/>
+                      <a:r>
                         <a:rPr sz="850" b="0" i="0">
                           <a:solidFill>
                             <a:srgbClr val="262626"/>
                           </a:solidFill>
                           <a:latin typeface="Arial"/>
                         </a:rPr>
-                        <a:t>Maciej Bruzdziak</a:t>
-                      </a:r>
-                    </a:p>
-                  </a:txBody>
-                  <a:tcPr>
-                    <a:solidFill>
-                      <a:srgbClr val="FFFFFF"/>
-                    </a:solidFill>
-                  </a:tcPr>
-                </a:tc>
-                <a:tc>
-                  <a:txBody>
-                    <a:bodyPr wrap="none"/>
-                    <a:lstStyle/>
-                    <a:p>
-                      <a:pPr algn="ctr"/>
-                      <a:r>
-                        <a:rPr sz="850" b="1" i="0">
-                          <a:solidFill>
-                            <a:srgbClr val="262626"/>
-                          </a:solidFill>
-                          <a:latin typeface="Arial"/>
-                        </a:rPr>
-                        <a:t>64%</a:t>
-                      </a:r>
-                    </a:p>
-                  </a:txBody>
-                  <a:tcPr>
-                    <a:solidFill>
-                      <a:srgbClr val="FFFFFF"/>
-                    </a:solidFill>
-                  </a:tcPr>
-                </a:tc>
-                <a:tc>
-                  <a:txBody>
-                    <a:bodyPr wrap="none"/>
-                    <a:lstStyle/>
-                    <a:p>
-                      <a:pPr algn="ctr"/>
-                      <a:r>
-                        <a:rPr sz="850" b="1" i="0">
-                          <a:solidFill>
-                            <a:srgbClr val="262626"/>
-                          </a:solidFill>
-                          <a:latin typeface="Arial"/>
-                        </a:rPr>
-                        <a:t>8:55</a:t>
+                        <a:t>18:08</a:t>
                       </a:r>
                     </a:p>
                   </a:txBody>
@@ -10152,34 +10467,11 @@
                       <a:r>
                         <a:rPr sz="850" b="0" i="0">
                           <a:solidFill>
-                            <a:srgbClr val="262626"/>
-                          </a:solidFill>
-                          <a:latin typeface="Arial"/>
-                        </a:rPr>
-                        <a:t>18:00</a:t>
-                      </a:r>
-                    </a:p>
-                  </a:txBody>
-                  <a:tcPr>
-                    <a:solidFill>
-                      <a:srgbClr val="FFFFFF"/>
-                    </a:solidFill>
-                  </a:tcPr>
-                </a:tc>
-                <a:tc>
-                  <a:txBody>
-                    <a:bodyPr wrap="none"/>
-                    <a:lstStyle/>
-                    <a:p>
-                      <a:pPr algn="ctr"/>
-                      <a:r>
-                        <a:rPr sz="850" b="0" i="0">
-                          <a:solidFill>
                             <a:srgbClr val="BFBFBF"/>
                           </a:solidFill>
                           <a:latin typeface="Arial"/>
                         </a:rPr>
-                        <a:t>7/15</a:t>
+                        <a:t>13/1</a:t>
                       </a:r>
                     </a:p>
                   </a:txBody>
@@ -10227,7 +10519,7 @@
                           </a:solidFill>
                           <a:latin typeface="Arial"/>
                         </a:rPr>
-                        <a:t>Gergely Kiss</a:t>
+                        <a:t>Jamie Riddle</a:t>
                       </a:r>
                     </a:p>
                   </a:txBody>
@@ -10250,7 +10542,7 @@
                           </a:solidFill>
                           <a:latin typeface="Arial"/>
                         </a:rPr>
-                        <a:t>62%</a:t>
+                        <a:t>100%</a:t>
                       </a:r>
                     </a:p>
                   </a:txBody>
@@ -10273,7 +10565,7 @@
                           </a:solidFill>
                           <a:latin typeface="Arial"/>
                         </a:rPr>
-                        <a:t>8:53</a:t>
+                        <a:t>10:01</a:t>
                       </a:r>
                     </a:p>
                   </a:txBody>
@@ -10296,7 +10588,7 @@
                           </a:solidFill>
                           <a:latin typeface="Arial"/>
                         </a:rPr>
-                        <a:t>17:57</a:t>
+                        <a:t>17:26</a:t>
                       </a:r>
                     </a:p>
                   </a:txBody>
@@ -10319,7 +10611,7 @@
                           </a:solidFill>
                           <a:latin typeface="Arial"/>
                         </a:rPr>
-                        <a:t>10/6</a:t>
+                        <a:t>8/3</a:t>
                       </a:r>
                     </a:p>
                   </a:txBody>
@@ -10367,7 +10659,7 @@
                           </a:solidFill>
                           <a:latin typeface="Arial"/>
                         </a:rPr>
-                        <a:t>Nicola Azzano</a:t>
+                        <a:t>Nicholas Quenet</a:t>
                       </a:r>
                     </a:p>
                   </a:txBody>
@@ -10390,7 +10682,7 @@
                           </a:solidFill>
                           <a:latin typeface="Arial"/>
                         </a:rPr>
-                        <a:t>62%</a:t>
+                        <a:t>100%</a:t>
                       </a:r>
                     </a:p>
                   </a:txBody>
@@ -10413,7 +10705,7 @@
                           </a:solidFill>
                           <a:latin typeface="Arial"/>
                         </a:rPr>
-                        <a:t>8:57</a:t>
+                        <a:t>10:17</a:t>
                       </a:r>
                     </a:p>
                   </a:txBody>
@@ -10436,7 +10728,7 @@
                           </a:solidFill>
                           <a:latin typeface="Arial"/>
                         </a:rPr>
-                        <a:t>18:01</a:t>
+                        <a:t>18:35</a:t>
                       </a:r>
                     </a:p>
                   </a:txBody>
@@ -10459,7 +10751,7 @@
                           </a:solidFill>
                           <a:latin typeface="Arial"/>
                         </a:rPr>
-                        <a:t>21/13</a:t>
+                        <a:t>5/1</a:t>
                       </a:r>
                     </a:p>
                   </a:txBody>
@@ -10501,13 +10793,36 @@
                     <a:p>
                       <a:pPr algn="l"/>
                       <a:r>
+                        <a:rPr sz="850" b="0" i="0">
+                          <a:solidFill>
+                            <a:srgbClr val="262626"/>
+                          </a:solidFill>
+                          <a:latin typeface="Arial"/>
+                        </a:rPr>
+                        <a:t>Márk Dévay</a:t>
+                      </a:r>
+                    </a:p>
+                  </a:txBody>
+                  <a:tcPr>
+                    <a:solidFill>
+                      <a:srgbClr val="F2F2F2"/>
+                    </a:solidFill>
+                  </a:tcPr>
+                </a:tc>
+                <a:tc>
+                  <a:txBody>
+                    <a:bodyPr wrap="none"/>
+                    <a:lstStyle/>
+                    <a:p>
+                      <a:pPr algn="ctr"/>
+                      <a:r>
                         <a:rPr sz="850" b="1" i="0">
                           <a:solidFill>
-                            <a:srgbClr val="C00000"/>
-                          </a:solidFill>
-                          <a:latin typeface="Arial"/>
-                        </a:rPr>
-                        <a:t>Darr Smith</a:t>
+                            <a:srgbClr val="262626"/>
+                          </a:solidFill>
+                          <a:latin typeface="Arial"/>
+                        </a:rPr>
+                        <a:t>97%</a:t>
                       </a:r>
                     </a:p>
                   </a:txBody>
@@ -10530,30 +10845,7 @@
                           </a:solidFill>
                           <a:latin typeface="Arial"/>
                         </a:rPr>
-                        <a:t>58%</a:t>
-                      </a:r>
-                    </a:p>
-                  </a:txBody>
-                  <a:tcPr>
-                    <a:solidFill>
-                      <a:srgbClr val="F2F2F2"/>
-                    </a:solidFill>
-                  </a:tcPr>
-                </a:tc>
-                <a:tc>
-                  <a:txBody>
-                    <a:bodyPr wrap="none"/>
-                    <a:lstStyle/>
-                    <a:p>
-                      <a:pPr algn="ctr"/>
-                      <a:r>
-                        <a:rPr sz="850" b="1" i="0">
-                          <a:solidFill>
-                            <a:srgbClr val="262626"/>
-                          </a:solidFill>
-                          <a:latin typeface="Arial"/>
-                        </a:rPr>
-                        <a:t>9:05</a:t>
+                        <a:t>8:50</a:t>
                       </a:r>
                     </a:p>
                   </a:txBody>
@@ -10576,7 +10868,7 @@
                           </a:solidFill>
                           <a:latin typeface="Arial"/>
                         </a:rPr>
-                        <a:t>18:07</a:t>
+                        <a:t>17:33</a:t>
                       </a:r>
                     </a:p>
                   </a:txBody>
@@ -10599,7 +10891,7 @@
                           </a:solidFill>
                           <a:latin typeface="Arial"/>
                         </a:rPr>
-                        <a:t>17/14</a:t>
+                        <a:t>9/23</a:t>
                       </a:r>
                     </a:p>
                   </a:txBody>
@@ -11035,7 +11327,7 @@
                           </a:solidFill>
                           <a:latin typeface="Arial"/>
                         </a:rPr>
-                        <a:t>Vittoria Lopes</a:t>
+                        <a:t>Giorgia Messori</a:t>
                       </a:r>
                     </a:p>
                   </a:txBody>
@@ -11081,7 +11373,7 @@
                           </a:solidFill>
                           <a:latin typeface="Arial"/>
                         </a:rPr>
-                        <a:t>10:11</a:t>
+                        <a:t>9:23</a:t>
                       </a:r>
                     </a:p>
                   </a:txBody>
@@ -11104,7 +11396,7 @@
                           </a:solidFill>
                           <a:latin typeface="Arial"/>
                         </a:rPr>
-                        <a:t>19:15</a:t>
+                        <a:t>—</a:t>
                       </a:r>
                     </a:p>
                   </a:txBody>
@@ -11127,7 +11419,7 @@
                           </a:solidFill>
                           <a:latin typeface="Arial"/>
                         </a:rPr>
-                        <a:t>7/8</a:t>
+                        <a:t>3/0</a:t>
                       </a:r>
                     </a:p>
                   </a:txBody>
@@ -11175,7 +11467,7 @@
                           </a:solidFill>
                           <a:latin typeface="Arial"/>
                         </a:rPr>
-                        <a:t>Sophie Evans</a:t>
+                        <a:t>Lea Marchal</a:t>
                       </a:r>
                     </a:p>
                   </a:txBody>
@@ -11198,7 +11490,7 @@
                           </a:solidFill>
                           <a:latin typeface="Arial"/>
                         </a:rPr>
-                        <a:t>89%</a:t>
+                        <a:t>100%</a:t>
                       </a:r>
                     </a:p>
                   </a:txBody>
@@ -11221,7 +11513,7 @@
                           </a:solidFill>
                           <a:latin typeface="Arial"/>
                         </a:rPr>
-                        <a:t>9:17</a:t>
+                        <a:t>9:30</a:t>
                       </a:r>
                     </a:p>
                   </a:txBody>
@@ -11244,7 +11536,7 @@
                           </a:solidFill>
                           <a:latin typeface="Arial"/>
                         </a:rPr>
-                        <a:t>19:22</a:t>
+                        <a:t>—</a:t>
                       </a:r>
                     </a:p>
                   </a:txBody>
@@ -11267,7 +11559,7 @@
                           </a:solidFill>
                           <a:latin typeface="Arial"/>
                         </a:rPr>
-                        <a:t>3/6</a:t>
+                        <a:t>4/0</a:t>
                       </a:r>
                     </a:p>
                   </a:txBody>
@@ -11315,7 +11607,7 @@
                           </a:solidFill>
                           <a:latin typeface="Arial"/>
                         </a:rPr>
-                        <a:t>Cassandre Beaugrand</a:t>
+                        <a:t>Sophie Alden</a:t>
                       </a:r>
                     </a:p>
                   </a:txBody>
@@ -11338,7 +11630,7 @@
                           </a:solidFill>
                           <a:latin typeface="Arial"/>
                         </a:rPr>
-                        <a:t>87%</a:t>
+                        <a:t>100%</a:t>
                       </a:r>
                     </a:p>
                   </a:txBody>
@@ -11361,7 +11653,7 @@
                           </a:solidFill>
                           <a:latin typeface="Arial"/>
                         </a:rPr>
-                        <a:t>9:50</a:t>
+                        <a:t>9:33</a:t>
                       </a:r>
                     </a:p>
                   </a:txBody>
@@ -11384,7 +11676,7 @@
                           </a:solidFill>
                           <a:latin typeface="Arial"/>
                         </a:rPr>
-                        <a:t>19:42</a:t>
+                        <a:t>18:41</a:t>
                       </a:r>
                     </a:p>
                   </a:txBody>
@@ -11407,7 +11699,7 @@
                           </a:solidFill>
                           <a:latin typeface="Arial"/>
                         </a:rPr>
-                        <a:t>5/10</a:t>
+                        <a:t>7/2</a:t>
                       </a:r>
                     </a:p>
                   </a:txBody>
@@ -11455,7 +11747,7 @@
                           </a:solidFill>
                           <a:latin typeface="Arial"/>
                         </a:rPr>
-                        <a:t>Desirae Ridenour</a:t>
+                        <a:t>Mikayla Messer</a:t>
                       </a:r>
                     </a:p>
                   </a:txBody>
@@ -11478,7 +11770,7 @@
                           </a:solidFill>
                           <a:latin typeface="Arial"/>
                         </a:rPr>
-                        <a:t>81%</a:t>
+                        <a:t>100%</a:t>
                       </a:r>
                     </a:p>
                   </a:txBody>
@@ -11501,7 +11793,7 @@
                           </a:solidFill>
                           <a:latin typeface="Arial"/>
                         </a:rPr>
-                        <a:t>10:11</a:t>
+                        <a:t>9:43</a:t>
                       </a:r>
                     </a:p>
                   </a:txBody>
@@ -11524,7 +11816,7 @@
                           </a:solidFill>
                           <a:latin typeface="Arial"/>
                         </a:rPr>
-                        <a:t>19:31</a:t>
+                        <a:t>20:01</a:t>
                       </a:r>
                     </a:p>
                   </a:txBody>
@@ -11547,7 +11839,7 @@
                           </a:solidFill>
                           <a:latin typeface="Arial"/>
                         </a:rPr>
-                        <a:t>20/1</a:t>
+                        <a:t>8/1</a:t>
                       </a:r>
                     </a:p>
                   </a:txBody>
@@ -11595,7 +11887,7 @@
                           </a:solidFill>
                           <a:latin typeface="Arial"/>
                         </a:rPr>
-                        <a:t>Erin McConnell</a:t>
+                        <a:t>Jasmine Greaves</a:t>
                       </a:r>
                     </a:p>
                   </a:txBody>
@@ -11618,7 +11910,7 @@
                           </a:solidFill>
                           <a:latin typeface="Arial"/>
                         </a:rPr>
-                        <a:t>77%</a:t>
+                        <a:t>100%</a:t>
                       </a:r>
                     </a:p>
                   </a:txBody>
@@ -11641,7 +11933,7 @@
                           </a:solidFill>
                           <a:latin typeface="Arial"/>
                         </a:rPr>
-                        <a:t>9:28</a:t>
+                        <a:t>9:57</a:t>
                       </a:r>
                     </a:p>
                   </a:txBody>
@@ -11687,7 +11979,7 @@
                           </a:solidFill>
                           <a:latin typeface="Arial"/>
                         </a:rPr>
-                        <a:t>13/0</a:t>
+                        <a:t>3/0</a:t>
                       </a:r>
                     </a:p>
                   </a:txBody>
@@ -11735,7 +12027,7 @@
                           </a:solidFill>
                           <a:latin typeface="Arial"/>
                         </a:rPr>
-                        <a:t>Sophia Howell</a:t>
+                        <a:t>Astrid Bergman</a:t>
                       </a:r>
                     </a:p>
                   </a:txBody>
@@ -11758,7 +12050,7 @@
                           </a:solidFill>
                           <a:latin typeface="Arial"/>
                         </a:rPr>
-                        <a:t>75%</a:t>
+                        <a:t>100%</a:t>
                       </a:r>
                     </a:p>
                   </a:txBody>
@@ -11781,7 +12073,7 @@
                           </a:solidFill>
                           <a:latin typeface="Arial"/>
                         </a:rPr>
-                        <a:t>9:44</a:t>
+                        <a:t>9:57</a:t>
                       </a:r>
                     </a:p>
                   </a:txBody>
@@ -11804,7 +12096,7 @@
                           </a:solidFill>
                           <a:latin typeface="Arial"/>
                         </a:rPr>
-                        <a:t>19:46</a:t>
+                        <a:t>—</a:t>
                       </a:r>
                     </a:p>
                   </a:txBody>
@@ -11827,7 +12119,7 @@
                           </a:solidFill>
                           <a:latin typeface="Arial"/>
                         </a:rPr>
-                        <a:t>24/8</a:t>
+                        <a:t>3/0</a:t>
                       </a:r>
                     </a:p>
                   </a:txBody>
@@ -11875,7 +12167,7 @@
                           </a:solidFill>
                           <a:latin typeface="Arial"/>
                         </a:rPr>
-                        <a:t>Márta Kropkó</a:t>
+                        <a:t>Saki Yanagihara</a:t>
                       </a:r>
                     </a:p>
                   </a:txBody>
@@ -11898,7 +12190,7 @@
                           </a:solidFill>
                           <a:latin typeface="Arial"/>
                         </a:rPr>
-                        <a:t>71%</a:t>
+                        <a:t>100%</a:t>
                       </a:r>
                     </a:p>
                   </a:txBody>
@@ -11921,7 +12213,7 @@
                           </a:solidFill>
                           <a:latin typeface="Arial"/>
                         </a:rPr>
-                        <a:t>9:38</a:t>
+                        <a:t>10:05</a:t>
                       </a:r>
                     </a:p>
                   </a:txBody>
@@ -11944,7 +12236,7 @@
                           </a:solidFill>
                           <a:latin typeface="Arial"/>
                         </a:rPr>
-                        <a:t>18:59</a:t>
+                        <a:t>21:00</a:t>
                       </a:r>
                     </a:p>
                   </a:txBody>
@@ -11967,7 +12259,7 @@
                           </a:solidFill>
                           <a:latin typeface="Arial"/>
                         </a:rPr>
-                        <a:t>12/9</a:t>
+                        <a:t>4/1</a:t>
                       </a:r>
                     </a:p>
                   </a:txBody>
@@ -12015,7 +12307,7 @@
                           </a:solidFill>
                           <a:latin typeface="Arial"/>
                         </a:rPr>
-                        <a:t>Sian Rainsley</a:t>
+                        <a:t>Vittoria Lopes</a:t>
                       </a:r>
                     </a:p>
                   </a:txBody>
@@ -12038,7 +12330,7 @@
                           </a:solidFill>
                           <a:latin typeface="Arial"/>
                         </a:rPr>
-                        <a:t>71%</a:t>
+                        <a:t>100%</a:t>
                       </a:r>
                     </a:p>
                   </a:txBody>
@@ -12061,7 +12353,7 @@
                           </a:solidFill>
                           <a:latin typeface="Arial"/>
                         </a:rPr>
-                        <a:t>9:45</a:t>
+                        <a:t>10:11</a:t>
                       </a:r>
                     </a:p>
                   </a:txBody>
@@ -12084,7 +12376,7 @@
                           </a:solidFill>
                           <a:latin typeface="Arial"/>
                         </a:rPr>
-                        <a:t>18:46</a:t>
+                        <a:t>19:15</a:t>
                       </a:r>
                     </a:p>
                   </a:txBody>
@@ -12107,7 +12399,7 @@
                           </a:solidFill>
                           <a:latin typeface="Arial"/>
                         </a:rPr>
-                        <a:t>8/9</a:t>
+                        <a:t>7/8</a:t>
                       </a:r>
                     </a:p>
                   </a:txBody>
@@ -12155,7 +12447,7 @@
                           </a:solidFill>
                           <a:latin typeface="Arial"/>
                         </a:rPr>
-                        <a:t>Kate Waugh</a:t>
+                        <a:t>Flora Duffy</a:t>
                       </a:r>
                     </a:p>
                   </a:txBody>
@@ -12178,7 +12470,7 @@
                           </a:solidFill>
                           <a:latin typeface="Arial"/>
                         </a:rPr>
-                        <a:t>62%</a:t>
+                        <a:t>100%</a:t>
                       </a:r>
                     </a:p>
                   </a:txBody>
@@ -12201,7 +12493,7 @@
                           </a:solidFill>
                           <a:latin typeface="Arial"/>
                         </a:rPr>
-                        <a:t>9:43</a:t>
+                        <a:t>—</a:t>
                       </a:r>
                     </a:p>
                   </a:txBody>
@@ -12224,7 +12516,7 @@
                           </a:solidFill>
                           <a:latin typeface="Arial"/>
                         </a:rPr>
-                        <a:t>20:29</a:t>
+                        <a:t>19:01</a:t>
                       </a:r>
                     </a:p>
                   </a:txBody>
@@ -12247,7 +12539,7 @@
                           </a:solidFill>
                           <a:latin typeface="Arial"/>
                         </a:rPr>
-                        <a:t>7/9</a:t>
+                        <a:t>0/4</a:t>
                       </a:r>
                     </a:p>
                   </a:txBody>
@@ -12289,13 +12581,36 @@
                     <a:p>
                       <a:pPr algn="l"/>
                       <a:r>
+                        <a:rPr sz="850" b="0" i="0">
+                          <a:solidFill>
+                            <a:srgbClr val="262626"/>
+                          </a:solidFill>
+                          <a:latin typeface="Arial"/>
+                        </a:rPr>
+                        <a:t>Bianca Seregni</a:t>
+                      </a:r>
+                    </a:p>
+                  </a:txBody>
+                  <a:tcPr>
+                    <a:solidFill>
+                      <a:srgbClr val="FFFFFF"/>
+                    </a:solidFill>
+                  </a:tcPr>
+                </a:tc>
+                <a:tc>
+                  <a:txBody>
+                    <a:bodyPr wrap="none"/>
+                    <a:lstStyle/>
+                    <a:p>
+                      <a:pPr algn="ctr"/>
+                      <a:r>
                         <a:rPr sz="850" b="1" i="0">
                           <a:solidFill>
-                            <a:srgbClr val="C00000"/>
-                          </a:solidFill>
-                          <a:latin typeface="Arial"/>
-                        </a:rPr>
-                        <a:t>Kirsten Kasper</a:t>
+                            <a:srgbClr val="262626"/>
+                          </a:solidFill>
+                          <a:latin typeface="Arial"/>
+                        </a:rPr>
+                        <a:t>93%</a:t>
                       </a:r>
                     </a:p>
                   </a:txBody>
@@ -12318,30 +12633,7 @@
                           </a:solidFill>
                           <a:latin typeface="Arial"/>
                         </a:rPr>
-                        <a:t>62%</a:t>
-                      </a:r>
-                    </a:p>
-                  </a:txBody>
-                  <a:tcPr>
-                    <a:solidFill>
-                      <a:srgbClr val="FFFFFF"/>
-                    </a:solidFill>
-                  </a:tcPr>
-                </a:tc>
-                <a:tc>
-                  <a:txBody>
-                    <a:bodyPr wrap="none"/>
-                    <a:lstStyle/>
-                    <a:p>
-                      <a:pPr algn="ctr"/>
-                      <a:r>
-                        <a:rPr sz="850" b="1" i="0">
-                          <a:solidFill>
-                            <a:srgbClr val="262626"/>
-                          </a:solidFill>
-                          <a:latin typeface="Arial"/>
-                        </a:rPr>
-                        <a:t>10:06</a:t>
+                        <a:t>9:02</a:t>
                       </a:r>
                     </a:p>
                   </a:txBody>
@@ -12364,7 +12656,7 @@
                           </a:solidFill>
                           <a:latin typeface="Arial"/>
                         </a:rPr>
-                        <a:t>20:03</a:t>
+                        <a:t>19:25</a:t>
                       </a:r>
                     </a:p>
                   </a:txBody>
@@ -12387,7 +12679,7 @@
                           </a:solidFill>
                           <a:latin typeface="Arial"/>
                         </a:rPr>
-                        <a:t>6/10</a:t>
+                        <a:t>8/19</a:t>
                       </a:r>
                     </a:p>
                   </a:txBody>
@@ -12435,7 +12727,7 @@
                           </a:solidFill>
                           <a:latin typeface="Arial"/>
                         </a:rPr>
-                        <a:t>Beth Potter</a:t>
+                        <a:t>Britney Brown</a:t>
                       </a:r>
                     </a:p>
                   </a:txBody>
@@ -12458,7 +12750,7 @@
                           </a:solidFill>
                           <a:latin typeface="Arial"/>
                         </a:rPr>
-                        <a:t>61%</a:t>
+                        <a:t>90%</a:t>
                       </a:r>
                     </a:p>
                   </a:txBody>
@@ -12481,7 +12773,7 @@
                           </a:solidFill>
                           <a:latin typeface="Arial"/>
                         </a:rPr>
-                        <a:t>9:56</a:t>
+                        <a:t>10:04</a:t>
                       </a:r>
                     </a:p>
                   </a:txBody>
@@ -12504,7 +12796,7 @@
                           </a:solidFill>
                           <a:latin typeface="Arial"/>
                         </a:rPr>
-                        <a:t>19:08</a:t>
+                        <a:t>—</a:t>
                       </a:r>
                     </a:p>
                   </a:txBody>
@@ -12527,7 +12819,7 @@
                           </a:solidFill>
                           <a:latin typeface="Arial"/>
                         </a:rPr>
-                        <a:t>5/13</a:t>
+                        <a:t>10/0</a:t>
                       </a:r>
                     </a:p>
                   </a:txBody>
@@ -12575,7 +12867,7 @@
                           </a:solidFill>
                           <a:latin typeface="Arial"/>
                         </a:rPr>
-                        <a:t>Rosa Elena Martinez Melchior</a:t>
+                        <a:t>Sophie Evans</a:t>
                       </a:r>
                     </a:p>
                   </a:txBody>
@@ -12598,7 +12890,7 @@
                           </a:solidFill>
                           <a:latin typeface="Arial"/>
                         </a:rPr>
-                        <a:t>61%</a:t>
+                        <a:t>89%</a:t>
                       </a:r>
                     </a:p>
                   </a:txBody>
@@ -12621,7 +12913,7 @@
                           </a:solidFill>
                           <a:latin typeface="Arial"/>
                         </a:rPr>
-                        <a:t>10:08</a:t>
+                        <a:t>9:17</a:t>
                       </a:r>
                     </a:p>
                   </a:txBody>
@@ -12644,7 +12936,7 @@
                           </a:solidFill>
                           <a:latin typeface="Arial"/>
                         </a:rPr>
-                        <a:t>20:33</a:t>
+                        <a:t>19:22</a:t>
                       </a:r>
                     </a:p>
                   </a:txBody>
@@ -12667,7 +12959,7 @@
                           </a:solidFill>
                           <a:latin typeface="Arial"/>
                         </a:rPr>
-                        <a:t>17/11</a:t>
+                        <a:t>3/6</a:t>
                       </a:r>
                     </a:p>
                   </a:txBody>
@@ -12709,59 +13001,82 @@
                     <a:p>
                       <a:pPr algn="l"/>
                       <a:r>
+                        <a:rPr sz="850" b="1" i="0">
+                          <a:solidFill>
+                            <a:srgbClr val="C00000"/>
+                          </a:solidFill>
+                          <a:latin typeface="Arial"/>
+                        </a:rPr>
+                        <a:t>Caroline Theil</a:t>
+                      </a:r>
+                    </a:p>
+                  </a:txBody>
+                  <a:tcPr>
+                    <a:solidFill>
+                      <a:srgbClr val="F2F2F2"/>
+                    </a:solidFill>
+                  </a:tcPr>
+                </a:tc>
+                <a:tc>
+                  <a:txBody>
+                    <a:bodyPr wrap="none"/>
+                    <a:lstStyle/>
+                    <a:p>
+                      <a:pPr algn="ctr"/>
+                      <a:r>
+                        <a:rPr sz="850" b="1" i="0">
+                          <a:solidFill>
+                            <a:srgbClr val="262626"/>
+                          </a:solidFill>
+                          <a:latin typeface="Arial"/>
+                        </a:rPr>
+                        <a:t>89%</a:t>
+                      </a:r>
+                    </a:p>
+                  </a:txBody>
+                  <a:tcPr>
+                    <a:solidFill>
+                      <a:srgbClr val="F2F2F2"/>
+                    </a:solidFill>
+                  </a:tcPr>
+                </a:tc>
+                <a:tc>
+                  <a:txBody>
+                    <a:bodyPr wrap="none"/>
+                    <a:lstStyle/>
+                    <a:p>
+                      <a:pPr algn="ctr"/>
+                      <a:r>
+                        <a:rPr sz="850" b="1" i="0">
+                          <a:solidFill>
+                            <a:srgbClr val="262626"/>
+                          </a:solidFill>
+                          <a:latin typeface="Arial"/>
+                        </a:rPr>
+                        <a:t>9:46</a:t>
+                      </a:r>
+                    </a:p>
+                  </a:txBody>
+                  <a:tcPr>
+                    <a:solidFill>
+                      <a:srgbClr val="F2F2F2"/>
+                    </a:solidFill>
+                  </a:tcPr>
+                </a:tc>
+                <a:tc>
+                  <a:txBody>
+                    <a:bodyPr wrap="none"/>
+                    <a:lstStyle/>
+                    <a:p>
+                      <a:pPr algn="ctr"/>
+                      <a:r>
                         <a:rPr sz="850" b="0" i="0">
                           <a:solidFill>
                             <a:srgbClr val="262626"/>
                           </a:solidFill>
                           <a:latin typeface="Arial"/>
                         </a:rPr>
-                        <a:t>Kanae Takenaka</a:t>
-                      </a:r>
-                    </a:p>
-                  </a:txBody>
-                  <a:tcPr>
-                    <a:solidFill>
-                      <a:srgbClr val="F2F2F2"/>
-                    </a:solidFill>
-                  </a:tcPr>
-                </a:tc>
-                <a:tc>
-                  <a:txBody>
-                    <a:bodyPr wrap="none"/>
-                    <a:lstStyle/>
-                    <a:p>
-                      <a:pPr algn="ctr"/>
-                      <a:r>
-                        <a:rPr sz="850" b="1" i="0">
-                          <a:solidFill>
-                            <a:srgbClr val="262626"/>
-                          </a:solidFill>
-                          <a:latin typeface="Arial"/>
-                        </a:rPr>
-                        <a:t>56%</a:t>
-                      </a:r>
-                    </a:p>
-                  </a:txBody>
-                  <a:tcPr>
-                    <a:solidFill>
-                      <a:srgbClr val="F2F2F2"/>
-                    </a:solidFill>
-                  </a:tcPr>
-                </a:tc>
-                <a:tc>
-                  <a:txBody>
-                    <a:bodyPr wrap="none"/>
-                    <a:lstStyle/>
-                    <a:p>
-                      <a:pPr algn="ctr"/>
-                      <a:r>
-                        <a:rPr sz="850" b="1" i="0">
-                          <a:solidFill>
-                            <a:srgbClr val="262626"/>
-                          </a:solidFill>
-                          <a:latin typeface="Arial"/>
-                        </a:rPr>
-                        <a:t>10:04</a:t>
+                        <a:t>19:33</a:t>
                       </a:r>
                     </a:p>
                   </a:txBody>
@@ -12780,34 +13095,11 @@
                       <a:r>
                         <a:rPr sz="850" b="0" i="0">
                           <a:solidFill>
-                            <a:srgbClr val="262626"/>
-                          </a:solidFill>
-                          <a:latin typeface="Arial"/>
-                        </a:rPr>
-                        <a:t>19:50</a:t>
-                      </a:r>
-                    </a:p>
-                  </a:txBody>
-                  <a:tcPr>
-                    <a:solidFill>
-                      <a:srgbClr val="F2F2F2"/>
-                    </a:solidFill>
-                  </a:tcPr>
-                </a:tc>
-                <a:tc>
-                  <a:txBody>
-                    <a:bodyPr wrap="none"/>
-                    <a:lstStyle/>
-                    <a:p>
-                      <a:pPr algn="ctr"/>
-                      <a:r>
-                        <a:rPr sz="850" b="0" i="0">
-                          <a:solidFill>
                             <a:srgbClr val="BFBFBF"/>
                           </a:solidFill>
                           <a:latin typeface="Arial"/>
                         </a:rPr>
-                        <a:t>10/6</a:t>
+                        <a:t>8/1</a:t>
                       </a:r>
                     </a:p>
                   </a:txBody>
@@ -13139,7 +13431,7 @@
                 </a:solidFill>
                 <a:latin typeface="Arial"/>
               </a:rPr>
-              <a:t>As of 2026-08-10   •   World Triathlon Rankings   •   Heading into Weihai   •   Race tier: WTCS</a:t>
+              <a:t>As of 2026-08-31   •   World Triathlon Rankings   •   Heading into Weihai   •   Race tier: WTCS</a:t>
             </a:r>
           </a:p>
         </p:txBody>
@@ -14199,7 +14491,7 @@
                           </a:solidFill>
                           <a:latin typeface="Arial"/>
                         </a:rPr>
-                        <a:t>2,898</a:t>
+                        <a:t>3,233</a:t>
                       </a:r>
                     </a:p>
                   </a:txBody>
@@ -14270,7 +14562,7 @@
                           </a:solidFill>
                           <a:latin typeface="Arial"/>
                         </a:rPr>
-                        <a:t>22</a:t>
+                        <a:t>24</a:t>
                       </a:r>
                     </a:p>
                   </a:txBody>
@@ -14387,7 +14679,7 @@
                           </a:solidFill>
                           <a:latin typeface="Arial"/>
                         </a:rPr>
-                        <a:t>27</a:t>
+                        <a:t>33</a:t>
                       </a:r>
                     </a:p>
                   </a:txBody>
@@ -14433,7 +14725,7 @@
                           </a:solidFill>
                           <a:latin typeface="Arial"/>
                         </a:rPr>
-                        <a:t>2,680</a:t>
+                        <a:t>2,585</a:t>
                       </a:r>
                     </a:p>
                   </a:txBody>
@@ -14456,30 +14748,30 @@
                           </a:solidFill>
                           <a:latin typeface="Arial"/>
                         </a:rPr>
+                        <a:t>4</a:t>
+                      </a:r>
+                    </a:p>
+                  </a:txBody>
+                  <a:tcPr>
+                    <a:solidFill>
+                      <a:srgbClr val="FFFFFF"/>
+                    </a:solidFill>
+                  </a:tcPr>
+                </a:tc>
+                <a:tc>
+                  <a:txBody>
+                    <a:bodyPr wrap="none"/>
+                    <a:lstStyle/>
+                    <a:p>
+                      <a:pPr algn="ctr"/>
+                      <a:r>
+                        <a:rPr sz="850" b="0" i="0">
+                          <a:solidFill>
+                            <a:srgbClr val="262626"/>
+                          </a:solidFill>
+                          <a:latin typeface="Arial"/>
+                        </a:rPr>
                         <a:t>5</a:t>
-                      </a:r>
-                    </a:p>
-                  </a:txBody>
-                  <a:tcPr>
-                    <a:solidFill>
-                      <a:srgbClr val="FFFFFF"/>
-                    </a:solidFill>
-                  </a:tcPr>
-                </a:tc>
-                <a:tc>
-                  <a:txBody>
-                    <a:bodyPr wrap="none"/>
-                    <a:lstStyle/>
-                    <a:p>
-                      <a:pPr algn="ctr"/>
-                      <a:r>
-                        <a:rPr sz="850" b="0" i="0">
-                          <a:solidFill>
-                            <a:srgbClr val="262626"/>
-                          </a:solidFill>
-                          <a:latin typeface="Arial"/>
-                        </a:rPr>
-                        <a:t>4</a:t>
                       </a:r>
                     </a:p>
                   </a:txBody>
@@ -14504,7 +14796,7 @@
                           </a:solidFill>
                           <a:latin typeface="Arial"/>
                         </a:rPr>
-                        <a:t>42</a:t>
+                        <a:t>40</a:t>
                       </a:r>
                     </a:p>
                   </a:txBody>
@@ -14621,7 +14913,7 @@
                           </a:solidFill>
                           <a:latin typeface="Arial"/>
                         </a:rPr>
-                        <a:t>52</a:t>
+                        <a:t>45</a:t>
                       </a:r>
                     </a:p>
                   </a:txBody>
@@ -14644,7 +14936,7 @@
                           </a:solidFill>
                           <a:latin typeface="Arial"/>
                         </a:rPr>
-                        <a:t>Seth Rider</a:t>
+                        <a:t>Sullivan Middaugh</a:t>
                       </a:r>
                     </a:p>
                   </a:txBody>
@@ -14667,7 +14959,7 @@
                           </a:solidFill>
                           <a:latin typeface="Arial"/>
                         </a:rPr>
-                        <a:t>2,243</a:t>
+                        <a:t>2,281</a:t>
                       </a:r>
                     </a:p>
                   </a:txBody>
@@ -14713,7 +15005,7 @@
                           </a:solidFill>
                           <a:latin typeface="Arial"/>
                         </a:rPr>
-                        <a:t>4</a:t>
+                        <a:t>6</a:t>
                       </a:r>
                     </a:p>
                   </a:txBody>
@@ -14738,7 +15030,7 @@
                           </a:solidFill>
                           <a:latin typeface="Arial"/>
                         </a:rPr>
-                        <a:t>53</a:t>
+                        <a:t>48</a:t>
                       </a:r>
                     </a:p>
                   </a:txBody>
@@ -14761,7 +15053,7 @@
                           </a:solidFill>
                           <a:latin typeface="Arial"/>
                         </a:rPr>
-                        <a:t>Sullivan Middaugh</a:t>
+                        <a:t>Seth Rider</a:t>
                       </a:r>
                     </a:p>
                   </a:txBody>
@@ -14784,7 +15076,7 @@
                           </a:solidFill>
                           <a:latin typeface="Arial"/>
                         </a:rPr>
-                        <a:t>2,233</a:t>
+                        <a:t>2,259</a:t>
                       </a:r>
                     </a:p>
                   </a:txBody>
@@ -14830,7 +15122,7 @@
                           </a:solidFill>
                           <a:latin typeface="Arial"/>
                         </a:rPr>
-                        <a:t>6</a:t>
+                        <a:t>5</a:t>
                       </a:r>
                     </a:p>
                   </a:txBody>
@@ -14855,7 +15147,7 @@
                           </a:solidFill>
                           <a:latin typeface="Arial"/>
                         </a:rPr>
-                        <a:t>72</a:t>
+                        <a:t>68</a:t>
                       </a:r>
                     </a:p>
                   </a:txBody>
@@ -14901,7 +15193,7 @@
                           </a:solidFill>
                           <a:latin typeface="Arial"/>
                         </a:rPr>
-                        <a:t>1,812</a:t>
+                        <a:t>1,988</a:t>
                       </a:r>
                     </a:p>
                   </a:txBody>
@@ -14972,7 +15264,7 @@
                           </a:solidFill>
                           <a:latin typeface="Arial"/>
                         </a:rPr>
-                        <a:t>77</a:t>
+                        <a:t>81</a:t>
                       </a:r>
                     </a:p>
                   </a:txBody>
@@ -14995,7 +15287,7 @@
                           </a:solidFill>
                           <a:latin typeface="Arial"/>
                         </a:rPr>
-                        <a:t>Blake Bullard</a:t>
+                        <a:t>Chase McQueen</a:t>
                       </a:r>
                     </a:p>
                   </a:txBody>
@@ -15018,7 +15310,7 @@
                           </a:solidFill>
                           <a:latin typeface="Arial"/>
                         </a:rPr>
-                        <a:t>1,732</a:t>
+                        <a:t>1,755</a:t>
                       </a:r>
                     </a:p>
                   </a:txBody>
@@ -15089,7 +15381,7 @@
                           </a:solidFill>
                           <a:latin typeface="Arial"/>
                         </a:rPr>
-                        <a:t>81</a:t>
+                        <a:t>82</a:t>
                       </a:r>
                     </a:p>
                   </a:txBody>
@@ -15112,7 +15404,7 @@
                           </a:solidFill>
                           <a:latin typeface="Arial"/>
                         </a:rPr>
-                        <a:t>Chase McQueen</a:t>
+                        <a:t>Blake Bullard</a:t>
                       </a:r>
                     </a:p>
                   </a:txBody>
@@ -15135,7 +15427,7 @@
                           </a:solidFill>
                           <a:latin typeface="Arial"/>
                         </a:rPr>
-                        <a:t>1,708</a:t>
+                        <a:t>1,732</a:t>
                       </a:r>
                     </a:p>
                   </a:txBody>
@@ -15206,7 +15498,7 @@
                           </a:solidFill>
                           <a:latin typeface="Arial"/>
                         </a:rPr>
-                        <a:t>106</a:t>
+                        <a:t>95</a:t>
                       </a:r>
                     </a:p>
                   </a:txBody>
@@ -15229,7 +15521,7 @@
                           </a:solidFill>
                           <a:latin typeface="Arial"/>
                         </a:rPr>
-                        <a:t>Porter Middaugh</a:t>
+                        <a:t>Darr Smith</a:t>
                       </a:r>
                     </a:p>
                   </a:txBody>
@@ -15252,7 +15544,7 @@
                           </a:solidFill>
                           <a:latin typeface="Arial"/>
                         </a:rPr>
-                        <a:t>1,513</a:t>
+                        <a:t>1,619</a:t>
                       </a:r>
                     </a:p>
                   </a:txBody>
@@ -15323,7 +15615,7 @@
                           </a:solidFill>
                           <a:latin typeface="Arial"/>
                         </a:rPr>
-                        <a:t>112</a:t>
+                        <a:t>105</a:t>
                       </a:r>
                     </a:p>
                   </a:txBody>
@@ -15346,7 +15638,7 @@
                           </a:solidFill>
                           <a:latin typeface="Arial"/>
                         </a:rPr>
-                        <a:t>Darr Smith</a:t>
+                        <a:t>Porter Middaugh</a:t>
                       </a:r>
                     </a:p>
                   </a:txBody>
@@ -15369,7 +15661,7 @@
                           </a:solidFill>
                           <a:latin typeface="Arial"/>
                         </a:rPr>
-                        <a:t>1,452</a:t>
+                        <a:t>1,513</a:t>
                       </a:r>
                     </a:p>
                   </a:txBody>
@@ -15440,7 +15732,7 @@
                           </a:solidFill>
                           <a:latin typeface="Arial"/>
                         </a:rPr>
-                        <a:t>115</a:t>
+                        <a:t>119</a:t>
                       </a:r>
                     </a:p>
                   </a:txBody>
@@ -15557,7 +15849,7 @@
                           </a:solidFill>
                           <a:latin typeface="Arial"/>
                         </a:rPr>
-                        <a:t>177</a:t>
+                        <a:t>134</a:t>
                       </a:r>
                     </a:p>
                   </a:txBody>
@@ -15603,7 +15895,7 @@
                           </a:solidFill>
                           <a:latin typeface="Arial"/>
                         </a:rPr>
-                        <a:t>1,025</a:t>
+                        <a:t>1,274</a:t>
                       </a:r>
                     </a:p>
                   </a:txBody>
@@ -15674,7 +15966,7 @@
                           </a:solidFill>
                           <a:latin typeface="Arial"/>
                         </a:rPr>
-                        <a:t>281</a:t>
+                        <a:t>280</a:t>
                       </a:r>
                     </a:p>
                   </a:txBody>
@@ -15791,7 +16083,7 @@
                           </a:solidFill>
                           <a:latin typeface="Arial"/>
                         </a:rPr>
-                        <a:t>361</a:t>
+                        <a:t>349</a:t>
                       </a:r>
                     </a:p>
                   </a:txBody>
@@ -15814,7 +16106,7 @@
                           </a:solidFill>
                           <a:latin typeface="Arial"/>
                         </a:rPr>
-                        <a:t>Isaac Lamprecht</a:t>
+                        <a:t>Foster Wilfong</a:t>
                       </a:r>
                     </a:p>
                   </a:txBody>
@@ -15837,7 +16129,7 @@
                           </a:solidFill>
                           <a:latin typeface="Arial"/>
                         </a:rPr>
-                        <a:t>417</a:t>
+                        <a:t>448</a:t>
                       </a:r>
                     </a:p>
                   </a:txBody>
@@ -15860,7 +16152,7 @@
                           </a:solidFill>
                           <a:latin typeface="Arial"/>
                         </a:rPr>
-                        <a:t>6</a:t>
+                        <a:t>4</a:t>
                       </a:r>
                     </a:p>
                   </a:txBody>
@@ -15883,7 +16175,7 @@
                           </a:solidFill>
                           <a:latin typeface="Arial"/>
                         </a:rPr>
-                        <a:t>2</a:t>
+                        <a:t>—</a:t>
                       </a:r>
                     </a:p>
                   </a:txBody>
@@ -16132,7 +16424,7 @@
                           </a:solidFill>
                           <a:latin typeface="Arial"/>
                         </a:rPr>
-                        <a:t>9</a:t>
+                        <a:t>6</a:t>
                       </a:r>
                     </a:p>
                   </a:txBody>
@@ -16178,7 +16470,7 @@
                           </a:solidFill>
                           <a:latin typeface="Arial"/>
                         </a:rPr>
-                        <a:t>5,091</a:t>
+                        <a:t>5,253</a:t>
                       </a:r>
                     </a:p>
                   </a:txBody>
@@ -16224,7 +16516,7 @@
                           </a:solidFill>
                           <a:latin typeface="Arial"/>
                         </a:rPr>
-                        <a:t>3</a:t>
+                        <a:t>4</a:t>
                       </a:r>
                     </a:p>
                   </a:txBody>
@@ -16249,7 +16541,7 @@
                           </a:solidFill>
                           <a:latin typeface="Arial"/>
                         </a:rPr>
-                        <a:t>16</a:t>
+                        <a:t>17</a:t>
                       </a:r>
                     </a:p>
                   </a:txBody>
@@ -16272,7 +16564,7 @@
                           </a:solidFill>
                           <a:latin typeface="Arial"/>
                         </a:rPr>
-                        <a:t>Gina Sereno</a:t>
+                        <a:t>Gwen Jorgensen</a:t>
                       </a:r>
                     </a:p>
                   </a:txBody>
@@ -16295,7 +16587,7 @@
                           </a:solidFill>
                           <a:latin typeface="Arial"/>
                         </a:rPr>
-                        <a:t>3,205</a:t>
+                        <a:t>3,371</a:t>
                       </a:r>
                     </a:p>
                   </a:txBody>
@@ -16366,7 +16658,7 @@
                           </a:solidFill>
                           <a:latin typeface="Arial"/>
                         </a:rPr>
-                        <a:t>26</a:t>
+                        <a:t>18</a:t>
                       </a:r>
                     </a:p>
                   </a:txBody>
@@ -16389,7 +16681,7 @@
                           </a:solidFill>
                           <a:latin typeface="Arial"/>
                         </a:rPr>
-                        <a:t>Gwen Jorgensen</a:t>
+                        <a:t>Gina Sereno</a:t>
                       </a:r>
                     </a:p>
                   </a:txBody>
@@ -16412,7 +16704,7 @@
                           </a:solidFill>
                           <a:latin typeface="Arial"/>
                         </a:rPr>
-                        <a:t>2,700</a:t>
+                        <a:t>3,295</a:t>
                       </a:r>
                     </a:p>
                   </a:txBody>
@@ -16483,7 +16775,7 @@
                           </a:solidFill>
                           <a:latin typeface="Arial"/>
                         </a:rPr>
-                        <a:t>37</a:t>
+                        <a:t>29</a:t>
                       </a:r>
                     </a:p>
                   </a:txBody>
@@ -16529,7 +16821,7 @@
                           </a:solidFill>
                           <a:latin typeface="Arial"/>
                         </a:rPr>
-                        <a:t>2,407</a:t>
+                        <a:t>2,692</a:t>
                       </a:r>
                     </a:p>
                   </a:txBody>
@@ -16575,7 +16867,7 @@
                           </a:solidFill>
                           <a:latin typeface="Arial"/>
                         </a:rPr>
-                        <a:t>6</a:t>
+                        <a:t>5</a:t>
                       </a:r>
                     </a:p>
                   </a:txBody>
@@ -16600,7 +16892,7 @@
                           </a:solidFill>
                           <a:latin typeface="Arial"/>
                         </a:rPr>
-                        <a:t>40</a:t>
+                        <a:t>44</a:t>
                       </a:r>
                     </a:p>
                   </a:txBody>
@@ -16646,7 +16938,7 @@
                           </a:solidFill>
                           <a:latin typeface="Arial"/>
                         </a:rPr>
-                        <a:t>2,341</a:t>
+                        <a:t>2,273</a:t>
                       </a:r>
                     </a:p>
                   </a:txBody>
@@ -16717,7 +17009,7 @@
                           </a:solidFill>
                           <a:latin typeface="Arial"/>
                         </a:rPr>
-                        <a:t>45</a:t>
+                        <a:t>49</a:t>
                       </a:r>
                     </a:p>
                   </a:txBody>
@@ -16834,7 +17126,7 @@
                           </a:solidFill>
                           <a:latin typeface="Arial"/>
                         </a:rPr>
-                        <a:t>51</a:t>
+                        <a:t>54</a:t>
                       </a:r>
                     </a:p>
                   </a:txBody>
@@ -16951,7 +17243,7 @@
                           </a:solidFill>
                           <a:latin typeface="Arial"/>
                         </a:rPr>
-                        <a:t>60</a:t>
+                        <a:t>59</a:t>
                       </a:r>
                     </a:p>
                   </a:txBody>
@@ -17068,7 +17360,7 @@
                           </a:solidFill>
                           <a:latin typeface="Arial"/>
                         </a:rPr>
-                        <a:t>86</a:t>
+                        <a:t>63</a:t>
                       </a:r>
                     </a:p>
                   </a:txBody>
@@ -17114,7 +17406,7 @@
                           </a:solidFill>
                           <a:latin typeface="Arial"/>
                         </a:rPr>
-                        <a:t>1,551</a:t>
+                        <a:t>1,914</a:t>
                       </a:r>
                     </a:p>
                   </a:txBody>
@@ -17137,7 +17429,7 @@
                           </a:solidFill>
                           <a:latin typeface="Arial"/>
                         </a:rPr>
-                        <a:t>5</a:t>
+                        <a:t>6</a:t>
                       </a:r>
                     </a:p>
                   </a:txBody>
@@ -17185,7 +17477,7 @@
                           </a:solidFill>
                           <a:latin typeface="Arial"/>
                         </a:rPr>
-                        <a:t>92</a:t>
+                        <a:t>96</a:t>
                       </a:r>
                     </a:p>
                   </a:txBody>
@@ -17231,7 +17523,7 @@
                           </a:solidFill>
                           <a:latin typeface="Arial"/>
                         </a:rPr>
-                        <a:t>1,479</a:t>
+                        <a:t>1,448</a:t>
                       </a:r>
                     </a:p>
                   </a:txBody>
@@ -17277,7 +17569,7 @@
                           </a:solidFill>
                           <a:latin typeface="Arial"/>
                         </a:rPr>
-                        <a:t>5</a:t>
+                        <a:t>4</a:t>
                       </a:r>
                     </a:p>
                   </a:txBody>
@@ -17302,7 +17594,7 @@
                           </a:solidFill>
                           <a:latin typeface="Arial"/>
                         </a:rPr>
-                        <a:t>100</a:t>
+                        <a:t>102</a:t>
                       </a:r>
                     </a:p>
                   </a:txBody>
@@ -17419,7 +17711,7 @@
                           </a:solidFill>
                           <a:latin typeface="Arial"/>
                         </a:rPr>
-                        <a:t>112</a:t>
+                        <a:t>114</a:t>
                       </a:r>
                     </a:p>
                   </a:txBody>
@@ -17653,7 +17945,7 @@
                           </a:solidFill>
                           <a:latin typeface="Arial"/>
                         </a:rPr>
-                        <a:t>161</a:t>
+                        <a:t>143</a:t>
                       </a:r>
                     </a:p>
                   </a:txBody>
@@ -17676,7 +17968,7 @@
                           </a:solidFill>
                           <a:latin typeface="Arial"/>
                         </a:rPr>
-                        <a:t>Katie McCune</a:t>
+                        <a:t>Faith Duncan</a:t>
                       </a:r>
                     </a:p>
                   </a:txBody>
@@ -17699,7 +17991,7 @@
                           </a:solidFill>
                           <a:latin typeface="Arial"/>
                         </a:rPr>
-                        <a:t>1,042</a:t>
+                        <a:t>1,156</a:t>
                       </a:r>
                     </a:p>
                   </a:txBody>
@@ -17745,7 +18037,7 @@
                           </a:solidFill>
                           <a:latin typeface="Arial"/>
                         </a:rPr>
-                        <a:t>1</a:t>
+                        <a:t>—</a:t>
                       </a:r>
                     </a:p>
                   </a:txBody>
@@ -17770,7 +18062,7 @@
                           </a:solidFill>
                           <a:latin typeface="Arial"/>
                         </a:rPr>
-                        <a:t>174</a:t>
+                        <a:t>163</a:t>
                       </a:r>
                     </a:p>
                   </a:txBody>
@@ -17793,7 +18085,7 @@
                           </a:solidFill>
                           <a:latin typeface="Arial"/>
                         </a:rPr>
-                        <a:t>Faith Duncan</a:t>
+                        <a:t>Katie McCune</a:t>
                       </a:r>
                     </a:p>
                   </a:txBody>
@@ -17816,7 +18108,7 @@
                           </a:solidFill>
                           <a:latin typeface="Arial"/>
                         </a:rPr>
-                        <a:t>940</a:t>
+                        <a:t>1,042</a:t>
                       </a:r>
                     </a:p>
                   </a:txBody>
@@ -17862,7 +18154,7 @@
                           </a:solidFill>
                           <a:latin typeface="Arial"/>
                         </a:rPr>
-                        <a:t>—</a:t>
+                        <a:t>1</a:t>
                       </a:r>
                     </a:p>
                   </a:txBody>
@@ -19231,7 +19523,7 @@
                           </a:solidFill>
                           <a:latin typeface="Arial"/>
                         </a:rPr>
-                        <a:t>12</a:t>
+                        <a:t>17</a:t>
                       </a:r>
                     </a:p>
                   </a:txBody>
@@ -19417,7 +19709,7 @@
                           </a:solidFill>
                           <a:latin typeface="Arial"/>
                         </a:rPr>
-                        <a:t>16</a:t>
+                        <a:t>21</a:t>
                       </a:r>
                     </a:p>
                   </a:txBody>
@@ -19603,7 +19895,7 @@
                           </a:solidFill>
                           <a:latin typeface="Arial"/>
                         </a:rPr>
-                        <a:t>19</a:t>
+                        <a:t>24</a:t>
                       </a:r>
                     </a:p>
                   </a:txBody>
@@ -19789,7 +20081,7 @@
                           </a:solidFill>
                           <a:latin typeface="Arial"/>
                         </a:rPr>
-                        <a:t>20</a:t>
+                        <a:t>25</a:t>
                       </a:r>
                     </a:p>
                   </a:txBody>
@@ -19975,7 +20267,7 @@
                           </a:solidFill>
                           <a:latin typeface="Arial"/>
                         </a:rPr>
-                        <a:t>24</a:t>
+                        <a:t>26</a:t>
                       </a:r>
                     </a:p>
                   </a:txBody>
@@ -19998,7 +20290,7 @@
                           </a:solidFill>
                           <a:latin typeface="Arial"/>
                         </a:rPr>
-                        <a:t>Keller Norland</a:t>
+                        <a:t>John Reed</a:t>
                       </a:r>
                     </a:p>
                   </a:txBody>
@@ -20021,7 +20313,7 @@
                           </a:solidFill>
                           <a:latin typeface="Arial"/>
                         </a:rPr>
-                        <a:t>1,087</a:t>
+                        <a:t>1,226</a:t>
                       </a:r>
                     </a:p>
                   </a:txBody>
@@ -20113,7 +20405,7 @@
                           </a:solidFill>
                           <a:latin typeface="Arial"/>
                         </a:rPr>
-                        <a:t>362</a:t>
+                        <a:t>408</a:t>
                       </a:r>
                     </a:p>
                   </a:txBody>
@@ -20136,7 +20428,7 @@
                           </a:solidFill>
                           <a:latin typeface="Arial"/>
                         </a:rPr>
-                        <a:t>4,349</a:t>
+                        <a:t>4,904</a:t>
                       </a:r>
                     </a:p>
                   </a:txBody>
@@ -20161,7 +20453,7 @@
                           </a:solidFill>
                           <a:latin typeface="Arial"/>
                         </a:rPr>
-                        <a:t>36</a:t>
+                        <a:t>30</a:t>
                       </a:r>
                     </a:p>
                   </a:txBody>
@@ -20184,7 +20476,7 @@
                           </a:solidFill>
                           <a:latin typeface="Arial"/>
                         </a:rPr>
-                        <a:t>Morgan Pearson</a:t>
+                        <a:t>Keller Norland</a:t>
                       </a:r>
                     </a:p>
                   </a:txBody>
@@ -20207,7 +20499,7 @@
                           </a:solidFill>
                           <a:latin typeface="Arial"/>
                         </a:rPr>
-                        <a:t>904</a:t>
+                        <a:t>1,087</a:t>
                       </a:r>
                     </a:p>
                   </a:txBody>
@@ -20230,6 +20522,29 @@
                           </a:solidFill>
                           <a:latin typeface="Arial"/>
                         </a:rPr>
+                        <a:t>3</a:t>
+                      </a:r>
+                    </a:p>
+                  </a:txBody>
+                  <a:tcPr>
+                    <a:solidFill>
+                      <a:srgbClr val="F2F2F2"/>
+                    </a:solidFill>
+                  </a:tcPr>
+                </a:tc>
+                <a:tc>
+                  <a:txBody>
+                    <a:bodyPr wrap="none"/>
+                    <a:lstStyle/>
+                    <a:p>
+                      <a:pPr algn="ctr"/>
+                      <a:r>
+                        <a:rPr sz="750" b="1" i="0">
+                          <a:solidFill>
+                            <a:srgbClr val="1B7F3A"/>
+                          </a:solidFill>
+                          <a:latin typeface="Arial"/>
+                        </a:rPr>
                         <a:t>2</a:t>
                       </a:r>
                     </a:p>
@@ -20249,80 +20564,57 @@
                       <a:r>
                         <a:rPr sz="750" b="1" i="0">
                           <a:solidFill>
+                            <a:srgbClr val="C00000"/>
+                          </a:solidFill>
+                          <a:latin typeface="Arial"/>
+                        </a:rPr>
+                        <a:t>1</a:t>
+                      </a:r>
+                    </a:p>
+                  </a:txBody>
+                  <a:tcPr>
+                    <a:solidFill>
+                      <a:srgbClr val="F2F2F2"/>
+                    </a:solidFill>
+                  </a:tcPr>
+                </a:tc>
+                <a:tc>
+                  <a:txBody>
+                    <a:bodyPr wrap="none"/>
+                    <a:lstStyle/>
+                    <a:p>
+                      <a:pPr algn="ctr"/>
+                      <a:r>
+                        <a:rPr sz="750" b="0" i="0">
+                          <a:solidFill>
+                            <a:srgbClr val="262626"/>
+                          </a:solidFill>
+                          <a:latin typeface="Arial"/>
+                        </a:rPr>
+                        <a:t>362</a:t>
+                      </a:r>
+                    </a:p>
+                  </a:txBody>
+                  <a:tcPr>
+                    <a:solidFill>
+                      <a:srgbClr val="F2F2F2"/>
+                    </a:solidFill>
+                  </a:tcPr>
+                </a:tc>
+                <a:tc>
+                  <a:txBody>
+                    <a:bodyPr wrap="none"/>
+                    <a:lstStyle/>
+                    <a:p>
+                      <a:pPr algn="ctr"/>
+                      <a:r>
+                        <a:rPr sz="750" b="1" i="0">
+                          <a:solidFill>
                             <a:srgbClr val="1B7F3A"/>
                           </a:solidFill>
                           <a:latin typeface="Arial"/>
                         </a:rPr>
-                        <a:t>1</a:t>
-                      </a:r>
-                    </a:p>
-                  </a:txBody>
-                  <a:tcPr>
-                    <a:solidFill>
-                      <a:srgbClr val="F2F2F2"/>
-                    </a:solidFill>
-                  </a:tcPr>
-                </a:tc>
-                <a:tc>
-                  <a:txBody>
-                    <a:bodyPr wrap="none"/>
-                    <a:lstStyle/>
-                    <a:p>
-                      <a:pPr algn="ctr"/>
-                      <a:r>
-                        <a:rPr sz="750" b="1" i="0">
-                          <a:solidFill>
-                            <a:srgbClr val="C00000"/>
-                          </a:solidFill>
-                          <a:latin typeface="Arial"/>
-                        </a:rPr>
-                        <a:t>1</a:t>
-                      </a:r>
-                    </a:p>
-                  </a:txBody>
-                  <a:tcPr>
-                    <a:solidFill>
-                      <a:srgbClr val="F2F2F2"/>
-                    </a:solidFill>
-                  </a:tcPr>
-                </a:tc>
-                <a:tc>
-                  <a:txBody>
-                    <a:bodyPr wrap="none"/>
-                    <a:lstStyle/>
-                    <a:p>
-                      <a:pPr algn="ctr"/>
-                      <a:r>
-                        <a:rPr sz="750" b="0" i="0">
-                          <a:solidFill>
-                            <a:srgbClr val="262626"/>
-                          </a:solidFill>
-                          <a:latin typeface="Arial"/>
-                        </a:rPr>
-                        <a:t>452</a:t>
-                      </a:r>
-                    </a:p>
-                  </a:txBody>
-                  <a:tcPr>
-                    <a:solidFill>
-                      <a:srgbClr val="F2F2F2"/>
-                    </a:solidFill>
-                  </a:tcPr>
-                </a:tc>
-                <a:tc>
-                  <a:txBody>
-                    <a:bodyPr wrap="none"/>
-                    <a:lstStyle/>
-                    <a:p>
-                      <a:pPr algn="ctr"/>
-                      <a:r>
-                        <a:rPr sz="750" b="1" i="0">
-                          <a:solidFill>
-                            <a:srgbClr val="1B7F3A"/>
-                          </a:solidFill>
-                          <a:latin typeface="Arial"/>
-                        </a:rPr>
-                        <a:t>5,425</a:t>
+                        <a:t>4,349</a:t>
                       </a:r>
                     </a:p>
                   </a:txBody>
@@ -20347,7 +20639,7 @@
                           </a:solidFill>
                           <a:latin typeface="Arial"/>
                         </a:rPr>
-                        <a:t>41</a:t>
+                        <a:t>42</a:t>
                       </a:r>
                     </a:p>
                   </a:txBody>
@@ -20393,7 +20685,7 @@
                           </a:solidFill>
                           <a:latin typeface="Arial"/>
                         </a:rPr>
-                        <a:t>816</a:t>
+                        <a:t>929</a:t>
                       </a:r>
                     </a:p>
                   </a:txBody>
@@ -20416,6 +20708,52 @@
                           </a:solidFill>
                           <a:latin typeface="Arial"/>
                         </a:rPr>
+                        <a:t>5</a:t>
+                      </a:r>
+                    </a:p>
+                  </a:txBody>
+                  <a:tcPr>
+                    <a:solidFill>
+                      <a:srgbClr val="FFFFFF"/>
+                    </a:solidFill>
+                  </a:tcPr>
+                </a:tc>
+                <a:tc>
+                  <a:txBody>
+                    <a:bodyPr wrap="none"/>
+                    <a:lstStyle/>
+                    <a:p>
+                      <a:pPr algn="ctr"/>
+                      <a:r>
+                        <a:rPr sz="750" b="1" i="0">
+                          <a:solidFill>
+                            <a:srgbClr val="1B7F3A"/>
+                          </a:solidFill>
+                          <a:latin typeface="Arial"/>
+                        </a:rPr>
+                        <a:t>1</a:t>
+                      </a:r>
+                    </a:p>
+                  </a:txBody>
+                  <a:tcPr>
+                    <a:solidFill>
+                      <a:srgbClr val="FFFFFF"/>
+                    </a:solidFill>
+                  </a:tcPr>
+                </a:tc>
+                <a:tc>
+                  <a:txBody>
+                    <a:bodyPr wrap="none"/>
+                    <a:lstStyle/>
+                    <a:p>
+                      <a:pPr algn="ctr"/>
+                      <a:r>
+                        <a:rPr sz="750" b="1" i="0">
+                          <a:solidFill>
+                            <a:srgbClr val="C00000"/>
+                          </a:solidFill>
+                          <a:latin typeface="Arial"/>
+                        </a:rPr>
                         <a:t>4</a:t>
                       </a:r>
                     </a:p>
@@ -20433,82 +20771,36 @@
                     <a:p>
                       <a:pPr algn="ctr"/>
                       <a:r>
+                        <a:rPr sz="750" b="0" i="0">
+                          <a:solidFill>
+                            <a:srgbClr val="262626"/>
+                          </a:solidFill>
+                          <a:latin typeface="Arial"/>
+                        </a:rPr>
+                        <a:t>185</a:t>
+                      </a:r>
+                    </a:p>
+                  </a:txBody>
+                  <a:tcPr>
+                    <a:solidFill>
+                      <a:srgbClr val="FFFFFF"/>
+                    </a:solidFill>
+                  </a:tcPr>
+                </a:tc>
+                <a:tc>
+                  <a:txBody>
+                    <a:bodyPr wrap="none"/>
+                    <a:lstStyle/>
+                    <a:p>
+                      <a:pPr algn="ctr"/>
+                      <a:r>
                         <a:rPr sz="750" b="1" i="0">
                           <a:solidFill>
-                            <a:srgbClr val="1B7F3A"/>
-                          </a:solidFill>
-                          <a:latin typeface="Arial"/>
-                        </a:rPr>
-                        <a:t>1</a:t>
-                      </a:r>
-                    </a:p>
-                  </a:txBody>
-                  <a:tcPr>
-                    <a:solidFill>
-                      <a:srgbClr val="FFFFFF"/>
-                    </a:solidFill>
-                  </a:tcPr>
-                </a:tc>
-                <a:tc>
-                  <a:txBody>
-                    <a:bodyPr wrap="none"/>
-                    <a:lstStyle/>
-                    <a:p>
-                      <a:pPr algn="ctr"/>
-                      <a:r>
-                        <a:rPr sz="750" b="1" i="0">
-                          <a:solidFill>
-                            <a:srgbClr val="C00000"/>
-                          </a:solidFill>
-                          <a:latin typeface="Arial"/>
-                        </a:rPr>
-                        <a:t>3</a:t>
-                      </a:r>
-                    </a:p>
-                  </a:txBody>
-                  <a:tcPr>
-                    <a:solidFill>
-                      <a:srgbClr val="FFFFFF"/>
-                    </a:solidFill>
-                  </a:tcPr>
-                </a:tc>
-                <a:tc>
-                  <a:txBody>
-                    <a:bodyPr wrap="none"/>
-                    <a:lstStyle/>
-                    <a:p>
-                      <a:pPr algn="ctr"/>
-                      <a:r>
-                        <a:rPr sz="750" b="0" i="0">
-                          <a:solidFill>
-                            <a:srgbClr val="262626"/>
-                          </a:solidFill>
-                          <a:latin typeface="Arial"/>
-                        </a:rPr>
-                        <a:t>204</a:t>
-                      </a:r>
-                    </a:p>
-                  </a:txBody>
-                  <a:tcPr>
-                    <a:solidFill>
-                      <a:srgbClr val="FFFFFF"/>
-                    </a:solidFill>
-                  </a:tcPr>
-                </a:tc>
-                <a:tc>
-                  <a:txBody>
-                    <a:bodyPr wrap="none"/>
-                    <a:lstStyle/>
-                    <a:p>
-                      <a:pPr algn="ctr"/>
-                      <a:r>
-                        <a:rPr sz="750" b="1" i="0">
-                          <a:solidFill>
-                            <a:srgbClr val="262626"/>
-                          </a:solidFill>
-                          <a:latin typeface="Arial"/>
-                        </a:rPr>
-                        <a:t>2,450</a:t>
+                            <a:srgbClr val="262626"/>
+                          </a:solidFill>
+                          <a:latin typeface="Arial"/>
+                        </a:rPr>
+                        <a:t>2,230</a:t>
                       </a:r>
                     </a:p>
                   </a:txBody>
@@ -20533,7 +20825,7 @@
                           </a:solidFill>
                           <a:latin typeface="Arial"/>
                         </a:rPr>
-                        <a:t>60</a:t>
+                        <a:t>45</a:t>
                       </a:r>
                     </a:p>
                   </a:txBody>
@@ -20556,7 +20848,7 @@
                           </a:solidFill>
                           <a:latin typeface="Arial"/>
                         </a:rPr>
-                        <a:t>John Reed</a:t>
+                        <a:t>Morgan Pearson</a:t>
                       </a:r>
                     </a:p>
                   </a:txBody>
@@ -20579,7 +20871,7 @@
                           </a:solidFill>
                           <a:latin typeface="Arial"/>
                         </a:rPr>
-                        <a:t>599</a:t>
+                        <a:t>904</a:t>
                       </a:r>
                     </a:p>
                   </a:txBody>
@@ -20671,7 +20963,7 @@
                           </a:solidFill>
                           <a:latin typeface="Arial"/>
                         </a:rPr>
-                        <a:t>299</a:t>
+                        <a:t>452</a:t>
                       </a:r>
                     </a:p>
                   </a:txBody>
@@ -20690,11 +20982,11 @@
                       <a:r>
                         <a:rPr sz="750" b="1" i="0">
                           <a:solidFill>
-                            <a:srgbClr val="262626"/>
-                          </a:solidFill>
-                          <a:latin typeface="Arial"/>
-                        </a:rPr>
-                        <a:t>3,598</a:t>
+                            <a:srgbClr val="1B7F3A"/>
+                          </a:solidFill>
+                          <a:latin typeface="Arial"/>
+                        </a:rPr>
+                        <a:t>5,425</a:t>
                       </a:r>
                     </a:p>
                   </a:txBody>
@@ -20719,7 +21011,7 @@
                           </a:solidFill>
                           <a:latin typeface="Arial"/>
                         </a:rPr>
-                        <a:t>66</a:t>
+                        <a:t>70</a:t>
                       </a:r>
                     </a:p>
                   </a:txBody>
@@ -20905,7 +21197,7 @@
                           </a:solidFill>
                           <a:latin typeface="Arial"/>
                         </a:rPr>
-                        <a:t>68</a:t>
+                        <a:t>73</a:t>
                       </a:r>
                     </a:p>
                   </a:txBody>
@@ -21091,7 +21383,7 @@
                           </a:solidFill>
                           <a:latin typeface="Arial"/>
                         </a:rPr>
-                        <a:t>107</a:t>
+                        <a:t>100</a:t>
                       </a:r>
                     </a:p>
                   </a:txBody>
@@ -21137,7 +21429,7 @@
                           </a:solidFill>
                           <a:latin typeface="Arial"/>
                         </a:rPr>
-                        <a:t>212</a:t>
+                        <a:t>282</a:t>
                       </a:r>
                     </a:p>
                   </a:txBody>
@@ -21160,7 +21452,7 @@
                           </a:solidFill>
                           <a:latin typeface="Arial"/>
                         </a:rPr>
-                        <a:t>1</a:t>
+                        <a:t>2</a:t>
                       </a:r>
                     </a:p>
                   </a:txBody>
@@ -21206,7 +21498,7 @@
                           </a:solidFill>
                           <a:latin typeface="Arial"/>
                         </a:rPr>
-                        <a:t>1</a:t>
+                        <a:t>2</a:t>
                       </a:r>
                     </a:p>
                   </a:txBody>
@@ -21229,7 +21521,7 @@
                           </a:solidFill>
                           <a:latin typeface="Arial"/>
                         </a:rPr>
-                        <a:t>212</a:t>
+                        <a:t>141</a:t>
                       </a:r>
                     </a:p>
                   </a:txBody>
@@ -21252,7 +21544,7 @@
                           </a:solidFill>
                           <a:latin typeface="Arial"/>
                         </a:rPr>
-                        <a:t>2,545</a:t>
+                        <a:t>1,696</a:t>
                       </a:r>
                     </a:p>
                   </a:txBody>
@@ -21573,7 +21865,7 @@
                           </a:solidFill>
                           <a:latin typeface="Arial"/>
                         </a:rPr>
-                        <a:t>9</a:t>
+                        <a:t>10</a:t>
                       </a:r>
                     </a:p>
                   </a:txBody>
@@ -21759,7 +22051,7 @@
                           </a:solidFill>
                           <a:latin typeface="Arial"/>
                         </a:rPr>
-                        <a:t>13</a:t>
+                        <a:t>15</a:t>
                       </a:r>
                     </a:p>
                   </a:txBody>
@@ -21945,7 +22237,7 @@
                           </a:solidFill>
                           <a:latin typeface="Arial"/>
                         </a:rPr>
-                        <a:t>15</a:t>
+                        <a:t>16</a:t>
                       </a:r>
                     </a:p>
                   </a:txBody>
@@ -21968,7 +22260,7 @@
                           </a:solidFill>
                           <a:latin typeface="Arial"/>
                         </a:rPr>
-                        <a:t>Danielle Orie</a:t>
+                        <a:t>Gina Sereno</a:t>
                       </a:r>
                     </a:p>
                   </a:txBody>
@@ -21991,7 +22283,7 @@
                           </a:solidFill>
                           <a:latin typeface="Arial"/>
                         </a:rPr>
-                        <a:t>1,646</a:t>
+                        <a:t>1,785</a:t>
                       </a:r>
                     </a:p>
                   </a:txBody>
@@ -22083,7 +22375,7 @@
                           </a:solidFill>
                           <a:latin typeface="Arial"/>
                         </a:rPr>
-                        <a:t>329</a:t>
+                        <a:t>357</a:t>
                       </a:r>
                     </a:p>
                   </a:txBody>
@@ -22106,7 +22398,7 @@
                           </a:solidFill>
                           <a:latin typeface="Arial"/>
                         </a:rPr>
-                        <a:t>3,951</a:t>
+                        <a:t>4,286</a:t>
                       </a:r>
                     </a:p>
                   </a:txBody>
@@ -22131,7 +22423,7 @@
                           </a:solidFill>
                           <a:latin typeface="Arial"/>
                         </a:rPr>
-                        <a:t>16</a:t>
+                        <a:t>17</a:t>
                       </a:r>
                     </a:p>
                   </a:txBody>
@@ -22154,7 +22446,7 @@
                           </a:solidFill>
                           <a:latin typeface="Arial"/>
                         </a:rPr>
-                        <a:t>Gina Sereno</a:t>
+                        <a:t>Danielle Orie</a:t>
                       </a:r>
                     </a:p>
                   </a:txBody>
@@ -22177,7 +22469,7 @@
                           </a:solidFill>
                           <a:latin typeface="Arial"/>
                         </a:rPr>
-                        <a:t>1,450</a:t>
+                        <a:t>1,646</a:t>
                       </a:r>
                     </a:p>
                   </a:txBody>
@@ -22200,7 +22492,7 @@
                           </a:solidFill>
                           <a:latin typeface="Arial"/>
                         </a:rPr>
-                        <a:t>4</a:t>
+                        <a:t>5</a:t>
                       </a:r>
                     </a:p>
                   </a:txBody>
@@ -22223,6 +22515,29 @@
                           </a:solidFill>
                           <a:latin typeface="Arial"/>
                         </a:rPr>
+                        <a:t>3</a:t>
+                      </a:r>
+                    </a:p>
+                  </a:txBody>
+                  <a:tcPr>
+                    <a:solidFill>
+                      <a:srgbClr val="F2F2F2"/>
+                    </a:solidFill>
+                  </a:tcPr>
+                </a:tc>
+                <a:tc>
+                  <a:txBody>
+                    <a:bodyPr wrap="none"/>
+                    <a:lstStyle/>
+                    <a:p>
+                      <a:pPr algn="ctr"/>
+                      <a:r>
+                        <a:rPr sz="750" b="1" i="0">
+                          <a:solidFill>
+                            <a:srgbClr val="C00000"/>
+                          </a:solidFill>
+                          <a:latin typeface="Arial"/>
+                        </a:rPr>
                         <a:t>2</a:t>
                       </a:r>
                     </a:p>
@@ -22240,59 +22555,36 @@
                     <a:p>
                       <a:pPr algn="ctr"/>
                       <a:r>
+                        <a:rPr sz="750" b="0" i="0">
+                          <a:solidFill>
+                            <a:srgbClr val="262626"/>
+                          </a:solidFill>
+                          <a:latin typeface="Arial"/>
+                        </a:rPr>
+                        <a:t>329</a:t>
+                      </a:r>
+                    </a:p>
+                  </a:txBody>
+                  <a:tcPr>
+                    <a:solidFill>
+                      <a:srgbClr val="F2F2F2"/>
+                    </a:solidFill>
+                  </a:tcPr>
+                </a:tc>
+                <a:tc>
+                  <a:txBody>
+                    <a:bodyPr wrap="none"/>
+                    <a:lstStyle/>
+                    <a:p>
+                      <a:pPr algn="ctr"/>
+                      <a:r>
                         <a:rPr sz="750" b="1" i="0">
                           <a:solidFill>
-                            <a:srgbClr val="C00000"/>
-                          </a:solidFill>
-                          <a:latin typeface="Arial"/>
-                        </a:rPr>
-                        <a:t>2</a:t>
-                      </a:r>
-                    </a:p>
-                  </a:txBody>
-                  <a:tcPr>
-                    <a:solidFill>
-                      <a:srgbClr val="F2F2F2"/>
-                    </a:solidFill>
-                  </a:tcPr>
-                </a:tc>
-                <a:tc>
-                  <a:txBody>
-                    <a:bodyPr wrap="none"/>
-                    <a:lstStyle/>
-                    <a:p>
-                      <a:pPr algn="ctr"/>
-                      <a:r>
-                        <a:rPr sz="750" b="0" i="0">
-                          <a:solidFill>
-                            <a:srgbClr val="262626"/>
-                          </a:solidFill>
-                          <a:latin typeface="Arial"/>
-                        </a:rPr>
-                        <a:t>362</a:t>
-                      </a:r>
-                    </a:p>
-                  </a:txBody>
-                  <a:tcPr>
-                    <a:solidFill>
-                      <a:srgbClr val="F2F2F2"/>
-                    </a:solidFill>
-                  </a:tcPr>
-                </a:tc>
-                <a:tc>
-                  <a:txBody>
-                    <a:bodyPr wrap="none"/>
-                    <a:lstStyle/>
-                    <a:p>
-                      <a:pPr algn="ctr"/>
-                      <a:r>
-                        <a:rPr sz="750" b="1" i="0">
-                          <a:solidFill>
                             <a:srgbClr val="1B7F3A"/>
                           </a:solidFill>
                           <a:latin typeface="Arial"/>
                         </a:rPr>
-                        <a:t>4,351</a:t>
+                        <a:t>3,951</a:t>
                       </a:r>
                     </a:p>
                   </a:txBody>
@@ -22317,7 +22609,7 @@
                           </a:solidFill>
                           <a:latin typeface="Arial"/>
                         </a:rPr>
-                        <a:t>28</a:t>
+                        <a:t>23</a:t>
                       </a:r>
                     </a:p>
                   </a:txBody>
@@ -22340,7 +22632,7 @@
                           </a:solidFill>
                           <a:latin typeface="Arial"/>
                         </a:rPr>
-                        <a:t>Kelly Wetteland</a:t>
+                        <a:t>Gwen Jorgensen</a:t>
                       </a:r>
                     </a:p>
                   </a:txBody>
@@ -22363,7 +22655,7 @@
                           </a:solidFill>
                           <a:latin typeface="Arial"/>
                         </a:rPr>
-                        <a:t>925</a:t>
+                        <a:t>1,288</a:t>
                       </a:r>
                     </a:p>
                   </a:txBody>
@@ -22386,6 +22678,29 @@
                           </a:solidFill>
                           <a:latin typeface="Arial"/>
                         </a:rPr>
+                        <a:t>3</a:t>
+                      </a:r>
+                    </a:p>
+                  </a:txBody>
+                  <a:tcPr>
+                    <a:solidFill>
+                      <a:srgbClr val="FFFFFF"/>
+                    </a:solidFill>
+                  </a:tcPr>
+                </a:tc>
+                <a:tc>
+                  <a:txBody>
+                    <a:bodyPr wrap="none"/>
+                    <a:lstStyle/>
+                    <a:p>
+                      <a:pPr algn="ctr"/>
+                      <a:r>
+                        <a:rPr sz="750" b="1" i="0">
+                          <a:solidFill>
+                            <a:srgbClr val="1B7F3A"/>
+                          </a:solidFill>
+                          <a:latin typeface="Arial"/>
+                        </a:rPr>
                         <a:t>2</a:t>
                       </a:r>
                     </a:p>
@@ -22405,80 +22720,57 @@
                       <a:r>
                         <a:rPr sz="750" b="1" i="0">
                           <a:solidFill>
+                            <a:srgbClr val="C00000"/>
+                          </a:solidFill>
+                          <a:latin typeface="Arial"/>
+                        </a:rPr>
+                        <a:t>1</a:t>
+                      </a:r>
+                    </a:p>
+                  </a:txBody>
+                  <a:tcPr>
+                    <a:solidFill>
+                      <a:srgbClr val="FFFFFF"/>
+                    </a:solidFill>
+                  </a:tcPr>
+                </a:tc>
+                <a:tc>
+                  <a:txBody>
+                    <a:bodyPr wrap="none"/>
+                    <a:lstStyle/>
+                    <a:p>
+                      <a:pPr algn="ctr"/>
+                      <a:r>
+                        <a:rPr sz="750" b="0" i="0">
+                          <a:solidFill>
+                            <a:srgbClr val="262626"/>
+                          </a:solidFill>
+                          <a:latin typeface="Arial"/>
+                        </a:rPr>
+                        <a:t>429</a:t>
+                      </a:r>
+                    </a:p>
+                  </a:txBody>
+                  <a:tcPr>
+                    <a:solidFill>
+                      <a:srgbClr val="FFFFFF"/>
+                    </a:solidFill>
+                  </a:tcPr>
+                </a:tc>
+                <a:tc>
+                  <a:txBody>
+                    <a:bodyPr wrap="none"/>
+                    <a:lstStyle/>
+                    <a:p>
+                      <a:pPr algn="ctr"/>
+                      <a:r>
+                        <a:rPr sz="750" b="1" i="0">
+                          <a:solidFill>
                             <a:srgbClr val="1B7F3A"/>
                           </a:solidFill>
                           <a:latin typeface="Arial"/>
                         </a:rPr>
-                        <a:t>2</a:t>
-                      </a:r>
-                    </a:p>
-                  </a:txBody>
-                  <a:tcPr>
-                    <a:solidFill>
-                      <a:srgbClr val="FFFFFF"/>
-                    </a:solidFill>
-                  </a:tcPr>
-                </a:tc>
-                <a:tc>
-                  <a:txBody>
-                    <a:bodyPr wrap="none"/>
-                    <a:lstStyle/>
-                    <a:p>
-                      <a:pPr algn="ctr"/>
-                      <a:r>
-                        <a:rPr sz="750" b="1" i="0">
-                          <a:solidFill>
-                            <a:srgbClr val="C00000"/>
-                          </a:solidFill>
-                          <a:latin typeface="Arial"/>
-                        </a:rPr>
-                        <a:t>0</a:t>
-                      </a:r>
-                    </a:p>
-                  </a:txBody>
-                  <a:tcPr>
-                    <a:solidFill>
-                      <a:srgbClr val="FFFFFF"/>
-                    </a:solidFill>
-                  </a:tcPr>
-                </a:tc>
-                <a:tc>
-                  <a:txBody>
-                    <a:bodyPr wrap="none"/>
-                    <a:lstStyle/>
-                    <a:p>
-                      <a:pPr algn="ctr"/>
-                      <a:r>
-                        <a:rPr sz="750" b="0" i="0">
-                          <a:solidFill>
-                            <a:srgbClr val="262626"/>
-                          </a:solidFill>
-                          <a:latin typeface="Arial"/>
-                        </a:rPr>
-                        <a:t>462</a:t>
-                      </a:r>
-                    </a:p>
-                  </a:txBody>
-                  <a:tcPr>
-                    <a:solidFill>
-                      <a:srgbClr val="FFFFFF"/>
-                    </a:solidFill>
-                  </a:tcPr>
-                </a:tc>
-                <a:tc>
-                  <a:txBody>
-                    <a:bodyPr wrap="none"/>
-                    <a:lstStyle/>
-                    <a:p>
-                      <a:pPr algn="ctr"/>
-                      <a:r>
-                        <a:rPr sz="750" b="1" i="0">
-                          <a:solidFill>
-                            <a:srgbClr val="1B7F3A"/>
-                          </a:solidFill>
-                          <a:latin typeface="Arial"/>
-                        </a:rPr>
-                        <a:t>5,550</a:t>
+                        <a:t>5,153</a:t>
                       </a:r>
                     </a:p>
                   </a:txBody>
@@ -22503,7 +22795,7 @@
                           </a:solidFill>
                           <a:latin typeface="Arial"/>
                         </a:rPr>
-                        <a:t>32</a:t>
+                        <a:t>34</a:t>
                       </a:r>
                     </a:p>
                   </a:txBody>
@@ -22526,7 +22818,7 @@
                           </a:solidFill>
                           <a:latin typeface="Arial"/>
                         </a:rPr>
-                        <a:t>Naomi Ruff</a:t>
+                        <a:t>Kelly Wetteland</a:t>
                       </a:r>
                     </a:p>
                   </a:txBody>
@@ -22549,7 +22841,7 @@
                           </a:solidFill>
                           <a:latin typeface="Arial"/>
                         </a:rPr>
-                        <a:t>882</a:t>
+                        <a:t>925</a:t>
                       </a:r>
                     </a:p>
                   </a:txBody>
@@ -22572,7 +22864,7 @@
                           </a:solidFill>
                           <a:latin typeface="Arial"/>
                         </a:rPr>
-                        <a:t>3</a:t>
+                        <a:t>2</a:t>
                       </a:r>
                     </a:p>
                   </a:txBody>
@@ -22595,7 +22887,7 @@
                           </a:solidFill>
                           <a:latin typeface="Arial"/>
                         </a:rPr>
-                        <a:t>1</a:t>
+                        <a:t>2</a:t>
                       </a:r>
                     </a:p>
                   </a:txBody>
@@ -22618,7 +22910,7 @@
                           </a:solidFill>
                           <a:latin typeface="Arial"/>
                         </a:rPr>
-                        <a:t>2</a:t>
+                        <a:t>0</a:t>
                       </a:r>
                     </a:p>
                   </a:txBody>
@@ -22641,7 +22933,7 @@
                           </a:solidFill>
                           <a:latin typeface="Arial"/>
                         </a:rPr>
-                        <a:t>294</a:t>
+                        <a:t>462</a:t>
                       </a:r>
                     </a:p>
                   </a:txBody>
@@ -22660,11 +22952,11 @@
                       <a:r>
                         <a:rPr sz="750" b="1" i="0">
                           <a:solidFill>
-                            <a:srgbClr val="262626"/>
-                          </a:solidFill>
-                          <a:latin typeface="Arial"/>
-                        </a:rPr>
-                        <a:t>3,530</a:t>
+                            <a:srgbClr val="1B7F3A"/>
+                          </a:solidFill>
+                          <a:latin typeface="Arial"/>
+                        </a:rPr>
+                        <a:t>5,550</a:t>
                       </a:r>
                     </a:p>
                   </a:txBody>
@@ -22689,7 +22981,7 @@
                           </a:solidFill>
                           <a:latin typeface="Arial"/>
                         </a:rPr>
-                        <a:t>45</a:t>
+                        <a:t>38</a:t>
                       </a:r>
                     </a:p>
                   </a:txBody>
@@ -22712,7 +23004,7 @@
                           </a:solidFill>
                           <a:latin typeface="Arial"/>
                         </a:rPr>
-                        <a:t>Erika Ackerlund</a:t>
+                        <a:t>Naomi Ruff</a:t>
                       </a:r>
                     </a:p>
                   </a:txBody>
@@ -22735,7 +23027,7 @@
                           </a:solidFill>
                           <a:latin typeface="Arial"/>
                         </a:rPr>
-                        <a:t>720</a:t>
+                        <a:t>882</a:t>
                       </a:r>
                     </a:p>
                   </a:txBody>
@@ -22827,7 +23119,7 @@
                           </a:solidFill>
                           <a:latin typeface="Arial"/>
                         </a:rPr>
-                        <a:t>240</a:t>
+                        <a:t>294</a:t>
                       </a:r>
                     </a:p>
                   </a:txBody>
@@ -22850,7 +23142,7 @@
                           </a:solidFill>
                           <a:latin typeface="Arial"/>
                         </a:rPr>
-                        <a:t>2,882</a:t>
+                        <a:t>3,530</a:t>
                       </a:r>
                     </a:p>
                   </a:txBody>
@@ -22875,7 +23167,7 @@
                           </a:solidFill>
                           <a:latin typeface="Arial"/>
                         </a:rPr>
-                        <a:t>56</a:t>
+                        <a:t>51</a:t>
                       </a:r>
                     </a:p>
                   </a:txBody>
@@ -22898,7 +23190,7 @@
                           </a:solidFill>
                           <a:latin typeface="Arial"/>
                         </a:rPr>
-                        <a:t>Eleanor Beveridge</a:t>
+                        <a:t>Erika Ackerlund</a:t>
                       </a:r>
                     </a:p>
                   </a:txBody>
@@ -22921,7 +23213,7 @@
                           </a:solidFill>
                           <a:latin typeface="Arial"/>
                         </a:rPr>
-                        <a:t>567</a:t>
+                        <a:t>720</a:t>
                       </a:r>
                     </a:p>
                   </a:txBody>
@@ -22967,7 +23259,7 @@
                           </a:solidFill>
                           <a:latin typeface="Arial"/>
                         </a:rPr>
-                        <a:t>0</a:t>
+                        <a:t>1</a:t>
                       </a:r>
                     </a:p>
                   </a:txBody>
@@ -22990,7 +23282,7 @@
                           </a:solidFill>
                           <a:latin typeface="Arial"/>
                         </a:rPr>
-                        <a:t>3</a:t>
+                        <a:t>2</a:t>
                       </a:r>
                     </a:p>
                   </a:txBody>
@@ -23013,7 +23305,7 @@
                           </a:solidFill>
                           <a:latin typeface="Arial"/>
                         </a:rPr>
-                        <a:t>189</a:t>
+                        <a:t>240</a:t>
                       </a:r>
                     </a:p>
                   </a:txBody>
@@ -23036,7 +23328,7 @@
                           </a:solidFill>
                           <a:latin typeface="Arial"/>
                         </a:rPr>
-                        <a:t>2,269</a:t>
+                        <a:t>2,882</a:t>
                       </a:r>
                     </a:p>
                   </a:txBody>
@@ -23061,7 +23353,7 @@
                           </a:solidFill>
                           <a:latin typeface="Arial"/>
                         </a:rPr>
-                        <a:t>58</a:t>
+                        <a:t>62</a:t>
                       </a:r>
                     </a:p>
                   </a:txBody>
@@ -23084,7 +23376,7 @@
                           </a:solidFill>
                           <a:latin typeface="Arial"/>
                         </a:rPr>
-                        <a:t>Gwen Jorgensen</a:t>
+                        <a:t>Eleanor Beveridge</a:t>
                       </a:r>
                     </a:p>
                   </a:txBody>
@@ -23107,7 +23399,7 @@
                           </a:solidFill>
                           <a:latin typeface="Arial"/>
                         </a:rPr>
-                        <a:t>556</a:t>
+                        <a:t>567</a:t>
                       </a:r>
                     </a:p>
                   </a:txBody>
@@ -23130,7 +23422,7 @@
                           </a:solidFill>
                           <a:latin typeface="Arial"/>
                         </a:rPr>
-                        <a:t>2</a:t>
+                        <a:t>3</a:t>
                       </a:r>
                     </a:p>
                   </a:txBody>
@@ -23153,7 +23445,7 @@
                           </a:solidFill>
                           <a:latin typeface="Arial"/>
                         </a:rPr>
-                        <a:t>1</a:t>
+                        <a:t>0</a:t>
                       </a:r>
                     </a:p>
                   </a:txBody>
@@ -23176,7 +23468,7 @@
                           </a:solidFill>
                           <a:latin typeface="Arial"/>
                         </a:rPr>
-                        <a:t>1</a:t>
+                        <a:t>3</a:t>
                       </a:r>
                     </a:p>
                   </a:txBody>
@@ -23199,7 +23491,7 @@
                           </a:solidFill>
                           <a:latin typeface="Arial"/>
                         </a:rPr>
-                        <a:t>278</a:t>
+                        <a:t>189</a:t>
                       </a:r>
                     </a:p>
                   </a:txBody>
@@ -23222,7 +23514,7 @@
                           </a:solidFill>
                           <a:latin typeface="Arial"/>
                         </a:rPr>
-                        <a:t>3,337</a:t>
+                        <a:t>2,269</a:t>
                       </a:r>
                     </a:p>
                   </a:txBody>
@@ -23247,7 +23539,7 @@
                           </a:solidFill>
                           <a:latin typeface="Arial"/>
                         </a:rPr>
-                        <a:t>91</a:t>
+                        <a:t>75</a:t>
                       </a:r>
                     </a:p>
                   </a:txBody>
@@ -23270,7 +23562,7 @@
                           </a:solidFill>
                           <a:latin typeface="Arial"/>
                         </a:rPr>
-                        <a:t>Rachel Werking</a:t>
+                        <a:t>Kirsten Kasper</a:t>
                       </a:r>
                     </a:p>
                   </a:txBody>
@@ -23293,7 +23585,7 @@
                           </a:solidFill>
                           <a:latin typeface="Arial"/>
                         </a:rPr>
-                        <a:t>271</a:t>
+                        <a:t>475</a:t>
                       </a:r>
                     </a:p>
                   </a:txBody>
@@ -23339,7 +23631,7 @@
                           </a:solidFill>
                           <a:latin typeface="Arial"/>
                         </a:rPr>
-                        <a:t>0</a:t>
+                        <a:t>1</a:t>
                       </a:r>
                     </a:p>
                   </a:txBody>
@@ -23362,7 +23654,7 @@
                           </a:solidFill>
                           <a:latin typeface="Arial"/>
                         </a:rPr>
-                        <a:t>2</a:t>
+                        <a:t>1</a:t>
                       </a:r>
                     </a:p>
                   </a:txBody>
@@ -23385,7 +23677,7 @@
                           </a:solidFill>
                           <a:latin typeface="Arial"/>
                         </a:rPr>
-                        <a:t>135</a:t>
+                        <a:t>237</a:t>
                       </a:r>
                     </a:p>
                   </a:txBody>
@@ -23408,7 +23700,7 @@
                           </a:solidFill>
                           <a:latin typeface="Arial"/>
                         </a:rPr>
-                        <a:t>1,629</a:t>
+                        <a:t>2,854</a:t>
                       </a:r>
                     </a:p>
                   </a:txBody>
@@ -23433,7 +23725,7 @@
                           </a:solidFill>
                           <a:latin typeface="Arial"/>
                         </a:rPr>
-                        <a:t>110</a:t>
+                        <a:t>99</a:t>
                       </a:r>
                     </a:p>
                   </a:txBody>
@@ -23456,7 +23748,7 @@
                           </a:solidFill>
                           <a:latin typeface="Arial"/>
                         </a:rPr>
-                        <a:t>Joy Gill</a:t>
+                        <a:t>Rachel Werking</a:t>
                       </a:r>
                     </a:p>
                   </a:txBody>
@@ -23479,7 +23771,7 @@
                           </a:solidFill>
                           <a:latin typeface="Arial"/>
                         </a:rPr>
-                        <a:t>200</a:t>
+                        <a:t>271</a:t>
                       </a:r>
                     </a:p>
                   </a:txBody>
@@ -23571,7 +23863,7 @@
                           </a:solidFill>
                           <a:latin typeface="Arial"/>
                         </a:rPr>
-                        <a:t>100</a:t>
+                        <a:t>135</a:t>
                       </a:r>
                     </a:p>
                   </a:txBody>
@@ -23594,7 +23886,7 @@
                           </a:solidFill>
                           <a:latin typeface="Arial"/>
                         </a:rPr>
-                        <a:t>1,203</a:t>
+                        <a:t>1,629</a:t>
                       </a:r>
                     </a:p>
                   </a:txBody>
@@ -23961,7 +24253,7 @@
                 </a:solidFill>
                 <a:latin typeface="Arial"/>
               </a:rPr>
-              <a:t>As of 2026-08-09   •   Olympic Qualification Rankings (LA 2028 cycle)   •   Heading into Weihai</a:t>
+              <a:t>As of 2026-08-29   •   Olympic Qualification Rankings (LA 2028 cycle)   •   Heading into Weihai</a:t>
             </a:r>
           </a:p>
         </p:txBody>
@@ -24200,7 +24492,7 @@
                           </a:solidFill>
                           <a:latin typeface="Arial"/>
                         </a:rPr>
-                        <a:t>12</a:t>
+                        <a:t>17</a:t>
                       </a:r>
                     </a:p>
                   </a:txBody>
@@ -24317,7 +24609,7 @@
                           </a:solidFill>
                           <a:latin typeface="Arial"/>
                         </a:rPr>
-                        <a:t>16</a:t>
+                        <a:t>21</a:t>
                       </a:r>
                     </a:p>
                   </a:txBody>
@@ -24434,7 +24726,7 @@
                           </a:solidFill>
                           <a:latin typeface="Arial"/>
                         </a:rPr>
-                        <a:t>19</a:t>
+                        <a:t>24</a:t>
                       </a:r>
                     </a:p>
                   </a:txBody>
@@ -24551,7 +24843,7 @@
                           </a:solidFill>
                           <a:latin typeface="Arial"/>
                         </a:rPr>
-                        <a:t>20</a:t>
+                        <a:t>25</a:t>
                       </a:r>
                     </a:p>
                   </a:txBody>
@@ -24668,7 +24960,7 @@
                           </a:solidFill>
                           <a:latin typeface="Arial"/>
                         </a:rPr>
-                        <a:t>24</a:t>
+                        <a:t>26</a:t>
                       </a:r>
                     </a:p>
                   </a:txBody>
@@ -24691,7 +24983,7 @@
                           </a:solidFill>
                           <a:latin typeface="Arial"/>
                         </a:rPr>
-                        <a:t>Keller Norland</a:t>
+                        <a:t>John Reed</a:t>
                       </a:r>
                     </a:p>
                   </a:txBody>
@@ -24714,7 +25006,7 @@
                           </a:solidFill>
                           <a:latin typeface="Arial"/>
                         </a:rPr>
-                        <a:t>1,087</a:t>
+                        <a:t>1,226</a:t>
                       </a:r>
                     </a:p>
                   </a:txBody>
@@ -24785,7 +25077,7 @@
                           </a:solidFill>
                           <a:latin typeface="Arial"/>
                         </a:rPr>
-                        <a:t>36</a:t>
+                        <a:t>30</a:t>
                       </a:r>
                     </a:p>
                   </a:txBody>
@@ -24808,7 +25100,7 @@
                           </a:solidFill>
                           <a:latin typeface="Arial"/>
                         </a:rPr>
-                        <a:t>Morgan Pearson</a:t>
+                        <a:t>Keller Norland</a:t>
                       </a:r>
                     </a:p>
                   </a:txBody>
@@ -24831,7 +25123,7 @@
                           </a:solidFill>
                           <a:latin typeface="Arial"/>
                         </a:rPr>
-                        <a:t>904</a:t>
+                        <a:t>1,087</a:t>
                       </a:r>
                     </a:p>
                   </a:txBody>
@@ -24877,7 +25169,7 @@
                           </a:solidFill>
                           <a:latin typeface="Arial"/>
                         </a:rPr>
-                        <a:t>2</a:t>
+                        <a:t>3</a:t>
                       </a:r>
                     </a:p>
                   </a:txBody>
@@ -24902,7 +25194,7 @@
                           </a:solidFill>
                           <a:latin typeface="Arial"/>
                         </a:rPr>
-                        <a:t>41</a:t>
+                        <a:t>42</a:t>
                       </a:r>
                     </a:p>
                   </a:txBody>
@@ -24948,7 +25240,7 @@
                           </a:solidFill>
                           <a:latin typeface="Arial"/>
                         </a:rPr>
-                        <a:t>816</a:t>
+                        <a:t>929</a:t>
                       </a:r>
                     </a:p>
                   </a:txBody>
@@ -24994,7 +25286,7 @@
                           </a:solidFill>
                           <a:latin typeface="Arial"/>
                         </a:rPr>
-                        <a:t>4</a:t>
+                        <a:t>5</a:t>
                       </a:r>
                     </a:p>
                   </a:txBody>
@@ -25019,7 +25311,7 @@
                           </a:solidFill>
                           <a:latin typeface="Arial"/>
                         </a:rPr>
-                        <a:t>60</a:t>
+                        <a:t>45</a:t>
                       </a:r>
                     </a:p>
                   </a:txBody>
@@ -25042,7 +25334,7 @@
                           </a:solidFill>
                           <a:latin typeface="Arial"/>
                         </a:rPr>
-                        <a:t>John Reed</a:t>
+                        <a:t>Morgan Pearson</a:t>
                       </a:r>
                     </a:p>
                   </a:txBody>
@@ -25065,7 +25357,7 @@
                           </a:solidFill>
                           <a:latin typeface="Arial"/>
                         </a:rPr>
-                        <a:t>599</a:t>
+                        <a:t>904</a:t>
                       </a:r>
                     </a:p>
                   </a:txBody>
@@ -25136,7 +25428,7 @@
                           </a:solidFill>
                           <a:latin typeface="Arial"/>
                         </a:rPr>
-                        <a:t>66</a:t>
+                        <a:t>70</a:t>
                       </a:r>
                     </a:p>
                   </a:txBody>
@@ -25253,7 +25545,7 @@
                           </a:solidFill>
                           <a:latin typeface="Arial"/>
                         </a:rPr>
-                        <a:t>68</a:t>
+                        <a:t>73</a:t>
                       </a:r>
                     </a:p>
                   </a:txBody>
@@ -25370,7 +25662,7 @@
                           </a:solidFill>
                           <a:latin typeface="Arial"/>
                         </a:rPr>
-                        <a:t>107</a:t>
+                        <a:t>100</a:t>
                       </a:r>
                     </a:p>
                   </a:txBody>
@@ -25416,7 +25708,7 @@
                           </a:solidFill>
                           <a:latin typeface="Arial"/>
                         </a:rPr>
-                        <a:t>212</a:t>
+                        <a:t>282</a:t>
                       </a:r>
                     </a:p>
                   </a:txBody>
@@ -25462,7 +25754,7 @@
                           </a:solidFill>
                           <a:latin typeface="Arial"/>
                         </a:rPr>
-                        <a:t>1</a:t>
+                        <a:t>2</a:t>
                       </a:r>
                     </a:p>
                   </a:txBody>
@@ -25487,7 +25779,7 @@
                           </a:solidFill>
                           <a:latin typeface="Arial"/>
                         </a:rPr>
-                        <a:t>120</a:t>
+                        <a:t>105</a:t>
                       </a:r>
                     </a:p>
                   </a:txBody>
@@ -25510,7 +25802,7 @@
                           </a:solidFill>
                           <a:latin typeface="Arial"/>
                         </a:rPr>
-                        <a:t>Cole Jamieson </a:t>
+                        <a:t>Darr Smith</a:t>
                       </a:r>
                     </a:p>
                   </a:txBody>
@@ -25533,7 +25825,7 @@
                           </a:solidFill>
                           <a:latin typeface="Arial"/>
                         </a:rPr>
-                        <a:t>169</a:t>
+                        <a:t>265</a:t>
                       </a:r>
                     </a:p>
                   </a:txBody>
@@ -25579,7 +25871,7 @@
                           </a:solidFill>
                           <a:latin typeface="Arial"/>
                         </a:rPr>
-                        <a:t>1</a:t>
+                        <a:t>2</a:t>
                       </a:r>
                     </a:p>
                   </a:txBody>
@@ -25828,7 +26120,7 @@
                           </a:solidFill>
                           <a:latin typeface="Arial"/>
                         </a:rPr>
-                        <a:t>9</a:t>
+                        <a:t>10</a:t>
                       </a:r>
                     </a:p>
                   </a:txBody>
@@ -25945,7 +26237,7 @@
                           </a:solidFill>
                           <a:latin typeface="Arial"/>
                         </a:rPr>
-                        <a:t>13</a:t>
+                        <a:t>15</a:t>
                       </a:r>
                     </a:p>
                   </a:txBody>
@@ -26062,7 +26354,7 @@
                           </a:solidFill>
                           <a:latin typeface="Arial"/>
                         </a:rPr>
-                        <a:t>15</a:t>
+                        <a:t>16</a:t>
                       </a:r>
                     </a:p>
                   </a:txBody>
@@ -26085,7 +26377,7 @@
                           </a:solidFill>
                           <a:latin typeface="Arial"/>
                         </a:rPr>
-                        <a:t>Danielle Orie</a:t>
+                        <a:t>Gina Sereno</a:t>
                       </a:r>
                     </a:p>
                   </a:txBody>
@@ -26108,7 +26400,7 @@
                           </a:solidFill>
                           <a:latin typeface="Arial"/>
                         </a:rPr>
-                        <a:t>1,646</a:t>
+                        <a:t>1,785</a:t>
                       </a:r>
                     </a:p>
                   </a:txBody>
@@ -26179,7 +26471,7 @@
                           </a:solidFill>
                           <a:latin typeface="Arial"/>
                         </a:rPr>
-                        <a:t>16</a:t>
+                        <a:t>17</a:t>
                       </a:r>
                     </a:p>
                   </a:txBody>
@@ -26202,7 +26494,7 @@
                           </a:solidFill>
                           <a:latin typeface="Arial"/>
                         </a:rPr>
-                        <a:t>Gina Sereno</a:t>
+                        <a:t>Danielle Orie</a:t>
                       </a:r>
                     </a:p>
                   </a:txBody>
@@ -26225,7 +26517,7 @@
                           </a:solidFill>
                           <a:latin typeface="Arial"/>
                         </a:rPr>
-                        <a:t>1,450</a:t>
+                        <a:t>1,646</a:t>
                       </a:r>
                     </a:p>
                   </a:txBody>
@@ -26271,7 +26563,7 @@
                           </a:solidFill>
                           <a:latin typeface="Arial"/>
                         </a:rPr>
-                        <a:t>4</a:t>
+                        <a:t>5</a:t>
                       </a:r>
                     </a:p>
                   </a:txBody>
@@ -26296,7 +26588,7 @@
                           </a:solidFill>
                           <a:latin typeface="Arial"/>
                         </a:rPr>
-                        <a:t>28</a:t>
+                        <a:t>23</a:t>
                       </a:r>
                     </a:p>
                   </a:txBody>
@@ -26319,7 +26611,7 @@
                           </a:solidFill>
                           <a:latin typeface="Arial"/>
                         </a:rPr>
-                        <a:t>Kelly Wetteland</a:t>
+                        <a:t>Gwen Jorgensen</a:t>
                       </a:r>
                     </a:p>
                   </a:txBody>
@@ -26342,7 +26634,7 @@
                           </a:solidFill>
                           <a:latin typeface="Arial"/>
                         </a:rPr>
-                        <a:t>925</a:t>
+                        <a:t>1,288</a:t>
                       </a:r>
                     </a:p>
                   </a:txBody>
@@ -26388,7 +26680,7 @@
                           </a:solidFill>
                           <a:latin typeface="Arial"/>
                         </a:rPr>
-                        <a:t>2</a:t>
+                        <a:t>3</a:t>
                       </a:r>
                     </a:p>
                   </a:txBody>
@@ -26413,7 +26705,7 @@
                           </a:solidFill>
                           <a:latin typeface="Arial"/>
                         </a:rPr>
-                        <a:t>32</a:t>
+                        <a:t>34</a:t>
                       </a:r>
                     </a:p>
                   </a:txBody>
@@ -26436,7 +26728,7 @@
                           </a:solidFill>
                           <a:latin typeface="Arial"/>
                         </a:rPr>
-                        <a:t>Naomi Ruff</a:t>
+                        <a:t>Kelly Wetteland</a:t>
                       </a:r>
                     </a:p>
                   </a:txBody>
@@ -26459,7 +26751,7 @@
                           </a:solidFill>
                           <a:latin typeface="Arial"/>
                         </a:rPr>
-                        <a:t>882</a:t>
+                        <a:t>925</a:t>
                       </a:r>
                     </a:p>
                   </a:txBody>
@@ -26505,7 +26797,7 @@
                           </a:solidFill>
                           <a:latin typeface="Arial"/>
                         </a:rPr>
-                        <a:t>3</a:t>
+                        <a:t>2</a:t>
                       </a:r>
                     </a:p>
                   </a:txBody>
@@ -26530,7 +26822,7 @@
                           </a:solidFill>
                           <a:latin typeface="Arial"/>
                         </a:rPr>
-                        <a:t>45</a:t>
+                        <a:t>38</a:t>
                       </a:r>
                     </a:p>
                   </a:txBody>
@@ -26553,7 +26845,7 @@
                           </a:solidFill>
                           <a:latin typeface="Arial"/>
                         </a:rPr>
-                        <a:t>Erika Ackerlund</a:t>
+                        <a:t>Naomi Ruff</a:t>
                       </a:r>
                     </a:p>
                   </a:txBody>
@@ -26576,7 +26868,7 @@
                           </a:solidFill>
                           <a:latin typeface="Arial"/>
                         </a:rPr>
-                        <a:t>720</a:t>
+                        <a:t>882</a:t>
                       </a:r>
                     </a:p>
                   </a:txBody>
@@ -26647,7 +26939,7 @@
                           </a:solidFill>
                           <a:latin typeface="Arial"/>
                         </a:rPr>
-                        <a:t>56</a:t>
+                        <a:t>51</a:t>
                       </a:r>
                     </a:p>
                   </a:txBody>
@@ -26670,7 +26962,7 @@
                           </a:solidFill>
                           <a:latin typeface="Arial"/>
                         </a:rPr>
-                        <a:t>Eleanor Beveridge</a:t>
+                        <a:t>Erika Ackerlund</a:t>
                       </a:r>
                     </a:p>
                   </a:txBody>
@@ -26693,7 +26985,7 @@
                           </a:solidFill>
                           <a:latin typeface="Arial"/>
                         </a:rPr>
-                        <a:t>567</a:t>
+                        <a:t>720</a:t>
                       </a:r>
                     </a:p>
                   </a:txBody>
@@ -26764,7 +27056,7 @@
                           </a:solidFill>
                           <a:latin typeface="Arial"/>
                         </a:rPr>
-                        <a:t>58</a:t>
+                        <a:t>62</a:t>
                       </a:r>
                     </a:p>
                   </a:txBody>
@@ -26787,7 +27079,7 @@
                           </a:solidFill>
                           <a:latin typeface="Arial"/>
                         </a:rPr>
-                        <a:t>Gwen Jorgensen</a:t>
+                        <a:t>Eleanor Beveridge</a:t>
                       </a:r>
                     </a:p>
                   </a:txBody>
@@ -26810,7 +27102,7 @@
                           </a:solidFill>
                           <a:latin typeface="Arial"/>
                         </a:rPr>
-                        <a:t>556</a:t>
+                        <a:t>567</a:t>
                       </a:r>
                     </a:p>
                   </a:txBody>
@@ -26856,7 +27148,7 @@
                           </a:solidFill>
                           <a:latin typeface="Arial"/>
                         </a:rPr>
-                        <a:t>2</a:t>
+                        <a:t>3</a:t>
                       </a:r>
                     </a:p>
                   </a:txBody>
@@ -26881,7 +27173,7 @@
                           </a:solidFill>
                           <a:latin typeface="Arial"/>
                         </a:rPr>
-                        <a:t>91</a:t>
+                        <a:t>75</a:t>
                       </a:r>
                     </a:p>
                   </a:txBody>
@@ -26904,7 +27196,7 @@
                           </a:solidFill>
                           <a:latin typeface="Arial"/>
                         </a:rPr>
-                        <a:t>Rachel Werking</a:t>
+                        <a:t>Kirsten Kasper</a:t>
                       </a:r>
                     </a:p>
                   </a:txBody>
@@ -26927,7 +27219,7 @@
                           </a:solidFill>
                           <a:latin typeface="Arial"/>
                         </a:rPr>
-                        <a:t>271</a:t>
+                        <a:t>475</a:t>
                       </a:r>
                     </a:p>
                   </a:txBody>
@@ -26998,7 +27290,7 @@
                           </a:solidFill>
                           <a:latin typeface="Arial"/>
                         </a:rPr>
-                        <a:t>110</a:t>
+                        <a:t>99</a:t>
                       </a:r>
                     </a:p>
                   </a:txBody>
@@ -27021,7 +27313,7 @@
                           </a:solidFill>
                           <a:latin typeface="Arial"/>
                         </a:rPr>
-                        <a:t>Joy Gill</a:t>
+                        <a:t>Rachel Werking</a:t>
                       </a:r>
                     </a:p>
                   </a:txBody>
@@ -27044,7 +27336,7 @@
                           </a:solidFill>
                           <a:latin typeface="Arial"/>
                         </a:rPr>
-                        <a:t>200</a:t>
+                        <a:t>271</a:t>
                       </a:r>
                     </a:p>
                   </a:txBody>
@@ -27115,7 +27407,7 @@
                           </a:solidFill>
                           <a:latin typeface="Arial"/>
                         </a:rPr>
-                        <a:t>114</a:t>
+                        <a:t>118</a:t>
                       </a:r>
                     </a:p>
                   </a:txBody>
@@ -27138,7 +27430,7 @@
                           </a:solidFill>
                           <a:latin typeface="Arial"/>
                         </a:rPr>
-                        <a:t>Michelle Magnani</a:t>
+                        <a:t>Joy Gill</a:t>
                       </a:r>
                     </a:p>
                   </a:txBody>
@@ -27161,7 +27453,7 @@
                           </a:solidFill>
                           <a:latin typeface="Arial"/>
                         </a:rPr>
-                        <a:t>184</a:t>
+                        <a:t>200</a:t>
                       </a:r>
                     </a:p>
                   </a:txBody>
@@ -27812,7 +28104,7 @@
                 </a:solidFill>
                 <a:latin typeface="Arial"/>
               </a:rPr>
-              <a:t>The Elite Men race at Weihai has been held 5 times in this analysis window (2018–2025). The event is staged as part of the World Cup / World Championship Series calendar.
+              <a:t>The Elite Men race at Weihai has been held 6 times in this analysis window (2018–2026). Max Studer is the most successful athlete in this span with 2 victories. The event is staged as part of the World Cup / World Championship Series calendar.
 [PLACEHOLDER: Add 1–2 sentences on notable storylines, competitive history, or what makes this event significant for Elite Men athletes. E.g. defending champions, record performances, dramatic finishes.]</a:t>
             </a:r>
           </a:p>
@@ -28152,7 +28444,7 @@
                 </a:solidFill>
                 <a:latin typeface="Arial"/>
               </a:rPr>
-              <a:t>Run speed separates the podium — the fastest run pace averages ~3:03/km with a ~157s spread between fastest and average finisher. Either a pre-built lead from the bike or exceptional run speed is required to win.</a:t>
+              <a:t>Run speed separates the podium — the fastest run pace averages ~3:02/km with a ~152s spread between fastest and average finisher. Either a pre-built lead from the bike or exceptional run speed is required to win.</a:t>
             </a:r>
           </a:p>
         </p:txBody>
@@ -28408,7 +28700,7 @@
         </p:nvGraphicFramePr>
         <p:xfrm>
           <a:off x="274320" y="1143000"/>
-          <a:ext cx="11640307" cy="3072384"/>
+          <a:ext cx="11640307" cy="3584448"/>
         </p:xfrm>
         <a:graphic>
           <a:graphicData uri="http://schemas.openxmlformats.org/drawingml/2006/table">
@@ -30094,6 +30386,284 @@
                   <a:tcPr>
                     <a:solidFill>
                       <a:srgbClr val="FFFFFF"/>
+                    </a:solidFill>
+                  </a:tcPr>
+                </a:tc>
+              </a:tr>
+              <a:tr h="512064">
+                <a:tc>
+                  <a:txBody>
+                    <a:bodyPr wrap="none"/>
+                    <a:lstStyle/>
+                    <a:p>
+                      <a:pPr algn="ctr"/>
+                      <a:r>
+                        <a:rPr sz="1400" b="0" i="0">
+                          <a:solidFill>
+                            <a:srgbClr val="262626"/>
+                          </a:solidFill>
+                          <a:latin typeface="Arial"/>
+                        </a:rPr>
+                        <a:t>2026</a:t>
+                      </a:r>
+                    </a:p>
+                  </a:txBody>
+                  <a:tcPr>
+                    <a:solidFill>
+                      <a:srgbClr val="F2F2F2"/>
+                    </a:solidFill>
+                  </a:tcPr>
+                </a:tc>
+                <a:tc>
+                  <a:txBody>
+                    <a:bodyPr wrap="none"/>
+                    <a:lstStyle/>
+                    <a:p>
+                      <a:pPr algn="ctr"/>
+                      <a:r>
+                        <a:rPr sz="1400" b="0" i="0">
+                          <a:solidFill>
+                            <a:srgbClr val="262626"/>
+                          </a:solidFill>
+                          <a:latin typeface="Arial"/>
+                        </a:rPr>
+                        <a:t>Aug 29</a:t>
+                      </a:r>
+                    </a:p>
+                  </a:txBody>
+                  <a:tcPr>
+                    <a:solidFill>
+                      <a:srgbClr val="F2F2F2"/>
+                    </a:solidFill>
+                  </a:tcPr>
+                </a:tc>
+                <a:tc>
+                  <a:txBody>
+                    <a:bodyPr wrap="none"/>
+                    <a:lstStyle/>
+                    <a:p>
+                      <a:pPr algn="l"/>
+                      <a:r>
+                        <a:rPr sz="1200" b="0" i="0">
+                          <a:solidFill>
+                            <a:srgbClr val="262626"/>
+                          </a:solidFill>
+                          <a:latin typeface="Arial"/>
+                        </a:rPr>
+                        <a:t>World Championship Series *</a:t>
+                      </a:r>
+                    </a:p>
+                  </a:txBody>
+                  <a:tcPr>
+                    <a:solidFill>
+                      <a:srgbClr val="F2F2F2"/>
+                    </a:solidFill>
+                  </a:tcPr>
+                </a:tc>
+                <a:tc>
+                  <a:txBody>
+                    <a:bodyPr wrap="none"/>
+                    <a:lstStyle/>
+                    <a:p>
+                      <a:pPr algn="ctr"/>
+                      <a:r>
+                        <a:rPr sz="1400" b="0" i="0">
+                          <a:solidFill>
+                            <a:srgbClr val="262626"/>
+                          </a:solidFill>
+                          <a:latin typeface="Arial"/>
+                        </a:rPr>
+                        <a:t>45</a:t>
+                      </a:r>
+                    </a:p>
+                  </a:txBody>
+                  <a:tcPr>
+                    <a:solidFill>
+                      <a:srgbClr val="F2F2F2"/>
+                    </a:solidFill>
+                  </a:tcPr>
+                </a:tc>
+                <a:tc>
+                  <a:txBody>
+                    <a:bodyPr wrap="none"/>
+                    <a:lstStyle/>
+                    <a:p>
+                      <a:pPr algn="ctr"/>
+                      <a:r>
+                        <a:rPr sz="1400" b="0" i="0">
+                          <a:solidFill>
+                            <a:srgbClr val="262626"/>
+                          </a:solidFill>
+                          <a:latin typeface="Arial"/>
+                        </a:rPr>
+                        <a:t>7</a:t>
+                      </a:r>
+                    </a:p>
+                  </a:txBody>
+                  <a:tcPr>
+                    <a:solidFill>
+                      <a:srgbClr val="F2F2F2"/>
+                    </a:solidFill>
+                  </a:tcPr>
+                </a:tc>
+                <a:tc>
+                  <a:txBody>
+                    <a:bodyPr wrap="none"/>
+                    <a:lstStyle/>
+                    <a:p>
+                      <a:pPr algn="l"/>
+                      <a:r>
+                        <a:rPr sz="1400" b="0" i="0">
+                          <a:solidFill>
+                            <a:srgbClr val="262626"/>
+                          </a:solidFill>
+                          <a:latin typeface="Arial"/>
+                        </a:rPr>
+                        <a:t>Studer</a:t>
+                      </a:r>
+                    </a:p>
+                  </a:txBody>
+                  <a:tcPr>
+                    <a:solidFill>
+                      <a:srgbClr val="F2F2F2"/>
+                    </a:solidFill>
+                  </a:tcPr>
+                </a:tc>
+                <a:tc>
+                  <a:txBody>
+                    <a:bodyPr wrap="none"/>
+                    <a:lstStyle/>
+                    <a:p>
+                      <a:pPr algn="ctr"/>
+                      <a:r>
+                        <a:rPr sz="1400" b="0" i="0">
+                          <a:solidFill>
+                            <a:srgbClr val="262626"/>
+                          </a:solidFill>
+                          <a:latin typeface="Arial"/>
+                        </a:rPr>
+                        <a:t>1:41:08</a:t>
+                      </a:r>
+                    </a:p>
+                  </a:txBody>
+                  <a:tcPr>
+                    <a:solidFill>
+                      <a:srgbClr val="F2F2F2"/>
+                    </a:solidFill>
+                  </a:tcPr>
+                </a:tc>
+                <a:tc>
+                  <a:txBody>
+                    <a:bodyPr wrap="none"/>
+                    <a:lstStyle/>
+                    <a:p>
+                      <a:pPr algn="ctr"/>
+                      <a:r>
+                        <a:rPr sz="1400" b="0" i="0">
+                          <a:solidFill>
+                            <a:srgbClr val="262626"/>
+                          </a:solidFill>
+                          <a:latin typeface="Arial"/>
+                        </a:rPr>
+                        <a:t>24.1</a:t>
+                      </a:r>
+                    </a:p>
+                  </a:txBody>
+                  <a:tcPr>
+                    <a:solidFill>
+                      <a:srgbClr val="F2F2F2"/>
+                    </a:solidFill>
+                  </a:tcPr>
+                </a:tc>
+                <a:tc>
+                  <a:txBody>
+                    <a:bodyPr wrap="none"/>
+                    <a:lstStyle/>
+                    <a:p>
+                      <a:pPr algn="ctr"/>
+                      <a:r>
+                        <a:rPr sz="1400" b="0" i="0">
+                          <a:solidFill>
+                            <a:srgbClr val="262626"/>
+                          </a:solidFill>
+                          <a:latin typeface="Arial"/>
+                        </a:rPr>
+                        <a:t>26.3</a:t>
+                      </a:r>
+                    </a:p>
+                  </a:txBody>
+                  <a:tcPr>
+                    <a:solidFill>
+                      <a:srgbClr val="F2F2F2"/>
+                    </a:solidFill>
+                  </a:tcPr>
+                </a:tc>
+                <a:tc>
+                  <a:txBody>
+                    <a:bodyPr wrap="none"/>
+                    <a:lstStyle/>
+                    <a:p>
+                      <a:pPr algn="ctr"/>
+                      <a:r>
+                        <a:rPr sz="1400" b="0" i="0">
+                          <a:solidFill>
+                            <a:srgbClr val="262626"/>
+                          </a:solidFill>
+                          <a:latin typeface="Arial"/>
+                        </a:rPr>
+                        <a:t>1.50</a:t>
+                      </a:r>
+                    </a:p>
+                  </a:txBody>
+                  <a:tcPr>
+                    <a:solidFill>
+                      <a:srgbClr val="F2F2F2"/>
+                    </a:solidFill>
+                  </a:tcPr>
+                </a:tc>
+                <a:tc>
+                  <a:txBody>
+                    <a:bodyPr wrap="none"/>
+                    <a:lstStyle/>
+                    <a:p>
+                      <a:pPr algn="ctr"/>
+                      <a:r>
+                        <a:rPr sz="1400" b="0" i="0">
+                          <a:solidFill>
+                            <a:srgbClr val="262626"/>
+                          </a:solidFill>
+                          <a:latin typeface="Arial"/>
+                        </a:rPr>
+                        <a:t>38.6</a:t>
+                      </a:r>
+                    </a:p>
+                  </a:txBody>
+                  <a:tcPr>
+                    <a:solidFill>
+                      <a:srgbClr val="F2F2F2"/>
+                    </a:solidFill>
+                  </a:tcPr>
+                </a:tc>
+                <a:tc>
+                  <a:txBody>
+                    <a:bodyPr wrap="none"/>
+                    <a:lstStyle/>
+                    <a:p>
+                      <a:pPr algn="ctr"/>
+                      <a:r>
+                        <a:rPr sz="1400" b="0" i="0">
+                          <a:solidFill>
+                            <a:srgbClr val="262626"/>
+                          </a:solidFill>
+                          <a:latin typeface="Arial"/>
+                        </a:rPr>
+                        <a:t>10.0</a:t>
+                      </a:r>
+                    </a:p>
+                  </a:txBody>
+                  <a:tcPr>
+                    <a:solidFill>
+                      <a:srgbClr val="F2F2F2"/>
                     </a:solidFill>
                   </a:tcPr>
                 </a:tc>
@@ -32840,7 +33410,7 @@
                 <a:gridCol w="2286000"/>
                 <a:gridCol w="3822191"/>
               </a:tblGrid>
-              <a:tr h="236220">
+              <a:tr h="202474">
                 <a:tc>
                   <a:txBody>
                     <a:bodyPr wrap="none"/>
@@ -32980,7 +33550,7 @@
                   </a:tcPr>
                 </a:tc>
               </a:tr>
-              <a:tr h="236220">
+              <a:tr h="202474">
                 <a:tc>
                   <a:txBody>
                     <a:bodyPr wrap="none"/>
@@ -33120,7 +33690,7 @@
                   </a:tcPr>
                 </a:tc>
               </a:tr>
-              <a:tr h="236220">
+              <a:tr h="202474">
                 <a:tc>
                   <a:txBody>
                     <a:bodyPr wrap="none"/>
@@ -33260,7 +33830,7 @@
                   </a:tcPr>
                 </a:tc>
               </a:tr>
-              <a:tr h="236220">
+              <a:tr h="202474">
                 <a:tc>
                   <a:txBody>
                     <a:bodyPr wrap="none"/>
@@ -33400,7 +33970,7 @@
                   </a:tcPr>
                 </a:tc>
               </a:tr>
-              <a:tr h="236220">
+              <a:tr h="202474">
                 <a:tc>
                   <a:txBody>
                     <a:bodyPr wrap="none"/>
@@ -33540,7 +34110,7 @@
                   </a:tcPr>
                 </a:tc>
               </a:tr>
-              <a:tr h="236220">
+              <a:tr h="202474">
                 <a:tc>
                   <a:txBody>
                     <a:bodyPr wrap="none"/>
@@ -33676,6 +34246,146 @@
                   <a:tcPr>
                     <a:solidFill>
                       <a:srgbClr val="FFFFFF"/>
+                    </a:solidFill>
+                  </a:tcPr>
+                </a:tc>
+              </a:tr>
+              <a:tr h="202476">
+                <a:tc>
+                  <a:txBody>
+                    <a:bodyPr wrap="none"/>
+                    <a:lstStyle/>
+                    <a:p>
+                      <a:pPr algn="ctr"/>
+                      <a:r>
+                        <a:rPr sz="950" b="0" i="0">
+                          <a:solidFill>
+                            <a:srgbClr val="262626"/>
+                          </a:solidFill>
+                          <a:latin typeface="Arial"/>
+                        </a:rPr>
+                        <a:t>2026</a:t>
+                      </a:r>
+                    </a:p>
+                  </a:txBody>
+                  <a:tcPr>
+                    <a:solidFill>
+                      <a:srgbClr val="F2F2F2"/>
+                    </a:solidFill>
+                  </a:tcPr>
+                </a:tc>
+                <a:tc>
+                  <a:txBody>
+                    <a:bodyPr wrap="none"/>
+                    <a:lstStyle/>
+                    <a:p>
+                      <a:pPr algn="ctr"/>
+                      <a:r>
+                        <a:rPr sz="950" b="0" i="0">
+                          <a:solidFill>
+                            <a:srgbClr val="262626"/>
+                          </a:solidFill>
+                          <a:latin typeface="Arial"/>
+                        </a:rPr>
+                        <a:t>—</a:t>
+                      </a:r>
+                    </a:p>
+                  </a:txBody>
+                  <a:tcPr>
+                    <a:solidFill>
+                      <a:srgbClr val="F2F2F2"/>
+                    </a:solidFill>
+                  </a:tcPr>
+                </a:tc>
+                <a:tc>
+                  <a:txBody>
+                    <a:bodyPr wrap="none"/>
+                    <a:lstStyle/>
+                    <a:p>
+                      <a:pPr algn="ctr"/>
+                      <a:r>
+                        <a:rPr sz="950" b="0" i="0">
+                          <a:solidFill>
+                            <a:srgbClr val="262626"/>
+                          </a:solidFill>
+                          <a:latin typeface="Arial"/>
+                        </a:rPr>
+                        <a:t>—</a:t>
+                      </a:r>
+                    </a:p>
+                  </a:txBody>
+                  <a:tcPr>
+                    <a:solidFill>
+                      <a:srgbClr val="F2F2F2"/>
+                    </a:solidFill>
+                  </a:tcPr>
+                </a:tc>
+                <a:tc>
+                  <a:txBody>
+                    <a:bodyPr wrap="none"/>
+                    <a:lstStyle/>
+                    <a:p>
+                      <a:pPr algn="ctr"/>
+                      <a:r>
+                        <a:rPr sz="950" b="0" i="0">
+                          <a:solidFill>
+                            <a:srgbClr val="262626"/>
+                          </a:solidFill>
+                          <a:latin typeface="Arial"/>
+                        </a:rPr>
+                        <a:t>—</a:t>
+                      </a:r>
+                    </a:p>
+                  </a:txBody>
+                  <a:tcPr>
+                    <a:solidFill>
+                      <a:srgbClr val="F2F2F2"/>
+                    </a:solidFill>
+                  </a:tcPr>
+                </a:tc>
+                <a:tc>
+                  <a:txBody>
+                    <a:bodyPr wrap="none"/>
+                    <a:lstStyle/>
+                    <a:p>
+                      <a:pPr algn="ctr"/>
+                      <a:r>
+                        <a:rPr sz="950" b="0" i="0">
+                          <a:solidFill>
+                            <a:srgbClr val="262626"/>
+                          </a:solidFill>
+                          <a:latin typeface="Arial"/>
+                        </a:rPr>
+                        <a:t>—</a:t>
+                      </a:r>
+                    </a:p>
+                  </a:txBody>
+                  <a:tcPr>
+                    <a:solidFill>
+                      <a:srgbClr val="F2F2F2"/>
+                    </a:solidFill>
+                  </a:tcPr>
+                </a:tc>
+                <a:tc>
+                  <a:txBody>
+                    <a:bodyPr wrap="none"/>
+                    <a:lstStyle/>
+                    <a:p>
+                      <a:pPr algn="ctr"/>
+                      <a:r>
+                        <a:rPr sz="950" b="0" i="0">
+                          <a:solidFill>
+                            <a:srgbClr val="262626"/>
+                          </a:solidFill>
+                          <a:latin typeface="Arial"/>
+                        </a:rPr>
+                        <a:t>—</a:t>
+                      </a:r>
+                    </a:p>
+                  </a:txBody>
+                  <a:tcPr>
+                    <a:solidFill>
+                      <a:srgbClr val="F2F2F2"/>
                     </a:solidFill>
                   </a:tcPr>
                 </a:tc>
@@ -33749,7 +34459,7 @@
                 </a:solidFill>
                 <a:latin typeface="Arial"/>
               </a:rPr>
-              <a:t>Dropouts: 2018: 13 DNF/LAP (1 in lead group at t1)  |  2019: 8 DNF/LAP (1 in lead group at t1)  |  2023: 11 DNF/LAP (2 in lead group at bike)  |  2024: 7 DNF/LAP (1 in lead group at bike)  |  2025: 2 DNF/LAP</a:t>
+              <a:t>Dropouts: 2018: 13 DNF/LAP (1 in lead group at t1)  |  2019: 8 DNF/LAP (1 in lead group at t1)  |  2023: 11 DNF/LAP (2 in lead group at bike)  |  2024: 7 DNF/LAP (1 in lead group at bike)  |  2025: 2 DNF/LAP  |  2026: 7 DNF/LAP (3 in lead group at t1)</a:t>
             </a:r>
           </a:p>
         </p:txBody>
@@ -34294,7 +35004,7 @@
         </p:nvGraphicFramePr>
         <p:xfrm>
           <a:off x="274320" y="4187952"/>
-          <a:ext cx="11640312" cy="2084832"/>
+          <a:ext cx="11640312" cy="2432304"/>
         </p:xfrm>
         <a:graphic>
           <a:graphicData uri="http://schemas.openxmlformats.org/drawingml/2006/table">
@@ -35310,6 +36020,174 @@
                   <a:tcPr>
                     <a:solidFill>
                       <a:srgbClr val="FFFFFF"/>
+                    </a:solidFill>
+                  </a:tcPr>
+                </a:tc>
+              </a:tr>
+              <a:tr h="347472">
+                <a:tc>
+                  <a:txBody>
+                    <a:bodyPr wrap="none"/>
+                    <a:lstStyle/>
+                    <a:p>
+                      <a:pPr algn="ctr"/>
+                      <a:r>
+                        <a:rPr sz="1000" b="1" i="0">
+                          <a:solidFill>
+                            <a:srgbClr val="262626"/>
+                          </a:solidFill>
+                          <a:latin typeface="Arial"/>
+                        </a:rPr>
+                        <a:t>2026</a:t>
+                      </a:r>
+                    </a:p>
+                  </a:txBody>
+                  <a:tcPr>
+                    <a:solidFill>
+                      <a:srgbClr val="F2F2F2"/>
+                    </a:solidFill>
+                  </a:tcPr>
+                </a:tc>
+                <a:tc>
+                  <a:txBody>
+                    <a:bodyPr wrap="none"/>
+                    <a:lstStyle/>
+                    <a:p>
+                      <a:pPr algn="ctr"/>
+                      <a:r>
+                        <a:rPr sz="850" b="0" i="0">
+                          <a:solidFill>
+                            <a:srgbClr val="262626"/>
+                          </a:solidFill>
+                          <a:latin typeface="Arial"/>
+                        </a:rPr>
+                        <a:t>1:41:08</a:t>
+                      </a:r>
+                    </a:p>
+                  </a:txBody>
+                  <a:tcPr>
+                    <a:solidFill>
+                      <a:srgbClr val="F2F2F2"/>
+                    </a:solidFill>
+                  </a:tcPr>
+                </a:tc>
+                <a:tc>
+                  <a:txBody>
+                    <a:bodyPr wrap="none"/>
+                    <a:lstStyle/>
+                    <a:p>
+                      <a:pPr algn="ctr"/>
+                      <a:r>
+                        <a:rPr sz="850" b="0" i="0">
+                          <a:solidFill>
+                            <a:srgbClr val="262626"/>
+                          </a:solidFill>
+                          <a:latin typeface="Arial"/>
+                        </a:rPr>
+                        <a:t>1:41:18
++10s</a:t>
+                      </a:r>
+                    </a:p>
+                  </a:txBody>
+                  <a:tcPr>
+                    <a:solidFill>
+                      <a:srgbClr val="F2F2F2"/>
+                    </a:solidFill>
+                  </a:tcPr>
+                </a:tc>
+                <a:tc>
+                  <a:txBody>
+                    <a:bodyPr wrap="none"/>
+                    <a:lstStyle/>
+                    <a:p>
+                      <a:pPr algn="ctr"/>
+                      <a:r>
+                        <a:rPr sz="850" b="0" i="0">
+                          <a:solidFill>
+                            <a:srgbClr val="262626"/>
+                          </a:solidFill>
+                          <a:latin typeface="Arial"/>
+                        </a:rPr>
+                        <a:t>1:41:25
++17s</a:t>
+                      </a:r>
+                    </a:p>
+                  </a:txBody>
+                  <a:tcPr>
+                    <a:solidFill>
+                      <a:srgbClr val="F2F2F2"/>
+                    </a:solidFill>
+                  </a:tcPr>
+                </a:tc>
+                <a:tc>
+                  <a:txBody>
+                    <a:bodyPr wrap="none"/>
+                    <a:lstStyle/>
+                    <a:p>
+                      <a:pPr algn="ctr"/>
+                      <a:r>
+                        <a:rPr sz="850" b="0" i="0">
+                          <a:solidFill>
+                            <a:srgbClr val="262626"/>
+                          </a:solidFill>
+                          <a:latin typeface="Arial"/>
+                        </a:rPr>
+                        <a:t>1:41:54
++46s</a:t>
+                      </a:r>
+                    </a:p>
+                  </a:txBody>
+                  <a:tcPr>
+                    <a:solidFill>
+                      <a:srgbClr val="F2F2F2"/>
+                    </a:solidFill>
+                  </a:tcPr>
+                </a:tc>
+                <a:tc>
+                  <a:txBody>
+                    <a:bodyPr wrap="none"/>
+                    <a:lstStyle/>
+                    <a:p>
+                      <a:pPr algn="ctr"/>
+                      <a:r>
+                        <a:rPr sz="850" b="0" i="0">
+                          <a:solidFill>
+                            <a:srgbClr val="262626"/>
+                          </a:solidFill>
+                          <a:latin typeface="Arial"/>
+                        </a:rPr>
+                        <a:t>1:42:10
++62s</a:t>
+                      </a:r>
+                    </a:p>
+                  </a:txBody>
+                  <a:tcPr>
+                    <a:solidFill>
+                      <a:srgbClr val="F2F2F2"/>
+                    </a:solidFill>
+                  </a:tcPr>
+                </a:tc>
+                <a:tc>
+                  <a:txBody>
+                    <a:bodyPr wrap="none"/>
+                    <a:lstStyle/>
+                    <a:p>
+                      <a:pPr algn="ctr"/>
+                      <a:r>
+                        <a:rPr sz="850" b="0" i="0">
+                          <a:solidFill>
+                            <a:srgbClr val="262626"/>
+                          </a:solidFill>
+                          <a:latin typeface="Arial"/>
+                        </a:rPr>
+                        <a:t>1:43:18
++130s</a:t>
+                      </a:r>
+                    </a:p>
+                  </a:txBody>
+                  <a:tcPr>
+                    <a:solidFill>
+                      <a:srgbClr val="F2F2F2"/>
                     </a:solidFill>
                   </a:tcPr>
                 </a:tc>
@@ -35569,7 +36447,7 @@
         </p:nvGraphicFramePr>
         <p:xfrm>
           <a:off x="274320" y="1143000"/>
-          <a:ext cx="11640307" cy="2743200"/>
+          <a:ext cx="11640307" cy="3200400"/>
         </p:xfrm>
         <a:graphic>
           <a:graphicData uri="http://schemas.openxmlformats.org/drawingml/2006/table">
@@ -36838,6 +37716,215 @@
                   <a:tcPr>
                     <a:solidFill>
                       <a:srgbClr val="FFFFFF"/>
+                    </a:solidFill>
+                  </a:tcPr>
+                </a:tc>
+              </a:tr>
+              <a:tr h="457200">
+                <a:tc>
+                  <a:txBody>
+                    <a:bodyPr wrap="none"/>
+                    <a:lstStyle/>
+                    <a:p>
+                      <a:pPr algn="ctr"/>
+                      <a:r>
+                        <a:rPr sz="1000" b="0" i="0">
+                          <a:solidFill>
+                            <a:srgbClr val="262626"/>
+                          </a:solidFill>
+                          <a:latin typeface="Arial"/>
+                        </a:rPr>
+                        <a:t>2026</a:t>
+                      </a:r>
+                    </a:p>
+                  </a:txBody>
+                  <a:tcPr>
+                    <a:solidFill>
+                      <a:srgbClr val="F2F2F2"/>
+                    </a:solidFill>
+                  </a:tcPr>
+                </a:tc>
+                <a:tc>
+                  <a:txBody>
+                    <a:bodyPr wrap="none"/>
+                    <a:lstStyle/>
+                    <a:p>
+                      <a:pPr algn="ctr"/>
+                      <a:r>
+                        <a:rPr sz="1000" b="0" i="0">
+                          <a:solidFill>
+                            <a:srgbClr val="262626"/>
+                          </a:solidFill>
+                          <a:latin typeface="Arial"/>
+                        </a:rPr>
+                        <a:t>Aug 29</a:t>
+                      </a:r>
+                    </a:p>
+                  </a:txBody>
+                  <a:tcPr>
+                    <a:solidFill>
+                      <a:srgbClr val="F2F2F2"/>
+                    </a:solidFill>
+                  </a:tcPr>
+                </a:tc>
+                <a:tc>
+                  <a:txBody>
+                    <a:bodyPr wrap="none"/>
+                    <a:lstStyle/>
+                    <a:p>
+                      <a:pPr algn="ctr"/>
+                      <a:r>
+                        <a:rPr sz="1000" b="0" i="0">
+                          <a:solidFill>
+                            <a:srgbClr val="262626"/>
+                          </a:solidFill>
+                          <a:latin typeface="Arial"/>
+                        </a:rPr>
+                        <a:t>24.1</a:t>
+                      </a:r>
+                    </a:p>
+                  </a:txBody>
+                  <a:tcPr>
+                    <a:solidFill>
+                      <a:srgbClr val="F2F2F2"/>
+                    </a:solidFill>
+                  </a:tcPr>
+                </a:tc>
+                <a:tc>
+                  <a:txBody>
+                    <a:bodyPr wrap="none"/>
+                    <a:lstStyle/>
+                    <a:p>
+                      <a:pPr algn="ctr"/>
+                      <a:r>
+                        <a:rPr sz="1000" b="0" i="0">
+                          <a:solidFill>
+                            <a:srgbClr val="262626"/>
+                          </a:solidFill>
+                          <a:latin typeface="Arial"/>
+                        </a:rPr>
+                        <a:t>84%</a:t>
+                      </a:r>
+                    </a:p>
+                  </a:txBody>
+                  <a:tcPr>
+                    <a:solidFill>
+                      <a:srgbClr val="F2F2F2"/>
+                    </a:solidFill>
+                  </a:tcPr>
+                </a:tc>
+                <a:tc>
+                  <a:txBody>
+                    <a:bodyPr wrap="none"/>
+                    <a:lstStyle/>
+                    <a:p>
+                      <a:pPr algn="ctr"/>
+                      <a:r>
+                        <a:rPr sz="1000" b="0" i="0">
+                          <a:solidFill>
+                            <a:srgbClr val="262626"/>
+                          </a:solidFill>
+                          <a:latin typeface="Arial"/>
+                        </a:rPr>
+                        <a:t>9</a:t>
+                      </a:r>
+                    </a:p>
+                  </a:txBody>
+                  <a:tcPr>
+                    <a:solidFill>
+                      <a:srgbClr val="F2F2F2"/>
+                    </a:solidFill>
+                  </a:tcPr>
+                </a:tc>
+                <a:tc>
+                  <a:txBody>
+                    <a:bodyPr wrap="none"/>
+                    <a:lstStyle/>
+                    <a:p>
+                      <a:pPr algn="ctr"/>
+                      <a:r>
+                        <a:rPr sz="1000" b="0" i="0">
+                          <a:solidFill>
+                            <a:srgbClr val="262626"/>
+                          </a:solidFill>
+                          <a:latin typeface="Arial"/>
+                        </a:rPr>
+                        <a:t>1.3</a:t>
+                      </a:r>
+                    </a:p>
+                  </a:txBody>
+                  <a:tcPr>
+                    <a:solidFill>
+                      <a:srgbClr val="F2F2F2"/>
+                    </a:solidFill>
+                  </a:tcPr>
+                </a:tc>
+                <a:tc>
+                  <a:txBody>
+                    <a:bodyPr wrap="none"/>
+                    <a:lstStyle/>
+                    <a:p>
+                      <a:pPr algn="ctr"/>
+                      <a:r>
+                        <a:rPr sz="1000" b="0" i="0">
+                          <a:solidFill>
+                            <a:srgbClr val="262626"/>
+                          </a:solidFill>
+                          <a:latin typeface="Arial"/>
+                        </a:rPr>
+                        <a:t>26.3</a:t>
+                      </a:r>
+                    </a:p>
+                  </a:txBody>
+                  <a:tcPr>
+                    <a:solidFill>
+                      <a:srgbClr val="F2F2F2"/>
+                    </a:solidFill>
+                  </a:tcPr>
+                </a:tc>
+                <a:tc>
+                  <a:txBody>
+                    <a:bodyPr wrap="none"/>
+                    <a:lstStyle/>
+                    <a:p>
+                      <a:pPr algn="ctr"/>
+                      <a:r>
+                        <a:rPr sz="1000" b="0" i="0">
+                          <a:solidFill>
+                            <a:srgbClr val="262626"/>
+                          </a:solidFill>
+                          <a:latin typeface="Arial"/>
+                        </a:rPr>
+                        <a:t>forbidden</a:t>
+                      </a:r>
+                    </a:p>
+                  </a:txBody>
+                  <a:tcPr>
+                    <a:solidFill>
+                      <a:srgbClr val="F2F2F2"/>
+                    </a:solidFill>
+                  </a:tcPr>
+                </a:tc>
+                <a:tc>
+                  <a:txBody>
+                    <a:bodyPr wrap="none"/>
+                    <a:lstStyle/>
+                    <a:p>
+                      <a:pPr algn="l"/>
+                      <a:r>
+                        <a:rPr sz="1000" b="0" i="0">
+                          <a:solidFill>
+                            <a:srgbClr val="262626"/>
+                          </a:solidFill>
+                          <a:latin typeface="Arial"/>
+                        </a:rPr>
+                        <a:t>—</a:t>
+                      </a:r>
+                    </a:p>
+                  </a:txBody>
+                  <a:tcPr>
+                    <a:solidFill>
+                      <a:srgbClr val="F2F2F2"/>
                     </a:solidFill>
                   </a:tcPr>
                 </a:tc>
@@ -37436,7 +38523,7 @@
                 </a:solidFill>
                 <a:latin typeface="Arial"/>
               </a:rPr>
-              <a:t>The Elite Women race at Weihai has been held 5 times in this analysis window (2018–2025). The event is staged as part of the World Cup / World Championship Series calendar.
+              <a:t>The Elite Women race at Weihai has been held 6 times in this analysis window (2018–2026). The event is staged as part of the World Cup / World Championship Series calendar.
 [PLACEHOLDER: Add 1–2 sentences on notable storylines, competitive history, or what makes this event significant for Elite Women athletes. E.g. defending champions, record performances, dramatic finishes.]</a:t>
             </a:r>
           </a:p>
@@ -37776,7 +38863,7 @@
                 </a:solidFill>
                 <a:latin typeface="Arial"/>
               </a:rPr>
-              <a:t>Run speed separates the podium — the fastest run pace averages ~3:28/km with a ~190s spread between fastest and average finisher. Either a pre-built lead from the bike or exceptional run speed is required to win.</a:t>
+              <a:t>Run speed separates the podium — the fastest run pace averages ~3:26/km with a ~195s spread between fastest and average finisher. Either a pre-built lead from the bike or exceptional run speed is required to win.</a:t>
             </a:r>
           </a:p>
         </p:txBody>
@@ -38032,7 +39119,7 @@
         </p:nvGraphicFramePr>
         <p:xfrm>
           <a:off x="274320" y="1143000"/>
-          <a:ext cx="11640307" cy="3072384"/>
+          <a:ext cx="11640307" cy="3584448"/>
         </p:xfrm>
         <a:graphic>
           <a:graphicData uri="http://schemas.openxmlformats.org/drawingml/2006/table">
@@ -39718,6 +40805,284 @@
                   <a:tcPr>
                     <a:solidFill>
                       <a:srgbClr val="FFFFFF"/>
+                    </a:solidFill>
+                  </a:tcPr>
+                </a:tc>
+              </a:tr>
+              <a:tr h="512064">
+                <a:tc>
+                  <a:txBody>
+                    <a:bodyPr wrap="none"/>
+                    <a:lstStyle/>
+                    <a:p>
+                      <a:pPr algn="ctr"/>
+                      <a:r>
+                        <a:rPr sz="1400" b="0" i="0">
+                          <a:solidFill>
+                            <a:srgbClr val="262626"/>
+                          </a:solidFill>
+                          <a:latin typeface="Arial"/>
+                        </a:rPr>
+                        <a:t>2026</a:t>
+                      </a:r>
+                    </a:p>
+                  </a:txBody>
+                  <a:tcPr>
+                    <a:solidFill>
+                      <a:srgbClr val="F2F2F2"/>
+                    </a:solidFill>
+                  </a:tcPr>
+                </a:tc>
+                <a:tc>
+                  <a:txBody>
+                    <a:bodyPr wrap="none"/>
+                    <a:lstStyle/>
+                    <a:p>
+                      <a:pPr algn="ctr"/>
+                      <a:r>
+                        <a:rPr sz="1400" b="0" i="0">
+                          <a:solidFill>
+                            <a:srgbClr val="262626"/>
+                          </a:solidFill>
+                          <a:latin typeface="Arial"/>
+                        </a:rPr>
+                        <a:t>Aug 29</a:t>
+                      </a:r>
+                    </a:p>
+                  </a:txBody>
+                  <a:tcPr>
+                    <a:solidFill>
+                      <a:srgbClr val="F2F2F2"/>
+                    </a:solidFill>
+                  </a:tcPr>
+                </a:tc>
+                <a:tc>
+                  <a:txBody>
+                    <a:bodyPr wrap="none"/>
+                    <a:lstStyle/>
+                    <a:p>
+                      <a:pPr algn="l"/>
+                      <a:r>
+                        <a:rPr sz="1200" b="0" i="0">
+                          <a:solidFill>
+                            <a:srgbClr val="262626"/>
+                          </a:solidFill>
+                          <a:latin typeface="Arial"/>
+                        </a:rPr>
+                        <a:t>World Championship Series *</a:t>
+                      </a:r>
+                    </a:p>
+                  </a:txBody>
+                  <a:tcPr>
+                    <a:solidFill>
+                      <a:srgbClr val="F2F2F2"/>
+                    </a:solidFill>
+                  </a:tcPr>
+                </a:tc>
+                <a:tc>
+                  <a:txBody>
+                    <a:bodyPr wrap="none"/>
+                    <a:lstStyle/>
+                    <a:p>
+                      <a:pPr algn="ctr"/>
+                      <a:r>
+                        <a:rPr sz="1400" b="0" i="0">
+                          <a:solidFill>
+                            <a:srgbClr val="262626"/>
+                          </a:solidFill>
+                          <a:latin typeface="Arial"/>
+                        </a:rPr>
+                        <a:t>41</a:t>
+                      </a:r>
+                    </a:p>
+                  </a:txBody>
+                  <a:tcPr>
+                    <a:solidFill>
+                      <a:srgbClr val="F2F2F2"/>
+                    </a:solidFill>
+                  </a:tcPr>
+                </a:tc>
+                <a:tc>
+                  <a:txBody>
+                    <a:bodyPr wrap="none"/>
+                    <a:lstStyle/>
+                    <a:p>
+                      <a:pPr algn="ctr"/>
+                      <a:r>
+                        <a:rPr sz="1400" b="0" i="0">
+                          <a:solidFill>
+                            <a:srgbClr val="262626"/>
+                          </a:solidFill>
+                          <a:latin typeface="Arial"/>
+                        </a:rPr>
+                        <a:t>3</a:t>
+                      </a:r>
+                    </a:p>
+                  </a:txBody>
+                  <a:tcPr>
+                    <a:solidFill>
+                      <a:srgbClr val="F2F2F2"/>
+                    </a:solidFill>
+                  </a:tcPr>
+                </a:tc>
+                <a:tc>
+                  <a:txBody>
+                    <a:bodyPr wrap="none"/>
+                    <a:lstStyle/>
+                    <a:p>
+                      <a:pPr algn="l"/>
+                      <a:r>
+                        <a:rPr sz="1400" b="0" i="0">
+                          <a:solidFill>
+                            <a:srgbClr val="262626"/>
+                          </a:solidFill>
+                          <a:latin typeface="Arial"/>
+                        </a:rPr>
+                        <a:t>Beaugrand</a:t>
+                      </a:r>
+                    </a:p>
+                  </a:txBody>
+                  <a:tcPr>
+                    <a:solidFill>
+                      <a:srgbClr val="F2F2F2"/>
+                    </a:solidFill>
+                  </a:tcPr>
+                </a:tc>
+                <a:tc>
+                  <a:txBody>
+                    <a:bodyPr wrap="none"/>
+                    <a:lstStyle/>
+                    <a:p>
+                      <a:pPr algn="ctr"/>
+                      <a:r>
+                        <a:rPr sz="1400" b="0" i="0">
+                          <a:solidFill>
+                            <a:srgbClr val="262626"/>
+                          </a:solidFill>
+                          <a:latin typeface="Arial"/>
+                        </a:rPr>
+                        <a:t>1:49:20</a:t>
+                      </a:r>
+                    </a:p>
+                  </a:txBody>
+                  <a:tcPr>
+                    <a:solidFill>
+                      <a:srgbClr val="F2F2F2"/>
+                    </a:solidFill>
+                  </a:tcPr>
+                </a:tc>
+                <a:tc>
+                  <a:txBody>
+                    <a:bodyPr wrap="none"/>
+                    <a:lstStyle/>
+                    <a:p>
+                      <a:pPr algn="ctr"/>
+                      <a:r>
+                        <a:rPr sz="1400" b="0" i="0">
+                          <a:solidFill>
+                            <a:srgbClr val="262626"/>
+                          </a:solidFill>
+                          <a:latin typeface="Arial"/>
+                        </a:rPr>
+                        <a:t>24.7</a:t>
+                      </a:r>
+                    </a:p>
+                  </a:txBody>
+                  <a:tcPr>
+                    <a:solidFill>
+                      <a:srgbClr val="F2F2F2"/>
+                    </a:solidFill>
+                  </a:tcPr>
+                </a:tc>
+                <a:tc>
+                  <a:txBody>
+                    <a:bodyPr wrap="none"/>
+                    <a:lstStyle/>
+                    <a:p>
+                      <a:pPr algn="ctr"/>
+                      <a:r>
+                        <a:rPr sz="1400" b="0" i="0">
+                          <a:solidFill>
+                            <a:srgbClr val="262626"/>
+                          </a:solidFill>
+                          <a:latin typeface="Arial"/>
+                        </a:rPr>
+                        <a:t>26.3</a:t>
+                      </a:r>
+                    </a:p>
+                  </a:txBody>
+                  <a:tcPr>
+                    <a:solidFill>
+                      <a:srgbClr val="F2F2F2"/>
+                    </a:solidFill>
+                  </a:tcPr>
+                </a:tc>
+                <a:tc>
+                  <a:txBody>
+                    <a:bodyPr wrap="none"/>
+                    <a:lstStyle/>
+                    <a:p>
+                      <a:pPr algn="ctr"/>
+                      <a:r>
+                        <a:rPr sz="1400" b="0" i="0">
+                          <a:solidFill>
+                            <a:srgbClr val="262626"/>
+                          </a:solidFill>
+                          <a:latin typeface="Arial"/>
+                        </a:rPr>
+                        <a:t>1.50</a:t>
+                      </a:r>
+                    </a:p>
+                  </a:txBody>
+                  <a:tcPr>
+                    <a:solidFill>
+                      <a:srgbClr val="F2F2F2"/>
+                    </a:solidFill>
+                  </a:tcPr>
+                </a:tc>
+                <a:tc>
+                  <a:txBody>
+                    <a:bodyPr wrap="none"/>
+                    <a:lstStyle/>
+                    <a:p>
+                      <a:pPr algn="ctr"/>
+                      <a:r>
+                        <a:rPr sz="1400" b="0" i="0">
+                          <a:solidFill>
+                            <a:srgbClr val="262626"/>
+                          </a:solidFill>
+                          <a:latin typeface="Arial"/>
+                        </a:rPr>
+                        <a:t>38.6</a:t>
+                      </a:r>
+                    </a:p>
+                  </a:txBody>
+                  <a:tcPr>
+                    <a:solidFill>
+                      <a:srgbClr val="F2F2F2"/>
+                    </a:solidFill>
+                  </a:tcPr>
+                </a:tc>
+                <a:tc>
+                  <a:txBody>
+                    <a:bodyPr wrap="none"/>
+                    <a:lstStyle/>
+                    <a:p>
+                      <a:pPr algn="ctr"/>
+                      <a:r>
+                        <a:rPr sz="1400" b="0" i="0">
+                          <a:solidFill>
+                            <a:srgbClr val="262626"/>
+                          </a:solidFill>
+                          <a:latin typeface="Arial"/>
+                        </a:rPr>
+                        <a:t>10.0</a:t>
+                      </a:r>
+                    </a:p>
+                  </a:txBody>
+                  <a:tcPr>
+                    <a:solidFill>
+                      <a:srgbClr val="F2F2F2"/>
                     </a:solidFill>
                   </a:tcPr>
                 </a:tc>
@@ -40352,7 +41717,7 @@
                 <a:gridCol w="2286000"/>
                 <a:gridCol w="3822191"/>
               </a:tblGrid>
-              <a:tr h="236220">
+              <a:tr h="202474">
                 <a:tc>
                   <a:txBody>
                     <a:bodyPr wrap="none"/>
@@ -40492,7 +41857,7 @@
                   </a:tcPr>
                 </a:tc>
               </a:tr>
-              <a:tr h="236220">
+              <a:tr h="202474">
                 <a:tc>
                   <a:txBody>
                     <a:bodyPr wrap="none"/>
@@ -40632,7 +41997,7 @@
                   </a:tcPr>
                 </a:tc>
               </a:tr>
-              <a:tr h="236220">
+              <a:tr h="202474">
                 <a:tc>
                   <a:txBody>
                     <a:bodyPr wrap="none"/>
@@ -40772,7 +42137,7 @@
                   </a:tcPr>
                 </a:tc>
               </a:tr>
-              <a:tr h="236220">
+              <a:tr h="202474">
                 <a:tc>
                   <a:txBody>
                     <a:bodyPr wrap="none"/>
@@ -40912,7 +42277,7 @@
                   </a:tcPr>
                 </a:tc>
               </a:tr>
-              <a:tr h="236220">
+              <a:tr h="202474">
                 <a:tc>
                   <a:txBody>
                     <a:bodyPr wrap="none"/>
@@ -41052,7 +42417,7 @@
                   </a:tcPr>
                 </a:tc>
               </a:tr>
-              <a:tr h="236220">
+              <a:tr h="202474">
                 <a:tc>
                   <a:txBody>
                     <a:bodyPr wrap="none"/>
@@ -41188,6 +42553,146 @@
                   <a:tcPr>
                     <a:solidFill>
                       <a:srgbClr val="FFFFFF"/>
+                    </a:solidFill>
+                  </a:tcPr>
+                </a:tc>
+              </a:tr>
+              <a:tr h="202476">
+                <a:tc>
+                  <a:txBody>
+                    <a:bodyPr wrap="none"/>
+                    <a:lstStyle/>
+                    <a:p>
+                      <a:pPr algn="ctr"/>
+                      <a:r>
+                        <a:rPr sz="950" b="0" i="0">
+                          <a:solidFill>
+                            <a:srgbClr val="262626"/>
+                          </a:solidFill>
+                          <a:latin typeface="Arial"/>
+                        </a:rPr>
+                        <a:t>2026</a:t>
+                      </a:r>
+                    </a:p>
+                  </a:txBody>
+                  <a:tcPr>
+                    <a:solidFill>
+                      <a:srgbClr val="F2F2F2"/>
+                    </a:solidFill>
+                  </a:tcPr>
+                </a:tc>
+                <a:tc>
+                  <a:txBody>
+                    <a:bodyPr wrap="none"/>
+                    <a:lstStyle/>
+                    <a:p>
+                      <a:pPr algn="ctr"/>
+                      <a:r>
+                        <a:rPr sz="950" b="0" i="0">
+                          <a:solidFill>
+                            <a:srgbClr val="262626"/>
+                          </a:solidFill>
+                          <a:latin typeface="Arial"/>
+                        </a:rPr>
+                        <a:t>—</a:t>
+                      </a:r>
+                    </a:p>
+                  </a:txBody>
+                  <a:tcPr>
+                    <a:solidFill>
+                      <a:srgbClr val="F2F2F2"/>
+                    </a:solidFill>
+                  </a:tcPr>
+                </a:tc>
+                <a:tc>
+                  <a:txBody>
+                    <a:bodyPr wrap="none"/>
+                    <a:lstStyle/>
+                    <a:p>
+                      <a:pPr algn="ctr"/>
+                      <a:r>
+                        <a:rPr sz="950" b="0" i="0">
+                          <a:solidFill>
+                            <a:srgbClr val="262626"/>
+                          </a:solidFill>
+                          <a:latin typeface="Arial"/>
+                        </a:rPr>
+                        <a:t>—</a:t>
+                      </a:r>
+                    </a:p>
+                  </a:txBody>
+                  <a:tcPr>
+                    <a:solidFill>
+                      <a:srgbClr val="F2F2F2"/>
+                    </a:solidFill>
+                  </a:tcPr>
+                </a:tc>
+                <a:tc>
+                  <a:txBody>
+                    <a:bodyPr wrap="none"/>
+                    <a:lstStyle/>
+                    <a:p>
+                      <a:pPr algn="ctr"/>
+                      <a:r>
+                        <a:rPr sz="950" b="0" i="0">
+                          <a:solidFill>
+                            <a:srgbClr val="262626"/>
+                          </a:solidFill>
+                          <a:latin typeface="Arial"/>
+                        </a:rPr>
+                        <a:t>—</a:t>
+                      </a:r>
+                    </a:p>
+                  </a:txBody>
+                  <a:tcPr>
+                    <a:solidFill>
+                      <a:srgbClr val="F2F2F2"/>
+                    </a:solidFill>
+                  </a:tcPr>
+                </a:tc>
+                <a:tc>
+                  <a:txBody>
+                    <a:bodyPr wrap="none"/>
+                    <a:lstStyle/>
+                    <a:p>
+                      <a:pPr algn="ctr"/>
+                      <a:r>
+                        <a:rPr sz="950" b="0" i="0">
+                          <a:solidFill>
+                            <a:srgbClr val="262626"/>
+                          </a:solidFill>
+                          <a:latin typeface="Arial"/>
+                        </a:rPr>
+                        <a:t>—</a:t>
+                      </a:r>
+                    </a:p>
+                  </a:txBody>
+                  <a:tcPr>
+                    <a:solidFill>
+                      <a:srgbClr val="F2F2F2"/>
+                    </a:solidFill>
+                  </a:tcPr>
+                </a:tc>
+                <a:tc>
+                  <a:txBody>
+                    <a:bodyPr wrap="none"/>
+                    <a:lstStyle/>
+                    <a:p>
+                      <a:pPr algn="ctr"/>
+                      <a:r>
+                        <a:rPr sz="950" b="0" i="0">
+                          <a:solidFill>
+                            <a:srgbClr val="262626"/>
+                          </a:solidFill>
+                          <a:latin typeface="Arial"/>
+                        </a:rPr>
+                        <a:t>—</a:t>
+                      </a:r>
+                    </a:p>
+                  </a:txBody>
+                  <a:tcPr>
+                    <a:solidFill>
+                      <a:srgbClr val="F2F2F2"/>
                     </a:solidFill>
                   </a:tcPr>
                 </a:tc>
@@ -41261,7 +42766,7 @@
                 </a:solidFill>
                 <a:latin typeface="Arial"/>
               </a:rPr>
-              <a:t>Dropouts: 2018: 9 DNF/LAP  |  2019: 4 DNF/LAP  |  2023: 7 DNF/LAP  |  2024: 1 DNF/LAP  |  2025: 1 DNF/LAP (1 in lead group at bike)</a:t>
+              <a:t>Dropouts: 2018: 9 DNF/LAP  |  2019: 4 DNF/LAP  |  2023: 7 DNF/LAP  |  2024: 1 DNF/LAP  |  2025: 1 DNF/LAP (1 in lead group at bike)  |  2026: 3 DNF/LAP</a:t>
             </a:r>
           </a:p>
         </p:txBody>
@@ -42981,7 +44486,7 @@
         </p:nvGraphicFramePr>
         <p:xfrm>
           <a:off x="274320" y="4187952"/>
-          <a:ext cx="11640312" cy="2084832"/>
+          <a:ext cx="11640312" cy="2432304"/>
         </p:xfrm>
         <a:graphic>
           <a:graphicData uri="http://schemas.openxmlformats.org/drawingml/2006/table">
@@ -43997,6 +45502,174 @@
                   <a:tcPr>
                     <a:solidFill>
                       <a:srgbClr val="FFFFFF"/>
+                    </a:solidFill>
+                  </a:tcPr>
+                </a:tc>
+              </a:tr>
+              <a:tr h="347472">
+                <a:tc>
+                  <a:txBody>
+                    <a:bodyPr wrap="none"/>
+                    <a:lstStyle/>
+                    <a:p>
+                      <a:pPr algn="ctr"/>
+                      <a:r>
+                        <a:rPr sz="1000" b="1" i="0">
+                          <a:solidFill>
+                            <a:srgbClr val="262626"/>
+                          </a:solidFill>
+                          <a:latin typeface="Arial"/>
+                        </a:rPr>
+                        <a:t>2026</a:t>
+                      </a:r>
+                    </a:p>
+                  </a:txBody>
+                  <a:tcPr>
+                    <a:solidFill>
+                      <a:srgbClr val="F2F2F2"/>
+                    </a:solidFill>
+                  </a:tcPr>
+                </a:tc>
+                <a:tc>
+                  <a:txBody>
+                    <a:bodyPr wrap="none"/>
+                    <a:lstStyle/>
+                    <a:p>
+                      <a:pPr algn="ctr"/>
+                      <a:r>
+                        <a:rPr sz="850" b="0" i="0">
+                          <a:solidFill>
+                            <a:srgbClr val="262626"/>
+                          </a:solidFill>
+                          <a:latin typeface="Arial"/>
+                        </a:rPr>
+                        <a:t>1:49:20</a:t>
+                      </a:r>
+                    </a:p>
+                  </a:txBody>
+                  <a:tcPr>
+                    <a:solidFill>
+                      <a:srgbClr val="F2F2F2"/>
+                    </a:solidFill>
+                  </a:tcPr>
+                </a:tc>
+                <a:tc>
+                  <a:txBody>
+                    <a:bodyPr wrap="none"/>
+                    <a:lstStyle/>
+                    <a:p>
+                      <a:pPr algn="ctr"/>
+                      <a:r>
+                        <a:rPr sz="850" b="0" i="0">
+                          <a:solidFill>
+                            <a:srgbClr val="262626"/>
+                          </a:solidFill>
+                          <a:latin typeface="Arial"/>
+                        </a:rPr>
+                        <a:t>1:49:26
++6s</a:t>
+                      </a:r>
+                    </a:p>
+                  </a:txBody>
+                  <a:tcPr>
+                    <a:solidFill>
+                      <a:srgbClr val="F2F2F2"/>
+                    </a:solidFill>
+                  </a:tcPr>
+                </a:tc>
+                <a:tc>
+                  <a:txBody>
+                    <a:bodyPr wrap="none"/>
+                    <a:lstStyle/>
+                    <a:p>
+                      <a:pPr algn="ctr"/>
+                      <a:r>
+                        <a:rPr sz="850" b="0" i="0">
+                          <a:solidFill>
+                            <a:srgbClr val="262626"/>
+                          </a:solidFill>
+                          <a:latin typeface="Arial"/>
+                        </a:rPr>
+                        <a:t>1:49:44
++24s</a:t>
+                      </a:r>
+                    </a:p>
+                  </a:txBody>
+                  <a:tcPr>
+                    <a:solidFill>
+                      <a:srgbClr val="F2F2F2"/>
+                    </a:solidFill>
+                  </a:tcPr>
+                </a:tc>
+                <a:tc>
+                  <a:txBody>
+                    <a:bodyPr wrap="none"/>
+                    <a:lstStyle/>
+                    <a:p>
+                      <a:pPr algn="ctr"/>
+                      <a:r>
+                        <a:rPr sz="850" b="0" i="0">
+                          <a:solidFill>
+                            <a:srgbClr val="262626"/>
+                          </a:solidFill>
+                          <a:latin typeface="Arial"/>
+                        </a:rPr>
+                        <a:t>1:50:36
++76s</a:t>
+                      </a:r>
+                    </a:p>
+                  </a:txBody>
+                  <a:tcPr>
+                    <a:solidFill>
+                      <a:srgbClr val="F2F2F2"/>
+                    </a:solidFill>
+                  </a:tcPr>
+                </a:tc>
+                <a:tc>
+                  <a:txBody>
+                    <a:bodyPr wrap="none"/>
+                    <a:lstStyle/>
+                    <a:p>
+                      <a:pPr algn="ctr"/>
+                      <a:r>
+                        <a:rPr sz="850" b="0" i="0">
+                          <a:solidFill>
+                            <a:srgbClr val="262626"/>
+                          </a:solidFill>
+                          <a:latin typeface="Arial"/>
+                        </a:rPr>
+                        <a:t>1:51:25
++125s</a:t>
+                      </a:r>
+                    </a:p>
+                  </a:txBody>
+                  <a:tcPr>
+                    <a:solidFill>
+                      <a:srgbClr val="F2F2F2"/>
+                    </a:solidFill>
+                  </a:tcPr>
+                </a:tc>
+                <a:tc>
+                  <a:txBody>
+                    <a:bodyPr wrap="none"/>
+                    <a:lstStyle/>
+                    <a:p>
+                      <a:pPr algn="ctr"/>
+                      <a:r>
+                        <a:rPr sz="850" b="0" i="0">
+                          <a:solidFill>
+                            <a:srgbClr val="262626"/>
+                          </a:solidFill>
+                          <a:latin typeface="Arial"/>
+                        </a:rPr>
+                        <a:t>1:53:06
++226s</a:t>
+                      </a:r>
+                    </a:p>
+                  </a:txBody>
+                  <a:tcPr>
+                    <a:solidFill>
+                      <a:srgbClr val="F2F2F2"/>
                     </a:solidFill>
                   </a:tcPr>
                 </a:tc>
@@ -44256,7 +45929,7 @@
         </p:nvGraphicFramePr>
         <p:xfrm>
           <a:off x="274320" y="1143000"/>
-          <a:ext cx="11640307" cy="2743200"/>
+          <a:ext cx="11640307" cy="3200400"/>
         </p:xfrm>
         <a:graphic>
           <a:graphicData uri="http://schemas.openxmlformats.org/drawingml/2006/table">
@@ -45525,6 +47198,215 @@
                   <a:tcPr>
                     <a:solidFill>
                       <a:srgbClr val="FFFFFF"/>
+                    </a:solidFill>
+                  </a:tcPr>
+                </a:tc>
+              </a:tr>
+              <a:tr h="457200">
+                <a:tc>
+                  <a:txBody>
+                    <a:bodyPr wrap="none"/>
+                    <a:lstStyle/>
+                    <a:p>
+                      <a:pPr algn="ctr"/>
+                      <a:r>
+                        <a:rPr sz="1000" b="0" i="0">
+                          <a:solidFill>
+                            <a:srgbClr val="262626"/>
+                          </a:solidFill>
+                          <a:latin typeface="Arial"/>
+                        </a:rPr>
+                        <a:t>2026</a:t>
+                      </a:r>
+                    </a:p>
+                  </a:txBody>
+                  <a:tcPr>
+                    <a:solidFill>
+                      <a:srgbClr val="F2F2F2"/>
+                    </a:solidFill>
+                  </a:tcPr>
+                </a:tc>
+                <a:tc>
+                  <a:txBody>
+                    <a:bodyPr wrap="none"/>
+                    <a:lstStyle/>
+                    <a:p>
+                      <a:pPr algn="ctr"/>
+                      <a:r>
+                        <a:rPr sz="1000" b="0" i="0">
+                          <a:solidFill>
+                            <a:srgbClr val="262626"/>
+                          </a:solidFill>
+                          <a:latin typeface="Arial"/>
+                        </a:rPr>
+                        <a:t>Aug 29</a:t>
+                      </a:r>
+                    </a:p>
+                  </a:txBody>
+                  <a:tcPr>
+                    <a:solidFill>
+                      <a:srgbClr val="F2F2F2"/>
+                    </a:solidFill>
+                  </a:tcPr>
+                </a:tc>
+                <a:tc>
+                  <a:txBody>
+                    <a:bodyPr wrap="none"/>
+                    <a:lstStyle/>
+                    <a:p>
+                      <a:pPr algn="ctr"/>
+                      <a:r>
+                        <a:rPr sz="1000" b="0" i="0">
+                          <a:solidFill>
+                            <a:srgbClr val="262626"/>
+                          </a:solidFill>
+                          <a:latin typeface="Arial"/>
+                        </a:rPr>
+                        <a:t>24.7</a:t>
+                      </a:r>
+                    </a:p>
+                  </a:txBody>
+                  <a:tcPr>
+                    <a:solidFill>
+                      <a:srgbClr val="F2F2F2"/>
+                    </a:solidFill>
+                  </a:tcPr>
+                </a:tc>
+                <a:tc>
+                  <a:txBody>
+                    <a:bodyPr wrap="none"/>
+                    <a:lstStyle/>
+                    <a:p>
+                      <a:pPr algn="ctr"/>
+                      <a:r>
+                        <a:rPr sz="1000" b="0" i="0">
+                          <a:solidFill>
+                            <a:srgbClr val="262626"/>
+                          </a:solidFill>
+                          <a:latin typeface="Arial"/>
+                        </a:rPr>
+                        <a:t>84%</a:t>
+                      </a:r>
+                    </a:p>
+                  </a:txBody>
+                  <a:tcPr>
+                    <a:solidFill>
+                      <a:srgbClr val="F2F2F2"/>
+                    </a:solidFill>
+                  </a:tcPr>
+                </a:tc>
+                <a:tc>
+                  <a:txBody>
+                    <a:bodyPr wrap="none"/>
+                    <a:lstStyle/>
+                    <a:p>
+                      <a:pPr algn="ctr"/>
+                      <a:r>
+                        <a:rPr sz="1000" b="0" i="0">
+                          <a:solidFill>
+                            <a:srgbClr val="262626"/>
+                          </a:solidFill>
+                          <a:latin typeface="Arial"/>
+                        </a:rPr>
+                        <a:t>9</a:t>
+                      </a:r>
+                    </a:p>
+                  </a:txBody>
+                  <a:tcPr>
+                    <a:solidFill>
+                      <a:srgbClr val="F2F2F2"/>
+                    </a:solidFill>
+                  </a:tcPr>
+                </a:tc>
+                <a:tc>
+                  <a:txBody>
+                    <a:bodyPr wrap="none"/>
+                    <a:lstStyle/>
+                    <a:p>
+                      <a:pPr algn="ctr"/>
+                      <a:r>
+                        <a:rPr sz="1000" b="0" i="0">
+                          <a:solidFill>
+                            <a:srgbClr val="262626"/>
+                          </a:solidFill>
+                          <a:latin typeface="Arial"/>
+                        </a:rPr>
+                        <a:t>1.3</a:t>
+                      </a:r>
+                    </a:p>
+                  </a:txBody>
+                  <a:tcPr>
+                    <a:solidFill>
+                      <a:srgbClr val="F2F2F2"/>
+                    </a:solidFill>
+                  </a:tcPr>
+                </a:tc>
+                <a:tc>
+                  <a:txBody>
+                    <a:bodyPr wrap="none"/>
+                    <a:lstStyle/>
+                    <a:p>
+                      <a:pPr algn="ctr"/>
+                      <a:r>
+                        <a:rPr sz="1000" b="0" i="0">
+                          <a:solidFill>
+                            <a:srgbClr val="262626"/>
+                          </a:solidFill>
+                          <a:latin typeface="Arial"/>
+                        </a:rPr>
+                        <a:t>26.3</a:t>
+                      </a:r>
+                    </a:p>
+                  </a:txBody>
+                  <a:tcPr>
+                    <a:solidFill>
+                      <a:srgbClr val="F2F2F2"/>
+                    </a:solidFill>
+                  </a:tcPr>
+                </a:tc>
+                <a:tc>
+                  <a:txBody>
+                    <a:bodyPr wrap="none"/>
+                    <a:lstStyle/>
+                    <a:p>
+                      <a:pPr algn="ctr"/>
+                      <a:r>
+                        <a:rPr sz="1000" b="0" i="0">
+                          <a:solidFill>
+                            <a:srgbClr val="262626"/>
+                          </a:solidFill>
+                          <a:latin typeface="Arial"/>
+                        </a:rPr>
+                        <a:t>forbidden</a:t>
+                      </a:r>
+                    </a:p>
+                  </a:txBody>
+                  <a:tcPr>
+                    <a:solidFill>
+                      <a:srgbClr val="F2F2F2"/>
+                    </a:solidFill>
+                  </a:tcPr>
+                </a:tc>
+                <a:tc>
+                  <a:txBody>
+                    <a:bodyPr wrap="none"/>
+                    <a:lstStyle/>
+                    <a:p>
+                      <a:pPr algn="l"/>
+                      <a:r>
+                        <a:rPr sz="1000" b="0" i="0">
+                          <a:solidFill>
+                            <a:srgbClr val="262626"/>
+                          </a:solidFill>
+                          <a:latin typeface="Arial"/>
+                        </a:rPr>
+                        <a:t>—</a:t>
+                      </a:r>
+                    </a:p>
+                  </a:txBody>
+                  <a:tcPr>
+                    <a:solidFill>
+                      <a:srgbClr val="F2F2F2"/>
                     </a:solidFill>
                   </a:tcPr>
                 </a:tc>
@@ -45956,7 +47838,7 @@
                 </a:solidFill>
                 <a:latin typeface="Arial"/>
               </a:rPr>
-              <a:t>Source: [PLACEHOLDER: World Triathlon event page URL]</a:t>
+              <a:t>Source: https://www.triathlon.org/events/event/2026_world_triathlon_championship_series_weihai</a:t>
             </a:r>
           </a:p>
         </p:txBody>
@@ -46108,7 +47990,7 @@
                 </a:solidFill>
                 <a:latin typeface="Arial"/>
               </a:rPr>
-              <a:t>Source: https://www.triathlon.org/events/event/2025_world_triathlon_championship_series_weihai</a:t>
+              <a:t>Source: https://www.triathlon.org/events/event/2026_world_triathlon_championship_series_weihai</a:t>
             </a:r>
           </a:p>
         </p:txBody>
@@ -46362,7 +48244,7 @@
                           </a:solidFill>
                           <a:latin typeface="Arial"/>
                         </a:rPr>
-                        <a:t>38.0 km</a:t>
+                        <a:t>38.6 km</a:t>
                       </a:r>
                     </a:p>
                   </a:txBody>
@@ -47385,7 +49267,7 @@
                 </a:solidFill>
                 <a:latin typeface="Arial"/>
               </a:rPr>
-              <a:t>27.6 °C (7-yr avg)</a:t>
+              <a:t>27.8 °C (live)</a:t>
             </a:r>
           </a:p>
         </p:txBody>
@@ -51282,7 +53164,7 @@
                 </a:solidFill>
                 <a:latin typeface="Arial"/>
               </a:rPr>
-              <a:t>2026-08-29   •   Historical climatology — same calendar day, 7-year mean</a:t>
+              <a:t>2026-08-29   •   Forward forecast — Open-Meteo (≤16 days)</a:t>
             </a:r>
           </a:p>
         </p:txBody>
@@ -51499,7 +53381,7 @@
                 </a:solidFill>
                 <a:latin typeface="Arial"/>
               </a:rPr>
-              <a:t>24.5 °C</a:t>
+              <a:t>22.7 °C</a:t>
             </a:r>
           </a:p>
         </p:txBody>
@@ -51614,7 +53496,7 @@
                 </a:solidFill>
                 <a:latin typeface="Arial"/>
               </a:rPr>
-              <a:t>26.6 °C</a:t>
+              <a:t>25.9 °C</a:t>
             </a:r>
           </a:p>
         </p:txBody>
@@ -51729,7 +53611,7 @@
                 </a:solidFill>
                 <a:latin typeface="Arial"/>
               </a:rPr>
-              <a:t>78%</a:t>
+              <a:t>92%</a:t>
             </a:r>
           </a:p>
         </p:txBody>
@@ -51844,7 +53726,7 @@
                 </a:solidFill>
                 <a:latin typeface="Arial"/>
               </a:rPr>
-              <a:t>14.9 km/h</a:t>
+              <a:t>9.3 km/h</a:t>
             </a:r>
           </a:p>
         </p:txBody>
@@ -51959,7 +53841,7 @@
                 </a:solidFill>
                 <a:latin typeface="Arial"/>
               </a:rPr>
-              <a:t>—</a:t>
+              <a:t>5.5</a:t>
             </a:r>
           </a:p>
         </p:txBody>
@@ -52267,7 +54149,7 @@
                 </a:solidFill>
                 <a:latin typeface="Arial"/>
               </a:rPr>
-              <a:t>25.0 °C</a:t>
+              <a:t>24.9 °C</a:t>
             </a:r>
           </a:p>
         </p:txBody>
@@ -52382,7 +54264,7 @@
                 </a:solidFill>
                 <a:latin typeface="Arial"/>
               </a:rPr>
-              <a:t>27.3 °C</a:t>
+              <a:t>27.9 °C</a:t>
             </a:r>
           </a:p>
         </p:txBody>
@@ -52497,7 +54379,7 @@
                 </a:solidFill>
                 <a:latin typeface="Arial"/>
               </a:rPr>
-              <a:t>74%</a:t>
+              <a:t>76%</a:t>
             </a:r>
           </a:p>
         </p:txBody>
@@ -52612,7 +54494,7 @@
                 </a:solidFill>
                 <a:latin typeface="Arial"/>
               </a:rPr>
-              <a:t>14.4 km/h</a:t>
+              <a:t>8.3 km/h</a:t>
             </a:r>
           </a:p>
         </p:txBody>
@@ -52727,7 +54609,7 @@
                 </a:solidFill>
                 <a:latin typeface="Arial"/>
               </a:rPr>
-              <a:t>—</a:t>
+              <a:t>4.0</a:t>
             </a:r>
           </a:p>
         </p:txBody>
@@ -52990,7 +54872,7 @@
                 </a:solidFill>
                 <a:latin typeface="Arial"/>
               </a:rPr>
-              <a:t>•  Notable wind (15 km/h) — drafting protection matters on exposed coastal bike sections; sight more frequently in chop</a:t>
+              <a:t>•  Men's race runs 2.2 °C hotter than women's — heat-acclim work + heavier cooling kit for the 12:00 start</a:t>
             </a:r>
           </a:p>
         </p:txBody>
@@ -53025,7 +54907,7 @@
                 </a:solidFill>
                 <a:latin typeface="Arial"/>
               </a:rPr>
-              <a:t>Data source: Open-Meteo. Forecast will replace climatology once race day is within 16 days. Historical Race Conditions slide shows what actually happened in prior years.</a:t>
+              <a:t>Data source: Open-Meteo. Forecast refreshes every run. Historical Race Conditions slide shows what actually happened in prior years.</a:t>
             </a:r>
           </a:p>
         </p:txBody>
